--- a/第2章-星载雷达测高原理-2学时/第2章-星载雷达测高原理-2学时.pptx
+++ b/第2章-星载雷达测高原理-2学时/第2章-星载雷达测高原理-2学时.pptx
@@ -32,7 +32,7 @@
     <p:sldId id="2777" r:id="rId20"/>
     <p:sldId id="2758" r:id="rId21"/>
     <p:sldId id="2771" r:id="rId22"/>
-    <p:sldId id="2778" r:id="rId23"/>
+    <p:sldId id="2784" r:id="rId23"/>
     <p:sldId id="2779" r:id="rId24"/>
     <p:sldId id="2780" r:id="rId25"/>
     <p:sldId id="2782" r:id="rId26"/>
@@ -7312,14 +7312,14 @@
           <a:bodyPr/>
           <a:lstStyle/>
           <a:p>
-            <a:endParaRPr lang="zh-CN" altLang="en-US"/>
+            <a:endParaRPr lang="zh-CN" altLang="en-US" dirty="0"/>
           </a:p>
         </p:txBody>
       </p:sp>
     </p:spTree>
     <p:extLst>
       <p:ext uri="{BB962C8B-B14F-4D97-AF65-F5344CB8AC3E}">
-        <p14:creationId xmlns:p14="http://schemas.microsoft.com/office/powerpoint/2010/main" val="3831663381"/>
+        <p14:creationId xmlns:p14="http://schemas.microsoft.com/office/powerpoint/2010/main" val="400371221"/>
       </p:ext>
     </p:extLst>
   </p:cSld>
@@ -15946,7 +15946,7 @@
               </a:lnSpc>
             </a:pPr>
             <a:r>
-              <a:rPr lang="zh-CN" altLang="en-US" sz="2000">
+              <a:rPr lang="zh-CN" altLang="en-US" sz="2000" dirty="0">
                 <a:solidFill>
                   <a:schemeClr val="accent2"/>
                 </a:solidFill>
@@ -15956,7 +15956,7 @@
               <a:t>卫星测高技术需要同时具有</a:t>
             </a:r>
             <a:r>
-              <a:rPr lang="zh-CN" altLang="en-US" sz="2000" b="1" u="sng">
+              <a:rPr lang="zh-CN" altLang="en-US" sz="2000" b="1" u="sng" dirty="0">
                 <a:solidFill>
                   <a:schemeClr val="accent2"/>
                 </a:solidFill>
@@ -15966,7 +15966,7 @@
               <a:t>精确测距</a:t>
             </a:r>
             <a:r>
-              <a:rPr lang="zh-CN" altLang="en-US" sz="2000">
+              <a:rPr lang="zh-CN" altLang="en-US" sz="2000" dirty="0">
                 <a:solidFill>
                   <a:schemeClr val="accent2"/>
                 </a:solidFill>
@@ -15976,7 +15976,7 @@
               <a:t>与</a:t>
             </a:r>
             <a:r>
-              <a:rPr lang="zh-CN" altLang="en-US" sz="2000" b="1" u="sng">
+              <a:rPr lang="zh-CN" altLang="en-US" sz="2000" b="1" u="sng" dirty="0">
                 <a:solidFill>
                   <a:schemeClr val="accent2"/>
                 </a:solidFill>
@@ -15986,7 +15986,7 @@
               <a:t>精确定轨</a:t>
             </a:r>
             <a:r>
-              <a:rPr lang="zh-CN" altLang="en-US" sz="2000">
+              <a:rPr lang="zh-CN" altLang="en-US" sz="2000" dirty="0">
                 <a:solidFill>
                   <a:schemeClr val="accent2"/>
                 </a:solidFill>
@@ -15995,7 +15995,7 @@
               </a:rPr>
               <a:t>的能力。</a:t>
             </a:r>
-            <a:endParaRPr lang="en-CN" sz="2000">
+            <a:endParaRPr lang="en-CN" sz="2000" dirty="0">
               <a:solidFill>
                 <a:schemeClr val="accent2"/>
               </a:solidFill>
@@ -16994,14 +16994,14 @@
                         <m:t>𝐷</m:t>
                       </m:r>
                       <m:r>
-                        <a:rPr lang="en-US" altLang="zh-CN" i="1">
+                        <a:rPr lang="en-US" altLang="zh-CN" b="0" i="1" smtClean="0">
                           <a:solidFill>
                             <a:schemeClr val="bg2"/>
                           </a:solidFill>
                           <a:latin typeface="Cambria Math" panose="02040503050406030204" pitchFamily="18" charset="0"/>
                           <a:ea typeface="Cambria Math" panose="02040503050406030204" pitchFamily="18" charset="0"/>
                         </a:rPr>
-                        <m:t>−</m:t>
+                        <m:t>+</m:t>
                       </m:r>
                       <m:sSub>
                         <m:sSubPr>
@@ -17043,7 +17043,7 @@
                     </m:oMath>
                   </m:oMathPara>
                 </a14:m>
-                <a:endParaRPr lang="en-CN">
+                <a:endParaRPr lang="en-CN" dirty="0">
                   <a:solidFill>
                     <a:schemeClr val="bg2"/>
                   </a:solidFill>
@@ -17078,7 +17078,7 @@
               <a:blipFill>
                 <a:blip r:embed="rId6"/>
                 <a:stretch>
-                  <a:fillRect b="-18333"/>
+                  <a:fillRect b="-16667"/>
                 </a:stretch>
               </a:blipFill>
             </p:spPr>
@@ -17087,7 +17087,7 @@
               <a:lstStyle/>
               <a:p>
                 <a:r>
-                  <a:rPr lang="en-US">
+                  <a:rPr lang="en-CN">
                     <a:noFill/>
                   </a:rPr>
                   <a:t> </a:t>
@@ -17158,7 +17158,7 @@
                 <a:latin typeface="+mn-ea"/>
                 <a:ea typeface="+mn-ea"/>
               </a:rPr>
-              <a:t>在卫星轨道上，星载雷达向天底方向发射高频的脉冲信号，并接收地球表面反射的回波。之后，卫星通过比对分析得到信号的往返时间</a:t>
+              <a:t>在卫星轨道上，星载雷达向天底方向发射高频的脉冲信号，并接收地球表面反射的回波。之后，卫星通过对比分析得到信号的往返时间</a:t>
             </a:r>
             <a:r>
               <a:rPr lang="zh-CN" altLang="en-US" sz="2000" dirty="0">
@@ -17691,10 +17691,10 @@
       </p:sp>
       <p:grpSp>
         <p:nvGrpSpPr>
-          <p:cNvPr id="51" name="Group 50">
+          <p:cNvPr id="26" name="Group 25">
             <a:extLst>
               <a:ext uri="{FF2B5EF4-FFF2-40B4-BE49-F238E27FC236}">
-                <a16:creationId xmlns:a16="http://schemas.microsoft.com/office/drawing/2014/main" id="{9F158E67-4241-8724-DD9B-E409D703629B}"/>
+                <a16:creationId xmlns:a16="http://schemas.microsoft.com/office/drawing/2014/main" id="{AF6B05A6-EC68-A000-5978-5201459C7514}"/>
               </a:ext>
             </a:extLst>
           </p:cNvPr>
@@ -17703,871 +17703,129 @@
         </p:nvGrpSpPr>
         <p:grpSpPr>
           <a:xfrm>
-            <a:off x="3456344" y="1219125"/>
-            <a:ext cx="5087062" cy="6988252"/>
-            <a:chOff x="4094746" y="1914988"/>
-            <a:chExt cx="5087062" cy="6988252"/>
+            <a:off x="3868283" y="1516063"/>
+            <a:ext cx="4675123" cy="6691314"/>
+            <a:chOff x="5068763" y="1585167"/>
+            <a:chExt cx="4675123" cy="6691314"/>
           </a:xfrm>
         </p:grpSpPr>
-        <p:grpSp>
-          <p:nvGrpSpPr>
-            <p:cNvPr id="26" name="Group 25">
+        <p:pic>
+          <p:nvPicPr>
+            <p:cNvPr id="27" name="Picture 26" descr="A picture containing dark&#10;&#10;Description automatically generated">
               <a:extLst>
                 <a:ext uri="{FF2B5EF4-FFF2-40B4-BE49-F238E27FC236}">
-                  <a16:creationId xmlns:a16="http://schemas.microsoft.com/office/drawing/2014/main" id="{AF6B05A6-EC68-A000-5978-5201459C7514}"/>
+                  <a16:creationId xmlns:a16="http://schemas.microsoft.com/office/drawing/2014/main" id="{DFFBE064-8A6B-EC67-5F5F-20558D85E836}"/>
                 </a:ext>
               </a:extLst>
             </p:cNvPr>
-            <p:cNvGrpSpPr/>
+            <p:cNvPicPr>
+              <a:picLocks noChangeAspect="1"/>
+            </p:cNvPicPr>
             <p:nvPr/>
-          </p:nvGrpSpPr>
-          <p:grpSpPr>
+          </p:nvPicPr>
+          <p:blipFill>
+            <a:blip r:embed="rId3"/>
+            <a:stretch>
+              <a:fillRect/>
+            </a:stretch>
+          </p:blipFill>
+          <p:spPr>
             <a:xfrm>
-              <a:off x="4506685" y="2211926"/>
-              <a:ext cx="4675123" cy="6691314"/>
-              <a:chOff x="5068763" y="1585167"/>
-              <a:chExt cx="4675123" cy="6691314"/>
+              <a:off x="6438901" y="1585167"/>
+              <a:ext cx="780524" cy="486252"/>
             </a:xfrm>
-          </p:grpSpPr>
-          <p:pic>
-            <p:nvPicPr>
-              <p:cNvPr id="27" name="Picture 26" descr="A picture containing dark&#10;&#10;Description automatically generated">
-                <a:extLst>
-                  <a:ext uri="{FF2B5EF4-FFF2-40B4-BE49-F238E27FC236}">
-                    <a16:creationId xmlns:a16="http://schemas.microsoft.com/office/drawing/2014/main" id="{DFFBE064-8A6B-EC67-5F5F-20558D85E836}"/>
-                  </a:ext>
-                </a:extLst>
-              </p:cNvPr>
-              <p:cNvPicPr>
-                <a:picLocks noChangeAspect="1"/>
-              </p:cNvPicPr>
-              <p:nvPr/>
-            </p:nvPicPr>
-            <p:blipFill>
-              <a:blip r:embed="rId3"/>
-              <a:stretch>
-                <a:fillRect/>
-              </a:stretch>
-            </p:blipFill>
-            <p:spPr>
-              <a:xfrm>
-                <a:off x="6438901" y="1585167"/>
-                <a:ext cx="780524" cy="486252"/>
-              </a:xfrm>
-              <a:prstGeom prst="rect">
-                <a:avLst/>
-              </a:prstGeom>
-            </p:spPr>
-          </p:pic>
-          <p:sp>
-            <p:nvSpPr>
-              <p:cNvPr id="28" name="Arc 27">
-                <a:extLst>
-                  <a:ext uri="{FF2B5EF4-FFF2-40B4-BE49-F238E27FC236}">
-                    <a16:creationId xmlns:a16="http://schemas.microsoft.com/office/drawing/2014/main" id="{D75FBADC-81C7-0206-4D33-20B628C37229}"/>
-                  </a:ext>
-                </a:extLst>
-              </p:cNvPr>
-              <p:cNvSpPr/>
-              <p:nvPr/>
-            </p:nvSpPr>
-            <p:spPr bwMode="auto">
-              <a:xfrm rot="17781206">
-                <a:off x="5751103" y="4283697"/>
-                <a:ext cx="3310444" cy="4675123"/>
-              </a:xfrm>
-              <a:prstGeom prst="arc">
-                <a:avLst>
-                  <a:gd name="adj1" fmla="val 16972610"/>
-                  <a:gd name="adj2" fmla="val 0"/>
-                </a:avLst>
-              </a:prstGeom>
-              <a:ln>
-                <a:headEnd type="none" w="med" len="med"/>
-                <a:tailEnd type="none" w="med" len="med"/>
-              </a:ln>
-            </p:spPr>
-            <p:style>
-              <a:lnRef idx="1">
-                <a:schemeClr val="dk1"/>
-              </a:lnRef>
-              <a:fillRef idx="0">
-                <a:schemeClr val="dk1"/>
-              </a:fillRef>
-              <a:effectRef idx="0">
-                <a:schemeClr val="dk1"/>
-              </a:effectRef>
-              <a:fontRef idx="minor">
-                <a:schemeClr val="tx1"/>
-              </a:fontRef>
-            </p:style>
-            <p:txBody>
-              <a:bodyPr vert="horz" wrap="square" lIns="0" tIns="0" rIns="0" bIns="0" numCol="1" rtlCol="0" anchor="t" anchorCtr="0" compatLnSpc="1">
-                <a:prstTxWarp prst="textNoShape">
-                  <a:avLst/>
-                </a:prstTxWarp>
-                <a:spAutoFit/>
-              </a:bodyPr>
-              <a:lstStyle/>
-              <a:p>
-                <a:pPr marL="0" marR="0" indent="0" algn="ctr" defTabSz="914400" rtl="0" eaLnBrk="1" fontAlgn="base" latinLnBrk="0" hangingPunct="1">
-                  <a:lnSpc>
-                    <a:spcPct val="100000"/>
-                  </a:lnSpc>
-                  <a:spcBef>
-                    <a:spcPct val="50000"/>
-                  </a:spcBef>
-                  <a:spcAft>
-                    <a:spcPct val="0"/>
-                  </a:spcAft>
-                  <a:buClrTx/>
-                  <a:buSzTx/>
-                  <a:buFontTx/>
-                  <a:buNone/>
-                  <a:tabLst/>
-                </a:pPr>
-                <a:endParaRPr kumimoji="0" lang="en-CN" sz="2400" b="0" i="0" u="none" strike="noStrike" cap="none" normalizeH="0" baseline="0">
-                  <a:ln>
-                    <a:noFill/>
-                  </a:ln>
-                  <a:solidFill>
-                    <a:schemeClr val="tx1"/>
-                  </a:solidFill>
-                  <a:effectLst/>
-                  <a:latin typeface="Times New Roman" pitchFamily="18" charset="0"/>
-                  <a:ea typeface="宋体" pitchFamily="2" charset="-122"/>
-                </a:endParaRPr>
-              </a:p>
-            </p:txBody>
-          </p:sp>
-          <p:sp>
-            <p:nvSpPr>
-              <p:cNvPr id="29" name="Freeform 28">
-                <a:extLst>
-                  <a:ext uri="{FF2B5EF4-FFF2-40B4-BE49-F238E27FC236}">
-                    <a16:creationId xmlns:a16="http://schemas.microsoft.com/office/drawing/2014/main" id="{86B8A217-8479-53C1-7C7F-6B313573304A}"/>
-                  </a:ext>
-                </a:extLst>
-              </p:cNvPr>
-              <p:cNvSpPr/>
-              <p:nvPr/>
-            </p:nvSpPr>
-            <p:spPr>
-              <a:xfrm>
-                <a:off x="5390682" y="4165710"/>
-                <a:ext cx="2722880" cy="567059"/>
-              </a:xfrm>
-              <a:custGeom>
-                <a:avLst/>
-                <a:gdLst>
-                  <a:gd name="connsiteX0" fmla="*/ 0 w 2722880"/>
-                  <a:gd name="connsiteY0" fmla="*/ 516259 h 567059"/>
-                  <a:gd name="connsiteX1" fmla="*/ 274320 w 2722880"/>
-                  <a:gd name="connsiteY1" fmla="*/ 414659 h 567059"/>
-                  <a:gd name="connsiteX2" fmla="*/ 538480 w 2722880"/>
-                  <a:gd name="connsiteY2" fmla="*/ 414659 h 567059"/>
-                  <a:gd name="connsiteX3" fmla="*/ 721360 w 2722880"/>
-                  <a:gd name="connsiteY3" fmla="*/ 333379 h 567059"/>
-                  <a:gd name="connsiteX4" fmla="*/ 955040 w 2722880"/>
-                  <a:gd name="connsiteY4" fmla="*/ 262259 h 567059"/>
-                  <a:gd name="connsiteX5" fmla="*/ 1300480 w 2722880"/>
-                  <a:gd name="connsiteY5" fmla="*/ 28579 h 567059"/>
-                  <a:gd name="connsiteX6" fmla="*/ 1656080 w 2722880"/>
-                  <a:gd name="connsiteY6" fmla="*/ 18419 h 567059"/>
-                  <a:gd name="connsiteX7" fmla="*/ 2052320 w 2722880"/>
-                  <a:gd name="connsiteY7" fmla="*/ 160659 h 567059"/>
-                  <a:gd name="connsiteX8" fmla="*/ 2255520 w 2722880"/>
-                  <a:gd name="connsiteY8" fmla="*/ 353699 h 567059"/>
-                  <a:gd name="connsiteX9" fmla="*/ 2641600 w 2722880"/>
-                  <a:gd name="connsiteY9" fmla="*/ 465459 h 567059"/>
-                  <a:gd name="connsiteX10" fmla="*/ 2722880 w 2722880"/>
-                  <a:gd name="connsiteY10" fmla="*/ 567059 h 567059"/>
-                </a:gdLst>
-                <a:ahLst/>
-                <a:cxnLst>
-                  <a:cxn ang="0">
-                    <a:pos x="connsiteX0" y="connsiteY0"/>
-                  </a:cxn>
-                  <a:cxn ang="0">
-                    <a:pos x="connsiteX1" y="connsiteY1"/>
-                  </a:cxn>
-                  <a:cxn ang="0">
-                    <a:pos x="connsiteX2" y="connsiteY2"/>
-                  </a:cxn>
-                  <a:cxn ang="0">
-                    <a:pos x="connsiteX3" y="connsiteY3"/>
-                  </a:cxn>
-                  <a:cxn ang="0">
-                    <a:pos x="connsiteX4" y="connsiteY4"/>
-                  </a:cxn>
-                  <a:cxn ang="0">
-                    <a:pos x="connsiteX5" y="connsiteY5"/>
-                  </a:cxn>
-                  <a:cxn ang="0">
-                    <a:pos x="connsiteX6" y="connsiteY6"/>
-                  </a:cxn>
-                  <a:cxn ang="0">
-                    <a:pos x="connsiteX7" y="connsiteY7"/>
-                  </a:cxn>
-                  <a:cxn ang="0">
-                    <a:pos x="connsiteX8" y="connsiteY8"/>
-                  </a:cxn>
-                  <a:cxn ang="0">
-                    <a:pos x="connsiteX9" y="connsiteY9"/>
-                  </a:cxn>
-                  <a:cxn ang="0">
-                    <a:pos x="connsiteX10" y="connsiteY10"/>
-                  </a:cxn>
-                </a:cxnLst>
-                <a:rect l="l" t="t" r="r" b="b"/>
-                <a:pathLst>
-                  <a:path w="2722880" h="567059">
-                    <a:moveTo>
-                      <a:pt x="0" y="516259"/>
-                    </a:moveTo>
-                    <a:cubicBezTo>
-                      <a:pt x="92286" y="473925"/>
-                      <a:pt x="184573" y="431592"/>
-                      <a:pt x="274320" y="414659"/>
-                    </a:cubicBezTo>
-                    <a:cubicBezTo>
-                      <a:pt x="364067" y="397726"/>
-                      <a:pt x="463973" y="428206"/>
-                      <a:pt x="538480" y="414659"/>
-                    </a:cubicBezTo>
-                    <a:cubicBezTo>
-                      <a:pt x="612987" y="401112"/>
-                      <a:pt x="651933" y="358779"/>
-                      <a:pt x="721360" y="333379"/>
-                    </a:cubicBezTo>
-                    <a:cubicBezTo>
-                      <a:pt x="790787" y="307979"/>
-                      <a:pt x="858520" y="313059"/>
-                      <a:pt x="955040" y="262259"/>
-                    </a:cubicBezTo>
-                    <a:cubicBezTo>
-                      <a:pt x="1051560" y="211459"/>
-                      <a:pt x="1183640" y="69219"/>
-                      <a:pt x="1300480" y="28579"/>
-                    </a:cubicBezTo>
-                    <a:cubicBezTo>
-                      <a:pt x="1417320" y="-12061"/>
-                      <a:pt x="1530773" y="-3594"/>
-                      <a:pt x="1656080" y="18419"/>
-                    </a:cubicBezTo>
-                    <a:cubicBezTo>
-                      <a:pt x="1781387" y="40432"/>
-                      <a:pt x="1952413" y="104779"/>
-                      <a:pt x="2052320" y="160659"/>
-                    </a:cubicBezTo>
-                    <a:cubicBezTo>
-                      <a:pt x="2152227" y="216539"/>
-                      <a:pt x="2157307" y="302899"/>
-                      <a:pt x="2255520" y="353699"/>
-                    </a:cubicBezTo>
-                    <a:cubicBezTo>
-                      <a:pt x="2353733" y="404499"/>
-                      <a:pt x="2563707" y="429899"/>
-                      <a:pt x="2641600" y="465459"/>
-                    </a:cubicBezTo>
-                    <a:cubicBezTo>
-                      <a:pt x="2719493" y="501019"/>
-                      <a:pt x="2721186" y="534039"/>
-                      <a:pt x="2722880" y="567059"/>
-                    </a:cubicBezTo>
-                  </a:path>
-                </a:pathLst>
-              </a:custGeom>
-            </p:spPr>
-            <p:style>
-              <a:lnRef idx="1">
-                <a:schemeClr val="accent1"/>
-              </a:lnRef>
-              <a:fillRef idx="0">
-                <a:schemeClr val="accent1"/>
-              </a:fillRef>
-              <a:effectRef idx="0">
-                <a:schemeClr val="accent1"/>
-              </a:effectRef>
-              <a:fontRef idx="minor">
-                <a:schemeClr val="tx1"/>
-              </a:fontRef>
-            </p:style>
-            <p:txBody>
-              <a:bodyPr vert="horz" wrap="square" lIns="0" tIns="0" rIns="0" bIns="0" numCol="1" rtlCol="0" anchor="t" anchorCtr="0" compatLnSpc="1">
-                <a:prstTxWarp prst="textNoShape">
-                  <a:avLst/>
-                </a:prstTxWarp>
-                <a:spAutoFit/>
-              </a:bodyPr>
-              <a:lstStyle/>
-              <a:p>
-                <a:pPr marL="0" marR="0" indent="0" algn="ctr" defTabSz="914400" rtl="0" eaLnBrk="1" fontAlgn="base" latinLnBrk="0" hangingPunct="1">
-                  <a:lnSpc>
-                    <a:spcPct val="100000"/>
-                  </a:lnSpc>
-                  <a:spcBef>
-                    <a:spcPct val="50000"/>
-                  </a:spcBef>
-                  <a:spcAft>
-                    <a:spcPct val="0"/>
-                  </a:spcAft>
-                  <a:buClrTx/>
-                  <a:buSzTx/>
-                  <a:buFontTx/>
-                  <a:buNone/>
-                  <a:tabLst/>
-                </a:pPr>
-                <a:endParaRPr kumimoji="0" lang="en-CN" sz="2400" b="0" i="0" u="none" strike="noStrike" cap="none" normalizeH="0" baseline="0">
-                  <a:ln>
-                    <a:noFill/>
-                  </a:ln>
-                  <a:solidFill>
-                    <a:schemeClr val="tx1"/>
-                  </a:solidFill>
-                  <a:effectLst/>
-                  <a:latin typeface="Times New Roman" pitchFamily="18" charset="0"/>
-                  <a:ea typeface="宋体" pitchFamily="2" charset="-122"/>
-                </a:endParaRPr>
-              </a:p>
-            </p:txBody>
-          </p:sp>
-          <p:sp>
-            <p:nvSpPr>
-              <p:cNvPr id="30" name="Oval 29">
-                <a:extLst>
-                  <a:ext uri="{FF2B5EF4-FFF2-40B4-BE49-F238E27FC236}">
-                    <a16:creationId xmlns:a16="http://schemas.microsoft.com/office/drawing/2014/main" id="{FBE7E3EE-78CB-0CF8-430D-9FE72501E16F}"/>
-                  </a:ext>
-                </a:extLst>
-              </p:cNvPr>
-              <p:cNvSpPr/>
-              <p:nvPr/>
-            </p:nvSpPr>
-            <p:spPr>
-              <a:xfrm flipV="1">
-                <a:off x="6768164" y="4131959"/>
-                <a:ext cx="77041" cy="73021"/>
-              </a:xfrm>
-              <a:prstGeom prst="ellipse">
-                <a:avLst/>
-              </a:prstGeom>
-              <a:solidFill>
-                <a:schemeClr val="accent3"/>
-              </a:solidFill>
-            </p:spPr>
-            <p:txBody>
-              <a:bodyPr wrap="square" lIns="0" rtlCol="0" anchor="ctr">
-                <a:noAutofit/>
-              </a:bodyPr>
-              <a:lstStyle/>
-              <a:p>
-                <a:pPr algn="l"/>
-                <a:endParaRPr lang="en-CN" b="1">
-                  <a:solidFill>
-                    <a:srgbClr val="FF0000"/>
-                  </a:solidFill>
-                  <a:latin typeface="微软雅黑" pitchFamily="34" charset="-122"/>
-                  <a:ea typeface="微软雅黑" pitchFamily="34" charset="-122"/>
-                </a:endParaRPr>
-              </a:p>
-            </p:txBody>
-          </p:sp>
-          <p:cxnSp>
-            <p:nvCxnSpPr>
-              <p:cNvPr id="31" name="Straight Arrow Connector 30">
-                <a:extLst>
-                  <a:ext uri="{FF2B5EF4-FFF2-40B4-BE49-F238E27FC236}">
-                    <a16:creationId xmlns:a16="http://schemas.microsoft.com/office/drawing/2014/main" id="{8F71F34E-409D-23D1-BCAB-5BA09935C954}"/>
-                  </a:ext>
-                </a:extLst>
-              </p:cNvPr>
-              <p:cNvCxnSpPr>
-                <a:cxnSpLocks/>
-              </p:cNvCxnSpPr>
-              <p:nvPr/>
-            </p:nvCxnSpPr>
-            <p:spPr bwMode="auto">
-              <a:xfrm>
-                <a:off x="6790642" y="1937148"/>
-                <a:ext cx="5610" cy="2193015"/>
-              </a:xfrm>
-              <a:prstGeom prst="straightConnector1">
-                <a:avLst/>
-              </a:prstGeom>
-              <a:ln>
-                <a:headEnd type="triangle"/>
-                <a:tailEnd type="triangle"/>
-              </a:ln>
-            </p:spPr>
-            <p:style>
-              <a:lnRef idx="1">
-                <a:schemeClr val="dk1"/>
-              </a:lnRef>
-              <a:fillRef idx="0">
-                <a:schemeClr val="dk1"/>
-              </a:fillRef>
-              <a:effectRef idx="0">
-                <a:schemeClr val="dk1"/>
-              </a:effectRef>
-              <a:fontRef idx="minor">
-                <a:schemeClr val="tx1"/>
-              </a:fontRef>
-            </p:style>
-          </p:cxnSp>
-          <p:cxnSp>
-            <p:nvCxnSpPr>
-              <p:cNvPr id="32" name="Straight Arrow Connector 31">
-                <a:extLst>
-                  <a:ext uri="{FF2B5EF4-FFF2-40B4-BE49-F238E27FC236}">
-                    <a16:creationId xmlns:a16="http://schemas.microsoft.com/office/drawing/2014/main" id="{33347CCF-2595-6233-309A-B30517A92523}"/>
-                  </a:ext>
-                </a:extLst>
-              </p:cNvPr>
-              <p:cNvCxnSpPr>
-                <a:cxnSpLocks/>
-              </p:cNvCxnSpPr>
-              <p:nvPr/>
-            </p:nvCxnSpPr>
-            <p:spPr bwMode="auto">
-              <a:xfrm>
-                <a:off x="6809009" y="4206415"/>
-                <a:ext cx="0" cy="591666"/>
-              </a:xfrm>
-              <a:prstGeom prst="straightConnector1">
-                <a:avLst/>
-              </a:prstGeom>
-              <a:ln>
-                <a:headEnd type="triangle"/>
-                <a:tailEnd type="triangle"/>
-              </a:ln>
-            </p:spPr>
-            <p:style>
-              <a:lnRef idx="1">
-                <a:schemeClr val="dk1"/>
-              </a:lnRef>
-              <a:fillRef idx="0">
-                <a:schemeClr val="dk1"/>
-              </a:fillRef>
-              <a:effectRef idx="0">
-                <a:schemeClr val="dk1"/>
-              </a:effectRef>
-              <a:fontRef idx="minor">
-                <a:schemeClr val="tx1"/>
-              </a:fontRef>
-            </p:style>
-          </p:cxnSp>
-          <p:sp>
-            <p:nvSpPr>
-              <p:cNvPr id="33" name="TextBox 32">
-                <a:extLst>
-                  <a:ext uri="{FF2B5EF4-FFF2-40B4-BE49-F238E27FC236}">
-                    <a16:creationId xmlns:a16="http://schemas.microsoft.com/office/drawing/2014/main" id="{C31DC97C-6934-38F2-BF03-EB29D95217E6}"/>
-                  </a:ext>
-                </a:extLst>
-              </p:cNvPr>
-              <p:cNvSpPr txBox="1"/>
-              <p:nvPr/>
-            </p:nvSpPr>
-            <p:spPr>
-              <a:xfrm>
-                <a:off x="6798514" y="2943446"/>
-                <a:ext cx="986342" cy="430887"/>
-              </a:xfrm>
-              <a:prstGeom prst="rect">
-                <a:avLst/>
-              </a:prstGeom>
-              <a:noFill/>
-            </p:spPr>
-            <p:txBody>
-              <a:bodyPr wrap="square" rtlCol="0">
-                <a:spAutoFit/>
-              </a:bodyPr>
-              <a:lstStyle/>
-              <a:p>
-                <a:r>
-                  <a:rPr lang="en-CN" sz="1100">
-                    <a:solidFill>
-                      <a:schemeClr val="bg2"/>
-                    </a:solidFill>
-                    <a:latin typeface="+mn-ea"/>
-                    <a:ea typeface="+mn-ea"/>
-                  </a:rPr>
-                  <a:t>卫星到星下点距离D</a:t>
-                </a:r>
-              </a:p>
-            </p:txBody>
-          </p:sp>
-          <mc:AlternateContent xmlns:mc="http://schemas.openxmlformats.org/markup-compatibility/2006" xmlns:a14="http://schemas.microsoft.com/office/drawing/2010/main">
-            <mc:Choice Requires="a14">
-              <p:sp>
-                <p:nvSpPr>
-                  <p:cNvPr id="34" name="TextBox 33">
-                    <a:extLst>
-                      <a:ext uri="{FF2B5EF4-FFF2-40B4-BE49-F238E27FC236}">
-                        <a16:creationId xmlns:a16="http://schemas.microsoft.com/office/drawing/2014/main" id="{4C25A726-EBA5-8CFD-8030-F41A26319B18}"/>
-                      </a:ext>
-                    </a:extLst>
-                  </p:cNvPr>
-                  <p:cNvSpPr txBox="1"/>
-                  <p:nvPr/>
-                </p:nvSpPr>
-                <p:spPr>
-                  <a:xfrm>
-                    <a:off x="6755066" y="4362507"/>
-                    <a:ext cx="765990" cy="338554"/>
-                  </a:xfrm>
-                  <a:prstGeom prst="rect">
-                    <a:avLst/>
-                  </a:prstGeom>
-                  <a:noFill/>
-                </p:spPr>
-                <p:txBody>
-                  <a:bodyPr wrap="square" rtlCol="0">
-                    <a:spAutoFit/>
-                  </a:bodyPr>
-                  <a:lstStyle/>
-                  <a:p>
-                    <a:r>
-                      <a:rPr lang="en-CN" sz="800">
-                        <a:solidFill>
-                          <a:schemeClr val="bg2"/>
-                        </a:solidFill>
-                        <a:latin typeface="+mn-ea"/>
-                        <a:ea typeface="+mn-ea"/>
-                      </a:rPr>
-                      <a:t>星下点地面正高</a:t>
-                    </a:r>
-                    <a14:m>
-                      <m:oMath xmlns:m="http://schemas.openxmlformats.org/officeDocument/2006/math">
-                        <m:sSub>
-                          <m:sSubPr>
-                            <m:ctrlPr>
-                              <a:rPr lang="en-CN" sz="800" i="1" dirty="0" smtClean="0">
-                                <a:solidFill>
-                                  <a:schemeClr val="bg2"/>
-                                </a:solidFill>
-                                <a:latin typeface="Cambria Math" panose="02040503050406030204" pitchFamily="18" charset="0"/>
-                                <a:ea typeface="+mn-ea"/>
-                              </a:rPr>
-                            </m:ctrlPr>
-                          </m:sSubPr>
-                          <m:e>
-                            <m:r>
-                              <m:rPr>
-                                <m:sty m:val="p"/>
-                              </m:rPr>
-                              <a:rPr lang="en-CN" sz="800" i="1" dirty="0">
-                                <a:solidFill>
-                                  <a:schemeClr val="bg2"/>
-                                </a:solidFill>
-                                <a:latin typeface="Cambria Math" panose="02040503050406030204" pitchFamily="18" charset="0"/>
-                                <a:ea typeface="+mn-ea"/>
-                              </a:rPr>
-                              <m:t>H</m:t>
-                            </m:r>
-                          </m:e>
-                          <m:sub>
-                            <m:r>
-                              <a:rPr lang="en-US" sz="800" b="0" i="1" dirty="0" smtClean="0">
-                                <a:solidFill>
-                                  <a:schemeClr val="bg2"/>
-                                </a:solidFill>
-                                <a:latin typeface="Cambria Math" panose="02040503050406030204" pitchFamily="18" charset="0"/>
-                                <a:ea typeface="+mn-ea"/>
-                              </a:rPr>
-                              <m:t>𝑙𝑎𝑛𝑑</m:t>
-                            </m:r>
-                          </m:sub>
-                        </m:sSub>
-                      </m:oMath>
-                    </a14:m>
-                    <a:endParaRPr lang="en-CN" sz="800">
-                      <a:solidFill>
-                        <a:schemeClr val="bg2"/>
-                      </a:solidFill>
-                      <a:latin typeface="+mn-ea"/>
-                      <a:ea typeface="+mn-ea"/>
-                    </a:endParaRPr>
-                  </a:p>
-                </p:txBody>
-              </p:sp>
-            </mc:Choice>
-            <mc:Fallback xmlns="">
-              <p:sp>
-                <p:nvSpPr>
-                  <p:cNvPr id="34" name="TextBox 33">
-                    <a:extLst>
-                      <a:ext uri="{FF2B5EF4-FFF2-40B4-BE49-F238E27FC236}">
-                        <a16:creationId xmlns:a16="http://schemas.microsoft.com/office/drawing/2014/main" id="{4C25A726-EBA5-8CFD-8030-F41A26319B18}"/>
-                      </a:ext>
-                    </a:extLst>
-                  </p:cNvPr>
-                  <p:cNvSpPr txBox="1">
-                    <a:spLocks noRot="1" noChangeAspect="1" noMove="1" noResize="1" noEditPoints="1" noAdjustHandles="1" noChangeArrowheads="1" noChangeShapeType="1" noTextEdit="1"/>
-                  </p:cNvSpPr>
-                  <p:nvPr/>
-                </p:nvSpPr>
-                <p:spPr>
-                  <a:xfrm>
-                    <a:off x="6755066" y="4362507"/>
-                    <a:ext cx="765990" cy="338554"/>
-                  </a:xfrm>
-                  <a:prstGeom prst="rect">
-                    <a:avLst/>
-                  </a:prstGeom>
-                  <a:blipFill>
-                    <a:blip r:embed="rId4"/>
-                    <a:stretch>
-                      <a:fillRect b="-3571"/>
-                    </a:stretch>
-                  </a:blipFill>
-                </p:spPr>
-                <p:txBody>
-                  <a:bodyPr/>
-                  <a:lstStyle/>
-                  <a:p>
-                    <a:r>
-                      <a:rPr lang="en-US">
-                        <a:noFill/>
-                      </a:rPr>
-                      <a:t> </a:t>
-                    </a:r>
-                  </a:p>
-                </p:txBody>
-              </p:sp>
-            </mc:Fallback>
-          </mc:AlternateContent>
-          <p:sp>
-            <p:nvSpPr>
-              <p:cNvPr id="35" name="TextBox 34">
-                <a:extLst>
-                  <a:ext uri="{FF2B5EF4-FFF2-40B4-BE49-F238E27FC236}">
-                    <a16:creationId xmlns:a16="http://schemas.microsoft.com/office/drawing/2014/main" id="{BF904D18-B7A4-A632-5039-AABF91C29068}"/>
-                  </a:ext>
-                </a:extLst>
-              </p:cNvPr>
-              <p:cNvSpPr txBox="1"/>
-              <p:nvPr/>
-            </p:nvSpPr>
-            <p:spPr>
-              <a:xfrm>
-                <a:off x="5925044" y="4914745"/>
-                <a:ext cx="831645" cy="276999"/>
-              </a:xfrm>
-              <a:prstGeom prst="rect">
-                <a:avLst/>
-              </a:prstGeom>
-              <a:noFill/>
-            </p:spPr>
-            <p:txBody>
-              <a:bodyPr wrap="square" rtlCol="0">
-                <a:spAutoFit/>
-              </a:bodyPr>
-              <a:lstStyle/>
-              <a:p>
-                <a:r>
-                  <a:rPr lang="en-CN" sz="1200">
-                    <a:solidFill>
-                      <a:schemeClr val="bg2"/>
-                    </a:solidFill>
-                    <a:latin typeface="+mn-ea"/>
-                    <a:ea typeface="+mn-ea"/>
-                  </a:rPr>
-                  <a:t>参考椭球</a:t>
-                </a:r>
-              </a:p>
-            </p:txBody>
-          </p:sp>
-          <p:cxnSp>
-            <p:nvCxnSpPr>
-              <p:cNvPr id="36" name="Straight Arrow Connector 35">
-                <a:extLst>
-                  <a:ext uri="{FF2B5EF4-FFF2-40B4-BE49-F238E27FC236}">
-                    <a16:creationId xmlns:a16="http://schemas.microsoft.com/office/drawing/2014/main" id="{8027102F-133E-71AF-3A90-6428B26D53FF}"/>
-                  </a:ext>
-                </a:extLst>
-              </p:cNvPr>
-              <p:cNvCxnSpPr>
-                <a:cxnSpLocks/>
-              </p:cNvCxnSpPr>
-              <p:nvPr/>
-            </p:nvCxnSpPr>
-            <p:spPr bwMode="auto">
-              <a:xfrm flipH="1">
-                <a:off x="6606955" y="1940193"/>
-                <a:ext cx="25239" cy="2868280"/>
-              </a:xfrm>
-              <a:prstGeom prst="straightConnector1">
-                <a:avLst/>
-              </a:prstGeom>
-              <a:ln>
-                <a:headEnd type="triangle"/>
-                <a:tailEnd type="triangle"/>
-              </a:ln>
-            </p:spPr>
-            <p:style>
-              <a:lnRef idx="1">
-                <a:schemeClr val="dk1"/>
-              </a:lnRef>
-              <a:fillRef idx="0">
-                <a:schemeClr val="dk1"/>
-              </a:fillRef>
-              <a:effectRef idx="0">
-                <a:schemeClr val="dk1"/>
-              </a:effectRef>
-              <a:fontRef idx="minor">
-                <a:schemeClr val="tx1"/>
-              </a:fontRef>
-            </p:style>
-          </p:cxnSp>
-          <mc:AlternateContent xmlns:mc="http://schemas.openxmlformats.org/markup-compatibility/2006" xmlns:a14="http://schemas.microsoft.com/office/drawing/2010/main">
-            <mc:Choice Requires="a14">
-              <p:sp>
-                <p:nvSpPr>
-                  <p:cNvPr id="37" name="TextBox 36">
-                    <a:extLst>
-                      <a:ext uri="{FF2B5EF4-FFF2-40B4-BE49-F238E27FC236}">
-                        <a16:creationId xmlns:a16="http://schemas.microsoft.com/office/drawing/2014/main" id="{D965C789-7877-8E21-A073-186AF0715237}"/>
-                      </a:ext>
-                    </a:extLst>
-                  </p:cNvPr>
-                  <p:cNvSpPr txBox="1"/>
-                  <p:nvPr/>
-                </p:nvSpPr>
-                <p:spPr>
-                  <a:xfrm>
-                    <a:off x="5579904" y="3038229"/>
-                    <a:ext cx="981177" cy="461665"/>
-                  </a:xfrm>
-                  <a:prstGeom prst="rect">
-                    <a:avLst/>
-                  </a:prstGeom>
-                  <a:noFill/>
-                </p:spPr>
-                <p:txBody>
-                  <a:bodyPr wrap="square" rtlCol="0">
-                    <a:spAutoFit/>
-                  </a:bodyPr>
-                  <a:lstStyle/>
-                  <a:p>
-                    <a:r>
-                      <a:rPr lang="en-CN" sz="1200">
-                        <a:solidFill>
-                          <a:schemeClr val="bg2"/>
-                        </a:solidFill>
-                        <a:latin typeface="+mn-ea"/>
-                        <a:ea typeface="+mn-ea"/>
-                      </a:rPr>
-                      <a:t>卫星的椭球高</a:t>
-                    </a:r>
-                    <a14:m>
-                      <m:oMath xmlns:m="http://schemas.openxmlformats.org/officeDocument/2006/math">
-                        <m:sSub>
-                          <m:sSubPr>
-                            <m:ctrlPr>
-                              <a:rPr lang="en-CN" sz="1200" i="1" smtClean="0">
-                                <a:solidFill>
-                                  <a:schemeClr val="bg2"/>
-                                </a:solidFill>
-                                <a:latin typeface="Cambria Math" panose="02040503050406030204" pitchFamily="18" charset="0"/>
-                                <a:ea typeface="+mn-ea"/>
-                              </a:rPr>
-                            </m:ctrlPr>
-                          </m:sSubPr>
-                          <m:e>
-                            <m:r>
-                              <a:rPr lang="en-US" sz="1200" b="0" i="1" smtClean="0">
-                                <a:solidFill>
-                                  <a:schemeClr val="bg2"/>
-                                </a:solidFill>
-                                <a:latin typeface="Cambria Math" panose="02040503050406030204" pitchFamily="18" charset="0"/>
-                                <a:ea typeface="+mn-ea"/>
-                              </a:rPr>
-                              <m:t>𝐻</m:t>
-                            </m:r>
-                          </m:e>
-                          <m:sub>
-                            <m:r>
-                              <m:rPr>
-                                <m:sty m:val="p"/>
-                              </m:rPr>
-                              <a:rPr lang="en-CN" sz="1200" i="1">
-                                <a:solidFill>
-                                  <a:schemeClr val="bg2"/>
-                                </a:solidFill>
-                                <a:latin typeface="Cambria Math" panose="02040503050406030204" pitchFamily="18" charset="0"/>
-                                <a:ea typeface="+mn-ea"/>
-                              </a:rPr>
-                              <m:t>sat</m:t>
-                            </m:r>
-                          </m:sub>
-                        </m:sSub>
-                      </m:oMath>
-                    </a14:m>
-                    <a:endParaRPr lang="en-CN" sz="1200">
-                      <a:solidFill>
-                        <a:schemeClr val="bg2"/>
-                      </a:solidFill>
-                      <a:latin typeface="+mn-ea"/>
-                      <a:ea typeface="+mn-ea"/>
-                    </a:endParaRPr>
-                  </a:p>
-                </p:txBody>
-              </p:sp>
-            </mc:Choice>
-            <mc:Fallback xmlns="">
-              <p:sp>
-                <p:nvSpPr>
-                  <p:cNvPr id="37" name="TextBox 36">
-                    <a:extLst>
-                      <a:ext uri="{FF2B5EF4-FFF2-40B4-BE49-F238E27FC236}">
-                        <a16:creationId xmlns:a16="http://schemas.microsoft.com/office/drawing/2014/main" id="{D965C789-7877-8E21-A073-186AF0715237}"/>
-                      </a:ext>
-                    </a:extLst>
-                  </p:cNvPr>
-                  <p:cNvSpPr txBox="1">
-                    <a:spLocks noRot="1" noChangeAspect="1" noMove="1" noResize="1" noEditPoints="1" noAdjustHandles="1" noChangeArrowheads="1" noChangeShapeType="1" noTextEdit="1"/>
-                  </p:cNvSpPr>
-                  <p:nvPr/>
-                </p:nvSpPr>
-                <p:spPr>
-                  <a:xfrm>
-                    <a:off x="5579904" y="3038229"/>
-                    <a:ext cx="981177" cy="461665"/>
-                  </a:xfrm>
-                  <a:prstGeom prst="rect">
-                    <a:avLst/>
-                  </a:prstGeom>
-                  <a:blipFill>
-                    <a:blip r:embed="rId5"/>
-                    <a:stretch>
-                      <a:fillRect b="-9211"/>
-                    </a:stretch>
-                  </a:blipFill>
-                </p:spPr>
-                <p:txBody>
-                  <a:bodyPr/>
-                  <a:lstStyle/>
-                  <a:p>
-                    <a:r>
-                      <a:rPr lang="en-US">
-                        <a:noFill/>
-                      </a:rPr>
-                      <a:t> </a:t>
-                    </a:r>
-                  </a:p>
-                </p:txBody>
-              </p:sp>
-            </mc:Fallback>
-          </mc:AlternateContent>
-        </p:grpSp>
+            <a:prstGeom prst="rect">
+              <a:avLst/>
+            </a:prstGeom>
+          </p:spPr>
+        </p:pic>
         <p:sp>
           <p:nvSpPr>
-            <p:cNvPr id="2" name="Rectangle 1">
+            <p:cNvPr id="28" name="Arc 27">
               <a:extLst>
                 <a:ext uri="{FF2B5EF4-FFF2-40B4-BE49-F238E27FC236}">
-                  <a16:creationId xmlns:a16="http://schemas.microsoft.com/office/drawing/2014/main" id="{46444304-B22B-D388-5DAA-07836F41551E}"/>
+                  <a16:creationId xmlns:a16="http://schemas.microsoft.com/office/drawing/2014/main" id="{D75FBADC-81C7-0206-4D33-20B628C37229}"/>
+                </a:ext>
+              </a:extLst>
+            </p:cNvPr>
+            <p:cNvSpPr/>
+            <p:nvPr/>
+          </p:nvSpPr>
+          <p:spPr bwMode="auto">
+            <a:xfrm rot="17781206">
+              <a:off x="5751103" y="4283697"/>
+              <a:ext cx="3310444" cy="4675123"/>
+            </a:xfrm>
+            <a:prstGeom prst="arc">
+              <a:avLst>
+                <a:gd name="adj1" fmla="val 16972610"/>
+                <a:gd name="adj2" fmla="val 0"/>
+              </a:avLst>
+            </a:prstGeom>
+            <a:ln>
+              <a:headEnd type="none" w="med" len="med"/>
+              <a:tailEnd type="none" w="med" len="med"/>
+            </a:ln>
+          </p:spPr>
+          <p:style>
+            <a:lnRef idx="1">
+              <a:schemeClr val="dk1"/>
+            </a:lnRef>
+            <a:fillRef idx="0">
+              <a:schemeClr val="dk1"/>
+            </a:fillRef>
+            <a:effectRef idx="0">
+              <a:schemeClr val="dk1"/>
+            </a:effectRef>
+            <a:fontRef idx="minor">
+              <a:schemeClr val="tx1"/>
+            </a:fontRef>
+          </p:style>
+          <p:txBody>
+            <a:bodyPr vert="horz" wrap="square" lIns="0" tIns="0" rIns="0" bIns="0" numCol="1" rtlCol="0" anchor="t" anchorCtr="0" compatLnSpc="1">
+              <a:prstTxWarp prst="textNoShape">
+                <a:avLst/>
+              </a:prstTxWarp>
+              <a:spAutoFit/>
+            </a:bodyPr>
+            <a:lstStyle/>
+            <a:p>
+              <a:pPr marL="0" marR="0" indent="0" algn="ctr" defTabSz="914400" rtl="0" eaLnBrk="1" fontAlgn="base" latinLnBrk="0" hangingPunct="1">
+                <a:lnSpc>
+                  <a:spcPct val="100000"/>
+                </a:lnSpc>
+                <a:spcBef>
+                  <a:spcPct val="50000"/>
+                </a:spcBef>
+                <a:spcAft>
+                  <a:spcPct val="0"/>
+                </a:spcAft>
+                <a:buClrTx/>
+                <a:buSzTx/>
+                <a:buFontTx/>
+                <a:buNone/>
+                <a:tabLst/>
+              </a:pPr>
+              <a:endParaRPr kumimoji="0" lang="en-CN" sz="2400" b="0" i="0" u="none" strike="noStrike" cap="none" normalizeH="0" baseline="0">
+                <a:ln>
+                  <a:noFill/>
+                </a:ln>
+                <a:solidFill>
+                  <a:schemeClr val="tx1"/>
+                </a:solidFill>
+                <a:effectLst/>
+                <a:latin typeface="Times New Roman" pitchFamily="18" charset="0"/>
+                <a:ea typeface="宋体" pitchFamily="2" charset="-122"/>
+              </a:endParaRPr>
+            </a:p>
+          </p:txBody>
+        </p:sp>
+        <p:sp>
+          <p:nvSpPr>
+            <p:cNvPr id="29" name="Freeform 28">
+              <a:extLst>
+                <a:ext uri="{FF2B5EF4-FFF2-40B4-BE49-F238E27FC236}">
+                  <a16:creationId xmlns:a16="http://schemas.microsoft.com/office/drawing/2014/main" id="{86B8A217-8479-53C1-7C7F-6B313573304A}"/>
                 </a:ext>
               </a:extLst>
             </p:cNvPr>
@@ -18576,8 +17834,1027 @@
           </p:nvSpPr>
           <p:spPr>
             <a:xfrm>
-              <a:off x="4094746" y="1940204"/>
-              <a:ext cx="1265134" cy="1029601"/>
+              <a:off x="5390682" y="4165710"/>
+              <a:ext cx="2722880" cy="567059"/>
+            </a:xfrm>
+            <a:custGeom>
+              <a:avLst/>
+              <a:gdLst>
+                <a:gd name="connsiteX0" fmla="*/ 0 w 2722880"/>
+                <a:gd name="connsiteY0" fmla="*/ 516259 h 567059"/>
+                <a:gd name="connsiteX1" fmla="*/ 274320 w 2722880"/>
+                <a:gd name="connsiteY1" fmla="*/ 414659 h 567059"/>
+                <a:gd name="connsiteX2" fmla="*/ 538480 w 2722880"/>
+                <a:gd name="connsiteY2" fmla="*/ 414659 h 567059"/>
+                <a:gd name="connsiteX3" fmla="*/ 721360 w 2722880"/>
+                <a:gd name="connsiteY3" fmla="*/ 333379 h 567059"/>
+                <a:gd name="connsiteX4" fmla="*/ 955040 w 2722880"/>
+                <a:gd name="connsiteY4" fmla="*/ 262259 h 567059"/>
+                <a:gd name="connsiteX5" fmla="*/ 1300480 w 2722880"/>
+                <a:gd name="connsiteY5" fmla="*/ 28579 h 567059"/>
+                <a:gd name="connsiteX6" fmla="*/ 1656080 w 2722880"/>
+                <a:gd name="connsiteY6" fmla="*/ 18419 h 567059"/>
+                <a:gd name="connsiteX7" fmla="*/ 2052320 w 2722880"/>
+                <a:gd name="connsiteY7" fmla="*/ 160659 h 567059"/>
+                <a:gd name="connsiteX8" fmla="*/ 2255520 w 2722880"/>
+                <a:gd name="connsiteY8" fmla="*/ 353699 h 567059"/>
+                <a:gd name="connsiteX9" fmla="*/ 2641600 w 2722880"/>
+                <a:gd name="connsiteY9" fmla="*/ 465459 h 567059"/>
+                <a:gd name="connsiteX10" fmla="*/ 2722880 w 2722880"/>
+                <a:gd name="connsiteY10" fmla="*/ 567059 h 567059"/>
+              </a:gdLst>
+              <a:ahLst/>
+              <a:cxnLst>
+                <a:cxn ang="0">
+                  <a:pos x="connsiteX0" y="connsiteY0"/>
+                </a:cxn>
+                <a:cxn ang="0">
+                  <a:pos x="connsiteX1" y="connsiteY1"/>
+                </a:cxn>
+                <a:cxn ang="0">
+                  <a:pos x="connsiteX2" y="connsiteY2"/>
+                </a:cxn>
+                <a:cxn ang="0">
+                  <a:pos x="connsiteX3" y="connsiteY3"/>
+                </a:cxn>
+                <a:cxn ang="0">
+                  <a:pos x="connsiteX4" y="connsiteY4"/>
+                </a:cxn>
+                <a:cxn ang="0">
+                  <a:pos x="connsiteX5" y="connsiteY5"/>
+                </a:cxn>
+                <a:cxn ang="0">
+                  <a:pos x="connsiteX6" y="connsiteY6"/>
+                </a:cxn>
+                <a:cxn ang="0">
+                  <a:pos x="connsiteX7" y="connsiteY7"/>
+                </a:cxn>
+                <a:cxn ang="0">
+                  <a:pos x="connsiteX8" y="connsiteY8"/>
+                </a:cxn>
+                <a:cxn ang="0">
+                  <a:pos x="connsiteX9" y="connsiteY9"/>
+                </a:cxn>
+                <a:cxn ang="0">
+                  <a:pos x="connsiteX10" y="connsiteY10"/>
+                </a:cxn>
+              </a:cxnLst>
+              <a:rect l="l" t="t" r="r" b="b"/>
+              <a:pathLst>
+                <a:path w="2722880" h="567059">
+                  <a:moveTo>
+                    <a:pt x="0" y="516259"/>
+                  </a:moveTo>
+                  <a:cubicBezTo>
+                    <a:pt x="92286" y="473925"/>
+                    <a:pt x="184573" y="431592"/>
+                    <a:pt x="274320" y="414659"/>
+                  </a:cubicBezTo>
+                  <a:cubicBezTo>
+                    <a:pt x="364067" y="397726"/>
+                    <a:pt x="463973" y="428206"/>
+                    <a:pt x="538480" y="414659"/>
+                  </a:cubicBezTo>
+                  <a:cubicBezTo>
+                    <a:pt x="612987" y="401112"/>
+                    <a:pt x="651933" y="358779"/>
+                    <a:pt x="721360" y="333379"/>
+                  </a:cubicBezTo>
+                  <a:cubicBezTo>
+                    <a:pt x="790787" y="307979"/>
+                    <a:pt x="858520" y="313059"/>
+                    <a:pt x="955040" y="262259"/>
+                  </a:cubicBezTo>
+                  <a:cubicBezTo>
+                    <a:pt x="1051560" y="211459"/>
+                    <a:pt x="1183640" y="69219"/>
+                    <a:pt x="1300480" y="28579"/>
+                  </a:cubicBezTo>
+                  <a:cubicBezTo>
+                    <a:pt x="1417320" y="-12061"/>
+                    <a:pt x="1530773" y="-3594"/>
+                    <a:pt x="1656080" y="18419"/>
+                  </a:cubicBezTo>
+                  <a:cubicBezTo>
+                    <a:pt x="1781387" y="40432"/>
+                    <a:pt x="1952413" y="104779"/>
+                    <a:pt x="2052320" y="160659"/>
+                  </a:cubicBezTo>
+                  <a:cubicBezTo>
+                    <a:pt x="2152227" y="216539"/>
+                    <a:pt x="2157307" y="302899"/>
+                    <a:pt x="2255520" y="353699"/>
+                  </a:cubicBezTo>
+                  <a:cubicBezTo>
+                    <a:pt x="2353733" y="404499"/>
+                    <a:pt x="2563707" y="429899"/>
+                    <a:pt x="2641600" y="465459"/>
+                  </a:cubicBezTo>
+                  <a:cubicBezTo>
+                    <a:pt x="2719493" y="501019"/>
+                    <a:pt x="2721186" y="534039"/>
+                    <a:pt x="2722880" y="567059"/>
+                  </a:cubicBezTo>
+                </a:path>
+              </a:pathLst>
+            </a:custGeom>
+          </p:spPr>
+          <p:style>
+            <a:lnRef idx="1">
+              <a:schemeClr val="accent1"/>
+            </a:lnRef>
+            <a:fillRef idx="0">
+              <a:schemeClr val="accent1"/>
+            </a:fillRef>
+            <a:effectRef idx="0">
+              <a:schemeClr val="accent1"/>
+            </a:effectRef>
+            <a:fontRef idx="minor">
+              <a:schemeClr val="tx1"/>
+            </a:fontRef>
+          </p:style>
+          <p:txBody>
+            <a:bodyPr vert="horz" wrap="square" lIns="0" tIns="0" rIns="0" bIns="0" numCol="1" rtlCol="0" anchor="t" anchorCtr="0" compatLnSpc="1">
+              <a:prstTxWarp prst="textNoShape">
+                <a:avLst/>
+              </a:prstTxWarp>
+              <a:spAutoFit/>
+            </a:bodyPr>
+            <a:lstStyle/>
+            <a:p>
+              <a:pPr marL="0" marR="0" indent="0" algn="ctr" defTabSz="914400" rtl="0" eaLnBrk="1" fontAlgn="base" latinLnBrk="0" hangingPunct="1">
+                <a:lnSpc>
+                  <a:spcPct val="100000"/>
+                </a:lnSpc>
+                <a:spcBef>
+                  <a:spcPct val="50000"/>
+                </a:spcBef>
+                <a:spcAft>
+                  <a:spcPct val="0"/>
+                </a:spcAft>
+                <a:buClrTx/>
+                <a:buSzTx/>
+                <a:buFontTx/>
+                <a:buNone/>
+                <a:tabLst/>
+              </a:pPr>
+              <a:endParaRPr kumimoji="0" lang="en-CN" sz="2400" b="0" i="0" u="none" strike="noStrike" cap="none" normalizeH="0" baseline="0">
+                <a:ln>
+                  <a:noFill/>
+                </a:ln>
+                <a:solidFill>
+                  <a:schemeClr val="tx1"/>
+                </a:solidFill>
+                <a:effectLst/>
+                <a:latin typeface="Times New Roman" pitchFamily="18" charset="0"/>
+                <a:ea typeface="宋体" pitchFamily="2" charset="-122"/>
+              </a:endParaRPr>
+            </a:p>
+          </p:txBody>
+        </p:sp>
+        <p:sp>
+          <p:nvSpPr>
+            <p:cNvPr id="30" name="Oval 29">
+              <a:extLst>
+                <a:ext uri="{FF2B5EF4-FFF2-40B4-BE49-F238E27FC236}">
+                  <a16:creationId xmlns:a16="http://schemas.microsoft.com/office/drawing/2014/main" id="{FBE7E3EE-78CB-0CF8-430D-9FE72501E16F}"/>
+                </a:ext>
+              </a:extLst>
+            </p:cNvPr>
+            <p:cNvSpPr/>
+            <p:nvPr/>
+          </p:nvSpPr>
+          <p:spPr>
+            <a:xfrm flipV="1">
+              <a:off x="6768164" y="4131959"/>
+              <a:ext cx="77041" cy="73021"/>
+            </a:xfrm>
+            <a:prstGeom prst="ellipse">
+              <a:avLst/>
+            </a:prstGeom>
+            <a:solidFill>
+              <a:schemeClr val="accent3"/>
+            </a:solidFill>
+          </p:spPr>
+          <p:txBody>
+            <a:bodyPr wrap="square" lIns="0" rtlCol="0" anchor="ctr">
+              <a:noAutofit/>
+            </a:bodyPr>
+            <a:lstStyle/>
+            <a:p>
+              <a:pPr algn="l"/>
+              <a:endParaRPr lang="en-CN" b="1">
+                <a:solidFill>
+                  <a:srgbClr val="FF0000"/>
+                </a:solidFill>
+                <a:latin typeface="微软雅黑" pitchFamily="34" charset="-122"/>
+                <a:ea typeface="微软雅黑" pitchFamily="34" charset="-122"/>
+              </a:endParaRPr>
+            </a:p>
+          </p:txBody>
+        </p:sp>
+        <p:cxnSp>
+          <p:nvCxnSpPr>
+            <p:cNvPr id="31" name="Straight Arrow Connector 30">
+              <a:extLst>
+                <a:ext uri="{FF2B5EF4-FFF2-40B4-BE49-F238E27FC236}">
+                  <a16:creationId xmlns:a16="http://schemas.microsoft.com/office/drawing/2014/main" id="{8F71F34E-409D-23D1-BCAB-5BA09935C954}"/>
+                </a:ext>
+              </a:extLst>
+            </p:cNvPr>
+            <p:cNvCxnSpPr>
+              <a:cxnSpLocks/>
+            </p:cNvCxnSpPr>
+            <p:nvPr/>
+          </p:nvCxnSpPr>
+          <p:spPr bwMode="auto">
+            <a:xfrm>
+              <a:off x="6790642" y="1937148"/>
+              <a:ext cx="5610" cy="2193015"/>
+            </a:xfrm>
+            <a:prstGeom prst="straightConnector1">
+              <a:avLst/>
+            </a:prstGeom>
+            <a:ln>
+              <a:headEnd type="triangle"/>
+              <a:tailEnd type="triangle"/>
+            </a:ln>
+          </p:spPr>
+          <p:style>
+            <a:lnRef idx="1">
+              <a:schemeClr val="dk1"/>
+            </a:lnRef>
+            <a:fillRef idx="0">
+              <a:schemeClr val="dk1"/>
+            </a:fillRef>
+            <a:effectRef idx="0">
+              <a:schemeClr val="dk1"/>
+            </a:effectRef>
+            <a:fontRef idx="minor">
+              <a:schemeClr val="tx1"/>
+            </a:fontRef>
+          </p:style>
+        </p:cxnSp>
+        <p:cxnSp>
+          <p:nvCxnSpPr>
+            <p:cNvPr id="32" name="Straight Arrow Connector 31">
+              <a:extLst>
+                <a:ext uri="{FF2B5EF4-FFF2-40B4-BE49-F238E27FC236}">
+                  <a16:creationId xmlns:a16="http://schemas.microsoft.com/office/drawing/2014/main" id="{33347CCF-2595-6233-309A-B30517A92523}"/>
+                </a:ext>
+              </a:extLst>
+            </p:cNvPr>
+            <p:cNvCxnSpPr>
+              <a:cxnSpLocks/>
+            </p:cNvCxnSpPr>
+            <p:nvPr/>
+          </p:nvCxnSpPr>
+          <p:spPr bwMode="auto">
+            <a:xfrm>
+              <a:off x="6809009" y="4206415"/>
+              <a:ext cx="0" cy="591666"/>
+            </a:xfrm>
+            <a:prstGeom prst="straightConnector1">
+              <a:avLst/>
+            </a:prstGeom>
+            <a:ln>
+              <a:headEnd type="triangle"/>
+              <a:tailEnd type="triangle"/>
+            </a:ln>
+          </p:spPr>
+          <p:style>
+            <a:lnRef idx="1">
+              <a:schemeClr val="dk1"/>
+            </a:lnRef>
+            <a:fillRef idx="0">
+              <a:schemeClr val="dk1"/>
+            </a:fillRef>
+            <a:effectRef idx="0">
+              <a:schemeClr val="dk1"/>
+            </a:effectRef>
+            <a:fontRef idx="minor">
+              <a:schemeClr val="tx1"/>
+            </a:fontRef>
+          </p:style>
+        </p:cxnSp>
+        <p:sp>
+          <p:nvSpPr>
+            <p:cNvPr id="33" name="TextBox 32">
+              <a:extLst>
+                <a:ext uri="{FF2B5EF4-FFF2-40B4-BE49-F238E27FC236}">
+                  <a16:creationId xmlns:a16="http://schemas.microsoft.com/office/drawing/2014/main" id="{C31DC97C-6934-38F2-BF03-EB29D95217E6}"/>
+                </a:ext>
+              </a:extLst>
+            </p:cNvPr>
+            <p:cNvSpPr txBox="1"/>
+            <p:nvPr/>
+          </p:nvSpPr>
+          <p:spPr>
+            <a:xfrm>
+              <a:off x="6752015" y="3408240"/>
+              <a:ext cx="986342" cy="430887"/>
+            </a:xfrm>
+            <a:prstGeom prst="rect">
+              <a:avLst/>
+            </a:prstGeom>
+            <a:noFill/>
+          </p:spPr>
+          <p:txBody>
+            <a:bodyPr wrap="square" rtlCol="0">
+              <a:spAutoFit/>
+            </a:bodyPr>
+            <a:lstStyle/>
+            <a:p>
+              <a:r>
+                <a:rPr lang="en-CN" sz="1100" dirty="0">
+                  <a:solidFill>
+                    <a:schemeClr val="bg2"/>
+                  </a:solidFill>
+                  <a:latin typeface="+mn-ea"/>
+                  <a:ea typeface="+mn-ea"/>
+                </a:rPr>
+                <a:t>卫星到星下点距离D</a:t>
+              </a:r>
+            </a:p>
+          </p:txBody>
+        </p:sp>
+        <mc:AlternateContent xmlns:mc="http://schemas.openxmlformats.org/markup-compatibility/2006" xmlns:a14="http://schemas.microsoft.com/office/drawing/2010/main">
+          <mc:Choice Requires="a14">
+            <p:sp>
+              <p:nvSpPr>
+                <p:cNvPr id="34" name="TextBox 33">
+                  <a:extLst>
+                    <a:ext uri="{FF2B5EF4-FFF2-40B4-BE49-F238E27FC236}">
+                      <a16:creationId xmlns:a16="http://schemas.microsoft.com/office/drawing/2014/main" id="{4C25A726-EBA5-8CFD-8030-F41A26319B18}"/>
+                    </a:ext>
+                  </a:extLst>
+                </p:cNvPr>
+                <p:cNvSpPr txBox="1"/>
+                <p:nvPr/>
+              </p:nvSpPr>
+              <p:spPr>
+                <a:xfrm>
+                  <a:off x="6755066" y="4362507"/>
+                  <a:ext cx="765990" cy="338554"/>
+                </a:xfrm>
+                <a:prstGeom prst="rect">
+                  <a:avLst/>
+                </a:prstGeom>
+                <a:noFill/>
+              </p:spPr>
+              <p:txBody>
+                <a:bodyPr wrap="square" rtlCol="0">
+                  <a:spAutoFit/>
+                </a:bodyPr>
+                <a:lstStyle/>
+                <a:p>
+                  <a:r>
+                    <a:rPr lang="en-CN" sz="800">
+                      <a:solidFill>
+                        <a:schemeClr val="bg2"/>
+                      </a:solidFill>
+                      <a:latin typeface="+mn-ea"/>
+                      <a:ea typeface="+mn-ea"/>
+                    </a:rPr>
+                    <a:t>星下点地面正高</a:t>
+                  </a:r>
+                  <a14:m>
+                    <m:oMath xmlns:m="http://schemas.openxmlformats.org/officeDocument/2006/math">
+                      <m:sSub>
+                        <m:sSubPr>
+                          <m:ctrlPr>
+                            <a:rPr lang="en-CN" sz="800" i="1" dirty="0" smtClean="0">
+                              <a:solidFill>
+                                <a:schemeClr val="bg2"/>
+                              </a:solidFill>
+                              <a:latin typeface="Cambria Math" panose="02040503050406030204" pitchFamily="18" charset="0"/>
+                              <a:ea typeface="+mn-ea"/>
+                            </a:rPr>
+                          </m:ctrlPr>
+                        </m:sSubPr>
+                        <m:e>
+                          <m:r>
+                            <m:rPr>
+                              <m:sty m:val="p"/>
+                            </m:rPr>
+                            <a:rPr lang="en-CN" sz="800" i="1" dirty="0">
+                              <a:solidFill>
+                                <a:schemeClr val="bg2"/>
+                              </a:solidFill>
+                              <a:latin typeface="Cambria Math" panose="02040503050406030204" pitchFamily="18" charset="0"/>
+                              <a:ea typeface="+mn-ea"/>
+                            </a:rPr>
+                            <m:t>H</m:t>
+                          </m:r>
+                        </m:e>
+                        <m:sub>
+                          <m:r>
+                            <a:rPr lang="en-US" sz="800" b="0" i="1" dirty="0" smtClean="0">
+                              <a:solidFill>
+                                <a:schemeClr val="bg2"/>
+                              </a:solidFill>
+                              <a:latin typeface="Cambria Math" panose="02040503050406030204" pitchFamily="18" charset="0"/>
+                              <a:ea typeface="+mn-ea"/>
+                            </a:rPr>
+                            <m:t>𝑙𝑎𝑛𝑑</m:t>
+                          </m:r>
+                        </m:sub>
+                      </m:sSub>
+                    </m:oMath>
+                  </a14:m>
+                  <a:endParaRPr lang="en-CN" sz="800">
+                    <a:solidFill>
+                      <a:schemeClr val="bg2"/>
+                    </a:solidFill>
+                    <a:latin typeface="+mn-ea"/>
+                    <a:ea typeface="+mn-ea"/>
+                  </a:endParaRPr>
+                </a:p>
+              </p:txBody>
+            </p:sp>
+          </mc:Choice>
+          <mc:Fallback xmlns="">
+            <p:sp>
+              <p:nvSpPr>
+                <p:cNvPr id="34" name="TextBox 33">
+                  <a:extLst>
+                    <a:ext uri="{FF2B5EF4-FFF2-40B4-BE49-F238E27FC236}">
+                      <a16:creationId xmlns:a16="http://schemas.microsoft.com/office/drawing/2014/main" id="{4C25A726-EBA5-8CFD-8030-F41A26319B18}"/>
+                    </a:ext>
+                  </a:extLst>
+                </p:cNvPr>
+                <p:cNvSpPr txBox="1">
+                  <a:spLocks noRot="1" noChangeAspect="1" noMove="1" noResize="1" noEditPoints="1" noAdjustHandles="1" noChangeArrowheads="1" noChangeShapeType="1" noTextEdit="1"/>
+                </p:cNvSpPr>
+                <p:nvPr/>
+              </p:nvSpPr>
+              <p:spPr>
+                <a:xfrm>
+                  <a:off x="6755066" y="4362507"/>
+                  <a:ext cx="765990" cy="338554"/>
+                </a:xfrm>
+                <a:prstGeom prst="rect">
+                  <a:avLst/>
+                </a:prstGeom>
+                <a:blipFill>
+                  <a:blip r:embed="rId4"/>
+                  <a:stretch>
+                    <a:fillRect b="-3571"/>
+                  </a:stretch>
+                </a:blipFill>
+              </p:spPr>
+              <p:txBody>
+                <a:bodyPr/>
+                <a:lstStyle/>
+                <a:p>
+                  <a:r>
+                    <a:rPr lang="en-US">
+                      <a:noFill/>
+                    </a:rPr>
+                    <a:t> </a:t>
+                  </a:r>
+                </a:p>
+              </p:txBody>
+            </p:sp>
+          </mc:Fallback>
+        </mc:AlternateContent>
+        <p:sp>
+          <p:nvSpPr>
+            <p:cNvPr id="35" name="TextBox 34">
+              <a:extLst>
+                <a:ext uri="{FF2B5EF4-FFF2-40B4-BE49-F238E27FC236}">
+                  <a16:creationId xmlns:a16="http://schemas.microsoft.com/office/drawing/2014/main" id="{BF904D18-B7A4-A632-5039-AABF91C29068}"/>
+                </a:ext>
+              </a:extLst>
+            </p:cNvPr>
+            <p:cNvSpPr txBox="1"/>
+            <p:nvPr/>
+          </p:nvSpPr>
+          <p:spPr>
+            <a:xfrm>
+              <a:off x="5925044" y="4914745"/>
+              <a:ext cx="831645" cy="276999"/>
+            </a:xfrm>
+            <a:prstGeom prst="rect">
+              <a:avLst/>
+            </a:prstGeom>
+            <a:noFill/>
+          </p:spPr>
+          <p:txBody>
+            <a:bodyPr wrap="square" rtlCol="0">
+              <a:spAutoFit/>
+            </a:bodyPr>
+            <a:lstStyle/>
+            <a:p>
+              <a:r>
+                <a:rPr lang="en-CN" sz="1200">
+                  <a:solidFill>
+                    <a:schemeClr val="bg2"/>
+                  </a:solidFill>
+                  <a:latin typeface="+mn-ea"/>
+                  <a:ea typeface="+mn-ea"/>
+                </a:rPr>
+                <a:t>参考椭球</a:t>
+              </a:r>
+            </a:p>
+          </p:txBody>
+        </p:sp>
+        <p:cxnSp>
+          <p:nvCxnSpPr>
+            <p:cNvPr id="36" name="Straight Arrow Connector 35">
+              <a:extLst>
+                <a:ext uri="{FF2B5EF4-FFF2-40B4-BE49-F238E27FC236}">
+                  <a16:creationId xmlns:a16="http://schemas.microsoft.com/office/drawing/2014/main" id="{8027102F-133E-71AF-3A90-6428B26D53FF}"/>
+                </a:ext>
+              </a:extLst>
+            </p:cNvPr>
+            <p:cNvCxnSpPr>
+              <a:cxnSpLocks/>
+            </p:cNvCxnSpPr>
+            <p:nvPr/>
+          </p:nvCxnSpPr>
+          <p:spPr bwMode="auto">
+            <a:xfrm flipH="1">
+              <a:off x="6606955" y="1940193"/>
+              <a:ext cx="25239" cy="2868280"/>
+            </a:xfrm>
+            <a:prstGeom prst="straightConnector1">
+              <a:avLst/>
+            </a:prstGeom>
+            <a:ln>
+              <a:headEnd type="triangle"/>
+              <a:tailEnd type="triangle"/>
+            </a:ln>
+          </p:spPr>
+          <p:style>
+            <a:lnRef idx="1">
+              <a:schemeClr val="dk1"/>
+            </a:lnRef>
+            <a:fillRef idx="0">
+              <a:schemeClr val="dk1"/>
+            </a:fillRef>
+            <a:effectRef idx="0">
+              <a:schemeClr val="dk1"/>
+            </a:effectRef>
+            <a:fontRef idx="minor">
+              <a:schemeClr val="tx1"/>
+            </a:fontRef>
+          </p:style>
+        </p:cxnSp>
+        <mc:AlternateContent xmlns:mc="http://schemas.openxmlformats.org/markup-compatibility/2006" xmlns:a14="http://schemas.microsoft.com/office/drawing/2010/main">
+          <mc:Choice Requires="a14">
+            <p:sp>
+              <p:nvSpPr>
+                <p:cNvPr id="37" name="TextBox 36">
+                  <a:extLst>
+                    <a:ext uri="{FF2B5EF4-FFF2-40B4-BE49-F238E27FC236}">
+                      <a16:creationId xmlns:a16="http://schemas.microsoft.com/office/drawing/2014/main" id="{D965C789-7877-8E21-A073-186AF0715237}"/>
+                    </a:ext>
+                  </a:extLst>
+                </p:cNvPr>
+                <p:cNvSpPr txBox="1"/>
+                <p:nvPr/>
+              </p:nvSpPr>
+              <p:spPr>
+                <a:xfrm>
+                  <a:off x="5579904" y="3038229"/>
+                  <a:ext cx="981177" cy="461665"/>
+                </a:xfrm>
+                <a:prstGeom prst="rect">
+                  <a:avLst/>
+                </a:prstGeom>
+                <a:noFill/>
+              </p:spPr>
+              <p:txBody>
+                <a:bodyPr wrap="square" rtlCol="0">
+                  <a:spAutoFit/>
+                </a:bodyPr>
+                <a:lstStyle/>
+                <a:p>
+                  <a:r>
+                    <a:rPr lang="en-CN" sz="1200">
+                      <a:solidFill>
+                        <a:schemeClr val="bg2"/>
+                      </a:solidFill>
+                      <a:latin typeface="+mn-ea"/>
+                      <a:ea typeface="+mn-ea"/>
+                    </a:rPr>
+                    <a:t>卫星的椭球高</a:t>
+                  </a:r>
+                  <a14:m>
+                    <m:oMath xmlns:m="http://schemas.openxmlformats.org/officeDocument/2006/math">
+                      <m:sSub>
+                        <m:sSubPr>
+                          <m:ctrlPr>
+                            <a:rPr lang="en-CN" sz="1200" i="1" smtClean="0">
+                              <a:solidFill>
+                                <a:schemeClr val="bg2"/>
+                              </a:solidFill>
+                              <a:latin typeface="Cambria Math" panose="02040503050406030204" pitchFamily="18" charset="0"/>
+                              <a:ea typeface="+mn-ea"/>
+                            </a:rPr>
+                          </m:ctrlPr>
+                        </m:sSubPr>
+                        <m:e>
+                          <m:r>
+                            <a:rPr lang="en-US" sz="1200" b="0" i="1" smtClean="0">
+                              <a:solidFill>
+                                <a:schemeClr val="bg2"/>
+                              </a:solidFill>
+                              <a:latin typeface="Cambria Math" panose="02040503050406030204" pitchFamily="18" charset="0"/>
+                              <a:ea typeface="+mn-ea"/>
+                            </a:rPr>
+                            <m:t>𝐻</m:t>
+                          </m:r>
+                        </m:e>
+                        <m:sub>
+                          <m:r>
+                            <m:rPr>
+                              <m:sty m:val="p"/>
+                            </m:rPr>
+                            <a:rPr lang="en-CN" sz="1200" i="1">
+                              <a:solidFill>
+                                <a:schemeClr val="bg2"/>
+                              </a:solidFill>
+                              <a:latin typeface="Cambria Math" panose="02040503050406030204" pitchFamily="18" charset="0"/>
+                              <a:ea typeface="+mn-ea"/>
+                            </a:rPr>
+                            <m:t>sat</m:t>
+                          </m:r>
+                        </m:sub>
+                      </m:sSub>
+                    </m:oMath>
+                  </a14:m>
+                  <a:endParaRPr lang="en-CN" sz="1200">
+                    <a:solidFill>
+                      <a:schemeClr val="bg2"/>
+                    </a:solidFill>
+                    <a:latin typeface="+mn-ea"/>
+                    <a:ea typeface="+mn-ea"/>
+                  </a:endParaRPr>
+                </a:p>
+              </p:txBody>
+            </p:sp>
+          </mc:Choice>
+          <mc:Fallback xmlns="">
+            <p:sp>
+              <p:nvSpPr>
+                <p:cNvPr id="37" name="TextBox 36">
+                  <a:extLst>
+                    <a:ext uri="{FF2B5EF4-FFF2-40B4-BE49-F238E27FC236}">
+                      <a16:creationId xmlns:a16="http://schemas.microsoft.com/office/drawing/2014/main" id="{D965C789-7877-8E21-A073-186AF0715237}"/>
+                    </a:ext>
+                  </a:extLst>
+                </p:cNvPr>
+                <p:cNvSpPr txBox="1">
+                  <a:spLocks noRot="1" noChangeAspect="1" noMove="1" noResize="1" noEditPoints="1" noAdjustHandles="1" noChangeArrowheads="1" noChangeShapeType="1" noTextEdit="1"/>
+                </p:cNvSpPr>
+                <p:nvPr/>
+              </p:nvSpPr>
+              <p:spPr>
+                <a:xfrm>
+                  <a:off x="5579904" y="3038229"/>
+                  <a:ext cx="981177" cy="461665"/>
+                </a:xfrm>
+                <a:prstGeom prst="rect">
+                  <a:avLst/>
+                </a:prstGeom>
+                <a:blipFill>
+                  <a:blip r:embed="rId5"/>
+                  <a:stretch>
+                    <a:fillRect b="-9211"/>
+                  </a:stretch>
+                </a:blipFill>
+              </p:spPr>
+              <p:txBody>
+                <a:bodyPr/>
+                <a:lstStyle/>
+                <a:p>
+                  <a:r>
+                    <a:rPr lang="en-US">
+                      <a:noFill/>
+                    </a:rPr>
+                    <a:t> </a:t>
+                  </a:r>
+                </a:p>
+              </p:txBody>
+            </p:sp>
+          </mc:Fallback>
+        </mc:AlternateContent>
+      </p:grpSp>
+      <p:sp>
+        <p:nvSpPr>
+          <p:cNvPr id="2" name="Rectangle 1">
+            <a:extLst>
+              <a:ext uri="{FF2B5EF4-FFF2-40B4-BE49-F238E27FC236}">
+                <a16:creationId xmlns:a16="http://schemas.microsoft.com/office/drawing/2014/main" id="{46444304-B22B-D388-5DAA-07836F41551E}"/>
+              </a:ext>
+            </a:extLst>
+          </p:cNvPr>
+          <p:cNvSpPr/>
+          <p:nvPr/>
+        </p:nvSpPr>
+        <p:spPr>
+          <a:xfrm>
+            <a:off x="3456343" y="1197623"/>
+            <a:ext cx="1293399" cy="1118060"/>
+          </a:xfrm>
+          <a:prstGeom prst="rect">
+            <a:avLst/>
+          </a:prstGeom>
+          <a:noFill/>
+          <a:ln>
+            <a:solidFill>
+              <a:schemeClr val="bg2"/>
+            </a:solidFill>
+          </a:ln>
+        </p:spPr>
+        <p:txBody>
+          <a:bodyPr wrap="square" lIns="0" rtlCol="0" anchor="ctr">
+            <a:noAutofit/>
+          </a:bodyPr>
+          <a:lstStyle/>
+          <a:p>
+            <a:pPr algn="l"/>
+            <a:endParaRPr lang="en-CN" b="1">
+              <a:solidFill>
+                <a:srgbClr val="FF0000"/>
+              </a:solidFill>
+              <a:latin typeface="微软雅黑" pitchFamily="34" charset="-122"/>
+              <a:ea typeface="微软雅黑" pitchFamily="34" charset="-122"/>
+            </a:endParaRPr>
+          </a:p>
+        </p:txBody>
+      </p:sp>
+      <p:sp>
+        <p:nvSpPr>
+          <p:cNvPr id="7" name="TextBox 6">
+            <a:extLst>
+              <a:ext uri="{FF2B5EF4-FFF2-40B4-BE49-F238E27FC236}">
+                <a16:creationId xmlns:a16="http://schemas.microsoft.com/office/drawing/2014/main" id="{AB3DC409-5008-EE5C-A934-8152F7FE7EB2}"/>
+              </a:ext>
+            </a:extLst>
+          </p:cNvPr>
+          <p:cNvSpPr txBox="1"/>
+          <p:nvPr/>
+        </p:nvSpPr>
+        <p:spPr>
+          <a:xfrm>
+            <a:off x="3479790" y="1205778"/>
+            <a:ext cx="1080276" cy="1103231"/>
+          </a:xfrm>
+          <a:prstGeom prst="rect">
+            <a:avLst/>
+          </a:prstGeom>
+          <a:noFill/>
+        </p:spPr>
+        <p:txBody>
+          <a:bodyPr wrap="square" rtlCol="0">
+            <a:spAutoFit/>
+          </a:bodyPr>
+          <a:lstStyle/>
+          <a:p>
+            <a:pPr algn="just"/>
+            <a:r>
+              <a:rPr lang="en-CN" sz="1200" dirty="0">
+                <a:solidFill>
+                  <a:schemeClr val="bg2"/>
+                </a:solidFill>
+              </a:rPr>
+              <a:t>仪器改正</a:t>
+            </a:r>
+          </a:p>
+          <a:p>
+            <a:pPr marL="228600" indent="-228600" algn="just">
+              <a:buAutoNum type="arabicPeriod"/>
+            </a:pPr>
+            <a:r>
+              <a:rPr lang="zh-CN" altLang="en-US" sz="1200" dirty="0">
+                <a:solidFill>
+                  <a:schemeClr val="bg2"/>
+                </a:solidFill>
+              </a:rPr>
+              <a:t>仪器噪声</a:t>
+            </a:r>
+            <a:endParaRPr lang="en-US" altLang="zh-CN" sz="1200" dirty="0">
+              <a:solidFill>
+                <a:schemeClr val="bg2"/>
+              </a:solidFill>
+            </a:endParaRPr>
+          </a:p>
+          <a:p>
+            <a:pPr marL="228600" indent="-228600" algn="just">
+              <a:buAutoNum type="arabicPeriod"/>
+            </a:pPr>
+            <a:r>
+              <a:rPr lang="zh-CN" altLang="en-US" sz="1200" dirty="0">
+                <a:solidFill>
+                  <a:schemeClr val="bg2"/>
+                </a:solidFill>
+              </a:rPr>
+              <a:t>仪器偏差</a:t>
+            </a:r>
+            <a:endParaRPr lang="en-US" altLang="zh-CN" sz="1200" dirty="0">
+              <a:solidFill>
+                <a:schemeClr val="bg2"/>
+              </a:solidFill>
+            </a:endParaRPr>
+          </a:p>
+          <a:p>
+            <a:pPr marL="228600" indent="-228600" algn="just">
+              <a:buAutoNum type="arabicPeriod"/>
+            </a:pPr>
+            <a:r>
+              <a:rPr lang="zh-CN" altLang="en-US" sz="1200" dirty="0">
+                <a:solidFill>
+                  <a:schemeClr val="bg2"/>
+                </a:solidFill>
+              </a:rPr>
+              <a:t>钟误差</a:t>
+            </a:r>
+            <a:endParaRPr lang="en-CN" sz="1200" dirty="0">
+              <a:solidFill>
+                <a:schemeClr val="bg2"/>
+              </a:solidFill>
+            </a:endParaRPr>
+          </a:p>
+        </p:txBody>
+      </p:sp>
+      <p:sp>
+        <p:nvSpPr>
+          <p:cNvPr id="9" name="Rectangle 8">
+            <a:extLst>
+              <a:ext uri="{FF2B5EF4-FFF2-40B4-BE49-F238E27FC236}">
+                <a16:creationId xmlns:a16="http://schemas.microsoft.com/office/drawing/2014/main" id="{1E73D84F-15C6-C9C6-985F-B7FFB0B7BD39}"/>
+              </a:ext>
+            </a:extLst>
+          </p:cNvPr>
+          <p:cNvSpPr/>
+          <p:nvPr/>
+        </p:nvSpPr>
+        <p:spPr>
+          <a:xfrm>
+            <a:off x="6343015" y="1981593"/>
+            <a:ext cx="1452748" cy="1179347"/>
+          </a:xfrm>
+          <a:prstGeom prst="rect">
+            <a:avLst/>
+          </a:prstGeom>
+          <a:noFill/>
+          <a:ln>
+            <a:solidFill>
+              <a:schemeClr val="bg2"/>
+            </a:solidFill>
+          </a:ln>
+        </p:spPr>
+        <p:txBody>
+          <a:bodyPr wrap="square" lIns="0" rtlCol="0" anchor="ctr">
+            <a:noAutofit/>
+          </a:bodyPr>
+          <a:lstStyle/>
+          <a:p>
+            <a:pPr algn="l"/>
+            <a:endParaRPr lang="en-CN" b="1">
+              <a:solidFill>
+                <a:srgbClr val="FF0000"/>
+              </a:solidFill>
+              <a:latin typeface="微软雅黑" pitchFamily="34" charset="-122"/>
+              <a:ea typeface="微软雅黑" pitchFamily="34" charset="-122"/>
+            </a:endParaRPr>
+          </a:p>
+        </p:txBody>
+      </p:sp>
+      <p:sp>
+        <p:nvSpPr>
+          <p:cNvPr id="13" name="TextBox 12">
+            <a:extLst>
+              <a:ext uri="{FF2B5EF4-FFF2-40B4-BE49-F238E27FC236}">
+                <a16:creationId xmlns:a16="http://schemas.microsoft.com/office/drawing/2014/main" id="{871EF47B-EDF5-10E5-44DF-68704C1E6AD8}"/>
+              </a:ext>
+            </a:extLst>
+          </p:cNvPr>
+          <p:cNvSpPr txBox="1"/>
+          <p:nvPr/>
+        </p:nvSpPr>
+        <p:spPr>
+          <a:xfrm>
+            <a:off x="6349530" y="2020332"/>
+            <a:ext cx="1364787" cy="1103807"/>
+          </a:xfrm>
+          <a:prstGeom prst="rect">
+            <a:avLst/>
+          </a:prstGeom>
+          <a:noFill/>
+        </p:spPr>
+        <p:txBody>
+          <a:bodyPr wrap="square" rtlCol="0">
+            <a:spAutoFit/>
+          </a:bodyPr>
+          <a:lstStyle/>
+          <a:p>
+            <a:pPr algn="just"/>
+            <a:r>
+              <a:rPr lang="en-CN" sz="1200" dirty="0">
+                <a:solidFill>
+                  <a:schemeClr val="bg2"/>
+                </a:solidFill>
+              </a:rPr>
+              <a:t>信号传播改正</a:t>
+            </a:r>
+          </a:p>
+          <a:p>
+            <a:pPr marL="228600" indent="-228600" algn="just">
+              <a:buAutoNum type="arabicPeriod"/>
+            </a:pPr>
+            <a:r>
+              <a:rPr lang="zh-CN" altLang="en-US" sz="1200" dirty="0">
+                <a:solidFill>
+                  <a:schemeClr val="bg2"/>
+                </a:solidFill>
+              </a:rPr>
+              <a:t>干对流层改正</a:t>
+            </a:r>
+            <a:endParaRPr lang="en-US" altLang="zh-CN" sz="1200" dirty="0">
+              <a:solidFill>
+                <a:schemeClr val="bg2"/>
+              </a:solidFill>
+            </a:endParaRPr>
+          </a:p>
+          <a:p>
+            <a:pPr marL="228600" indent="-228600" algn="just">
+              <a:buFontTx/>
+              <a:buAutoNum type="arabicPeriod"/>
+            </a:pPr>
+            <a:r>
+              <a:rPr lang="zh-CN" altLang="en-US" sz="1200" dirty="0">
+                <a:solidFill>
+                  <a:schemeClr val="bg2"/>
+                </a:solidFill>
+              </a:rPr>
+              <a:t>湿对流层改正</a:t>
+            </a:r>
+            <a:endParaRPr lang="en-US" altLang="zh-CN" sz="1200" dirty="0">
+              <a:solidFill>
+                <a:schemeClr val="bg2"/>
+              </a:solidFill>
+            </a:endParaRPr>
+          </a:p>
+          <a:p>
+            <a:pPr marL="228600" indent="-228600" algn="just">
+              <a:buAutoNum type="arabicPeriod"/>
+            </a:pPr>
+            <a:r>
+              <a:rPr lang="zh-CN" altLang="en-US" sz="1200" dirty="0">
+                <a:solidFill>
+                  <a:schemeClr val="bg2"/>
+                </a:solidFill>
+              </a:rPr>
+              <a:t>电离层改正</a:t>
+            </a:r>
+            <a:endParaRPr lang="en-US" altLang="zh-CN" sz="1200" dirty="0">
+              <a:solidFill>
+                <a:schemeClr val="bg2"/>
+              </a:solidFill>
+            </a:endParaRPr>
+          </a:p>
+        </p:txBody>
+      </p:sp>
+      <p:grpSp>
+        <p:nvGrpSpPr>
+          <p:cNvPr id="45" name="Group 44">
+            <a:extLst>
+              <a:ext uri="{FF2B5EF4-FFF2-40B4-BE49-F238E27FC236}">
+                <a16:creationId xmlns:a16="http://schemas.microsoft.com/office/drawing/2014/main" id="{3901B23C-F4E5-38BD-9C7F-D6CD88025343}"/>
+              </a:ext>
+            </a:extLst>
+          </p:cNvPr>
+          <p:cNvGrpSpPr/>
+          <p:nvPr/>
+        </p:nvGrpSpPr>
+        <p:grpSpPr>
+          <a:xfrm>
+            <a:off x="6937608" y="3344058"/>
+            <a:ext cx="1430892" cy="1384995"/>
+            <a:chOff x="7351162" y="3628520"/>
+            <a:chExt cx="951474" cy="1384995"/>
+          </a:xfrm>
+        </p:grpSpPr>
+        <p:sp>
+          <p:nvSpPr>
+            <p:cNvPr id="14" name="Rectangle 13">
+              <a:extLst>
+                <a:ext uri="{FF2B5EF4-FFF2-40B4-BE49-F238E27FC236}">
+                  <a16:creationId xmlns:a16="http://schemas.microsoft.com/office/drawing/2014/main" id="{9E12ED47-1F4E-A3D7-A359-ACF534F700BD}"/>
+                </a:ext>
+              </a:extLst>
+            </p:cNvPr>
+            <p:cNvSpPr/>
+            <p:nvPr/>
+          </p:nvSpPr>
+          <p:spPr>
+            <a:xfrm>
+              <a:off x="7351162" y="3630574"/>
+              <a:ext cx="873255" cy="1348641"/>
             </a:xfrm>
             <a:prstGeom prst="rect">
               <a:avLst/>
@@ -18608,10 +18885,10 @@
         </p:sp>
         <p:sp>
           <p:nvSpPr>
-            <p:cNvPr id="7" name="TextBox 6">
+            <p:cNvPr id="15" name="TextBox 14">
               <a:extLst>
                 <a:ext uri="{FF2B5EF4-FFF2-40B4-BE49-F238E27FC236}">
-                  <a16:creationId xmlns:a16="http://schemas.microsoft.com/office/drawing/2014/main" id="{AB3DC409-5008-EE5C-A934-8152F7FE7EB2}"/>
+                  <a16:creationId xmlns:a16="http://schemas.microsoft.com/office/drawing/2014/main" id="{B5035B08-963D-A47C-BE6E-252BC493B7D4}"/>
                 </a:ext>
               </a:extLst>
             </p:cNvPr>
@@ -18620,8 +18897,8 @@
           </p:nvSpPr>
           <p:spPr>
             <a:xfrm>
-              <a:off x="4118192" y="1914988"/>
-              <a:ext cx="1222638" cy="1107996"/>
+              <a:off x="7371874" y="3628520"/>
+              <a:ext cx="930762" cy="1384995"/>
             </a:xfrm>
             <a:prstGeom prst="rect">
               <a:avLst/>
@@ -18641,7 +18918,7 @@
                     <a:schemeClr val="bg2"/>
                   </a:solidFill>
                 </a:rPr>
-                <a:t>仪器改正</a:t>
+                <a:t>地球物理改正</a:t>
               </a:r>
             </a:p>
             <a:p>
@@ -18654,7 +18931,26 @@
                     <a:schemeClr val="bg2"/>
                   </a:solidFill>
                 </a:rPr>
-                <a:t>仪器噪声</a:t>
+                <a:t>海洋潮汐</a:t>
+              </a:r>
+              <a:endParaRPr lang="en-US" altLang="zh-CN" sz="1200" dirty="0">
+                <a:solidFill>
+                  <a:schemeClr val="bg2"/>
+                </a:solidFill>
+              </a:endParaRPr>
+            </a:p>
+            <a:p>
+              <a:pPr marL="228600" indent="-228600" algn="just">
+                <a:buFontTx/>
+                <a:buAutoNum type="arabicPeriod"/>
+              </a:pPr>
+              <a:r>
+                <a:rPr lang="zh-CN" altLang="en-US" sz="1200" dirty="0">
+                  <a:solidFill>
+                    <a:schemeClr val="bg2"/>
+                  </a:solidFill>
+                </a:rPr>
+                <a:t>固体地球潮</a:t>
               </a:r>
               <a:endParaRPr lang="en-US" altLang="zh-CN" sz="1200" dirty="0">
                 <a:solidFill>
@@ -18672,7 +18968,7 @@
                     <a:schemeClr val="bg2"/>
                   </a:solidFill>
                 </a:rPr>
-                <a:t>仪器偏差</a:t>
+                <a:t>极潮</a:t>
               </a:r>
               <a:endParaRPr lang="en-US" altLang="zh-CN" sz="1200" dirty="0">
                 <a:solidFill>
@@ -18690,9 +18986,9 @@
                     <a:schemeClr val="bg2"/>
                   </a:solidFill>
                 </a:rPr>
-                <a:t>钟误差</a:t>
+                <a:t>动态大气压</a:t>
               </a:r>
-              <a:endParaRPr lang="en-CN" sz="1200" dirty="0">
+              <a:endParaRPr lang="en-US" altLang="zh-CN" sz="1200" dirty="0">
                 <a:solidFill>
                   <a:schemeClr val="bg2"/>
                 </a:solidFill>
@@ -18700,350 +18996,79 @@
             </a:p>
           </p:txBody>
         </p:sp>
-        <p:grpSp>
-          <p:nvGrpSpPr>
-            <p:cNvPr id="24" name="Group 23">
+      </p:grpSp>
+      <p:sp>
+        <p:nvSpPr>
+          <p:cNvPr id="16" name="Cloud 15">
+            <a:extLst>
+              <a:ext uri="{FF2B5EF4-FFF2-40B4-BE49-F238E27FC236}">
+                <a16:creationId xmlns:a16="http://schemas.microsoft.com/office/drawing/2014/main" id="{FFCD0B73-F458-960A-6AAF-44C9587BA8C1}"/>
+              </a:ext>
+            </a:extLst>
+          </p:cNvPr>
+          <p:cNvSpPr/>
+          <p:nvPr/>
+        </p:nvSpPr>
+        <p:spPr>
+          <a:xfrm>
+            <a:off x="5101642" y="2362401"/>
+            <a:ext cx="846029" cy="422398"/>
+          </a:xfrm>
+          <a:prstGeom prst="cloud">
+            <a:avLst/>
+          </a:prstGeom>
+          <a:solidFill>
+            <a:schemeClr val="tx1"/>
+          </a:solidFill>
+          <a:ln>
+            <a:solidFill>
+              <a:schemeClr val="bg2"/>
+            </a:solidFill>
+          </a:ln>
+        </p:spPr>
+        <p:txBody>
+          <a:bodyPr wrap="square" lIns="0" rtlCol="0" anchor="ctr">
+            <a:noAutofit/>
+          </a:bodyPr>
+          <a:lstStyle/>
+          <a:p>
+            <a:pPr algn="l"/>
+            <a:endParaRPr lang="en-CN" b="1">
+              <a:solidFill>
+                <a:srgbClr val="FF0000"/>
+              </a:solidFill>
+              <a:latin typeface="微软雅黑" pitchFamily="34" charset="-122"/>
+              <a:ea typeface="微软雅黑" pitchFamily="34" charset="-122"/>
+            </a:endParaRPr>
+          </a:p>
+        </p:txBody>
+      </p:sp>
+      <p:grpSp>
+        <p:nvGrpSpPr>
+          <p:cNvPr id="46" name="Group 45">
+            <a:extLst>
+              <a:ext uri="{FF2B5EF4-FFF2-40B4-BE49-F238E27FC236}">
+                <a16:creationId xmlns:a16="http://schemas.microsoft.com/office/drawing/2014/main" id="{DEF42C17-1687-AF14-1600-1DF166BACC58}"/>
+              </a:ext>
+            </a:extLst>
+          </p:cNvPr>
+          <p:cNvGrpSpPr/>
+          <p:nvPr/>
+        </p:nvGrpSpPr>
+        <p:grpSpPr>
+          <a:xfrm>
+            <a:off x="3066726" y="3466898"/>
+            <a:ext cx="1461072" cy="863925"/>
+            <a:chOff x="3912649" y="4467454"/>
+            <a:chExt cx="1461072" cy="863925"/>
+          </a:xfrm>
+        </p:grpSpPr>
+        <p:sp>
+          <p:nvSpPr>
+            <p:cNvPr id="17" name="Rectangle 16">
               <a:extLst>
                 <a:ext uri="{FF2B5EF4-FFF2-40B4-BE49-F238E27FC236}">
-                  <a16:creationId xmlns:a16="http://schemas.microsoft.com/office/drawing/2014/main" id="{9352A629-5B54-10B2-9990-7A7BBBF0D0AC}"/>
-                </a:ext>
-              </a:extLst>
-            </p:cNvPr>
-            <p:cNvGrpSpPr/>
-            <p:nvPr/>
-          </p:nvGrpSpPr>
-          <p:grpSpPr>
-            <a:xfrm>
-              <a:off x="7129552" y="1967234"/>
-              <a:ext cx="1834716" cy="1107996"/>
-              <a:chOff x="6983689" y="1986399"/>
-              <a:chExt cx="1834716" cy="1107996"/>
-            </a:xfrm>
-          </p:grpSpPr>
-          <p:sp>
-            <p:nvSpPr>
-              <p:cNvPr id="9" name="Rectangle 8">
-                <a:extLst>
-                  <a:ext uri="{FF2B5EF4-FFF2-40B4-BE49-F238E27FC236}">
-                    <a16:creationId xmlns:a16="http://schemas.microsoft.com/office/drawing/2014/main" id="{1E73D84F-15C6-C9C6-985F-B7FFB0B7BD39}"/>
-                  </a:ext>
-                </a:extLst>
-              </p:cNvPr>
-              <p:cNvSpPr/>
-              <p:nvPr/>
-            </p:nvSpPr>
-            <p:spPr>
-              <a:xfrm>
-                <a:off x="7009088" y="2022516"/>
-                <a:ext cx="1265134" cy="1030586"/>
-              </a:xfrm>
-              <a:prstGeom prst="rect">
-                <a:avLst/>
-              </a:prstGeom>
-              <a:noFill/>
-              <a:ln>
-                <a:solidFill>
-                  <a:schemeClr val="bg2"/>
-                </a:solidFill>
-              </a:ln>
-            </p:spPr>
-            <p:txBody>
-              <a:bodyPr wrap="square" lIns="0" rtlCol="0" anchor="ctr">
-                <a:noAutofit/>
-              </a:bodyPr>
-              <a:lstStyle/>
-              <a:p>
-                <a:pPr algn="l"/>
-                <a:endParaRPr lang="en-CN" b="1">
-                  <a:solidFill>
-                    <a:srgbClr val="FF0000"/>
-                  </a:solidFill>
-                  <a:latin typeface="微软雅黑" pitchFamily="34" charset="-122"/>
-                  <a:ea typeface="微软雅黑" pitchFamily="34" charset="-122"/>
-                </a:endParaRPr>
-              </a:p>
-            </p:txBody>
-          </p:sp>
-          <p:sp>
-            <p:nvSpPr>
-              <p:cNvPr id="13" name="TextBox 12">
-                <a:extLst>
-                  <a:ext uri="{FF2B5EF4-FFF2-40B4-BE49-F238E27FC236}">
-                    <a16:creationId xmlns:a16="http://schemas.microsoft.com/office/drawing/2014/main" id="{871EF47B-EDF5-10E5-44DF-68704C1E6AD8}"/>
-                  </a:ext>
-                </a:extLst>
-              </p:cNvPr>
-              <p:cNvSpPr txBox="1"/>
-              <p:nvPr/>
-            </p:nvSpPr>
-            <p:spPr>
-              <a:xfrm>
-                <a:off x="6983689" y="1986399"/>
-                <a:ext cx="1834716" cy="1107996"/>
-              </a:xfrm>
-              <a:prstGeom prst="rect">
-                <a:avLst/>
-              </a:prstGeom>
-              <a:noFill/>
-            </p:spPr>
-            <p:txBody>
-              <a:bodyPr wrap="square" rtlCol="0">
-                <a:spAutoFit/>
-              </a:bodyPr>
-              <a:lstStyle/>
-              <a:p>
-                <a:pPr algn="just"/>
-                <a:r>
-                  <a:rPr lang="en-CN" sz="1200" dirty="0">
-                    <a:solidFill>
-                      <a:schemeClr val="bg2"/>
-                    </a:solidFill>
-                  </a:rPr>
-                  <a:t>信号传播改正</a:t>
-                </a:r>
-              </a:p>
-              <a:p>
-                <a:pPr marL="228600" indent="-228600" algn="just">
-                  <a:buAutoNum type="arabicPeriod"/>
-                </a:pPr>
-                <a:r>
-                  <a:rPr lang="zh-CN" altLang="en-US" sz="1200" dirty="0">
-                    <a:solidFill>
-                      <a:schemeClr val="bg2"/>
-                    </a:solidFill>
-                  </a:rPr>
-                  <a:t>干对流层改正</a:t>
-                </a:r>
-                <a:endParaRPr lang="en-US" altLang="zh-CN" sz="1200" dirty="0">
-                  <a:solidFill>
-                    <a:schemeClr val="bg2"/>
-                  </a:solidFill>
-                </a:endParaRPr>
-              </a:p>
-              <a:p>
-                <a:pPr marL="228600" indent="-228600" algn="just">
-                  <a:buFontTx/>
-                  <a:buAutoNum type="arabicPeriod"/>
-                </a:pPr>
-                <a:r>
-                  <a:rPr lang="zh-CN" altLang="en-US" sz="1200" dirty="0">
-                    <a:solidFill>
-                      <a:schemeClr val="bg2"/>
-                    </a:solidFill>
-                  </a:rPr>
-                  <a:t>湿对流层改正</a:t>
-                </a:r>
-                <a:endParaRPr lang="en-US" altLang="zh-CN" sz="1200" dirty="0">
-                  <a:solidFill>
-                    <a:schemeClr val="bg2"/>
-                  </a:solidFill>
-                </a:endParaRPr>
-              </a:p>
-              <a:p>
-                <a:pPr marL="228600" indent="-228600" algn="just">
-                  <a:buAutoNum type="arabicPeriod"/>
-                </a:pPr>
-                <a:r>
-                  <a:rPr lang="zh-CN" altLang="en-US" sz="1200" dirty="0">
-                    <a:solidFill>
-                      <a:schemeClr val="bg2"/>
-                    </a:solidFill>
-                  </a:rPr>
-                  <a:t>电离层改正</a:t>
-                </a:r>
-                <a:endParaRPr lang="en-US" altLang="zh-CN" sz="1200" dirty="0">
-                  <a:solidFill>
-                    <a:schemeClr val="bg2"/>
-                  </a:solidFill>
-                </a:endParaRPr>
-              </a:p>
-            </p:txBody>
-          </p:sp>
-        </p:grpSp>
-        <p:grpSp>
-          <p:nvGrpSpPr>
-            <p:cNvPr id="45" name="Group 44">
-              <a:extLst>
-                <a:ext uri="{FF2B5EF4-FFF2-40B4-BE49-F238E27FC236}">
-                  <a16:creationId xmlns:a16="http://schemas.microsoft.com/office/drawing/2014/main" id="{3901B23C-F4E5-38BD-9C7F-D6CD88025343}"/>
-                </a:ext>
-              </a:extLst>
-            </p:cNvPr>
-            <p:cNvGrpSpPr/>
-            <p:nvPr/>
-          </p:nvGrpSpPr>
-          <p:grpSpPr>
-            <a:xfrm>
-              <a:off x="7362436" y="3861771"/>
-              <a:ext cx="1167956" cy="1765953"/>
-              <a:chOff x="7351162" y="3617226"/>
-              <a:chExt cx="1167956" cy="1765953"/>
-            </a:xfrm>
-          </p:grpSpPr>
-          <p:sp>
-            <p:nvSpPr>
-              <p:cNvPr id="14" name="Rectangle 13">
-                <a:extLst>
-                  <a:ext uri="{FF2B5EF4-FFF2-40B4-BE49-F238E27FC236}">
-                    <a16:creationId xmlns:a16="http://schemas.microsoft.com/office/drawing/2014/main" id="{9E12ED47-1F4E-A3D7-A359-ACF534F700BD}"/>
-                  </a:ext>
-                </a:extLst>
-              </p:cNvPr>
-              <p:cNvSpPr/>
-              <p:nvPr/>
-            </p:nvSpPr>
-            <p:spPr>
-              <a:xfrm>
-                <a:off x="7351162" y="3617226"/>
-                <a:ext cx="1167956" cy="1255083"/>
-              </a:xfrm>
-              <a:prstGeom prst="rect">
-                <a:avLst/>
-              </a:prstGeom>
-              <a:noFill/>
-              <a:ln>
-                <a:solidFill>
-                  <a:schemeClr val="bg2"/>
-                </a:solidFill>
-              </a:ln>
-            </p:spPr>
-            <p:txBody>
-              <a:bodyPr wrap="square" lIns="0" rtlCol="0" anchor="ctr">
-                <a:noAutofit/>
-              </a:bodyPr>
-              <a:lstStyle/>
-              <a:p>
-                <a:pPr algn="l"/>
-                <a:endParaRPr lang="en-CN" b="1">
-                  <a:solidFill>
-                    <a:srgbClr val="FF0000"/>
-                  </a:solidFill>
-                  <a:latin typeface="微软雅黑" pitchFamily="34" charset="-122"/>
-                  <a:ea typeface="微软雅黑" pitchFamily="34" charset="-122"/>
-                </a:endParaRPr>
-              </a:p>
-            </p:txBody>
-          </p:sp>
-          <p:sp>
-            <p:nvSpPr>
-              <p:cNvPr id="15" name="TextBox 14">
-                <a:extLst>
-                  <a:ext uri="{FF2B5EF4-FFF2-40B4-BE49-F238E27FC236}">
-                    <a16:creationId xmlns:a16="http://schemas.microsoft.com/office/drawing/2014/main" id="{B5035B08-963D-A47C-BE6E-252BC493B7D4}"/>
-                  </a:ext>
-                </a:extLst>
-              </p:cNvPr>
-              <p:cNvSpPr txBox="1"/>
-              <p:nvPr/>
-            </p:nvSpPr>
-            <p:spPr>
-              <a:xfrm>
-                <a:off x="7351163" y="3628853"/>
-                <a:ext cx="1161013" cy="1754326"/>
-              </a:xfrm>
-              <a:prstGeom prst="rect">
-                <a:avLst/>
-              </a:prstGeom>
-              <a:noFill/>
-            </p:spPr>
-            <p:txBody>
-              <a:bodyPr wrap="square" rtlCol="0">
-                <a:spAutoFit/>
-              </a:bodyPr>
-              <a:lstStyle/>
-              <a:p>
-                <a:pPr algn="just"/>
-                <a:r>
-                  <a:rPr lang="en-CN" sz="1200">
-                    <a:solidFill>
-                      <a:schemeClr val="bg2"/>
-                    </a:solidFill>
-                  </a:rPr>
-                  <a:t>地球物理改正</a:t>
-                </a:r>
-              </a:p>
-              <a:p>
-                <a:pPr marL="228600" indent="-228600" algn="just">
-                  <a:buAutoNum type="arabicPeriod"/>
-                </a:pPr>
-                <a:r>
-                  <a:rPr lang="zh-CN" altLang="en-US" sz="1200">
-                    <a:solidFill>
-                      <a:schemeClr val="bg2"/>
-                    </a:solidFill>
-                  </a:rPr>
-                  <a:t>海洋潮汐</a:t>
-                </a:r>
-                <a:endParaRPr lang="en-US" altLang="zh-CN" sz="1200">
-                  <a:solidFill>
-                    <a:schemeClr val="bg2"/>
-                  </a:solidFill>
-                </a:endParaRPr>
-              </a:p>
-              <a:p>
-                <a:pPr marL="228600" indent="-228600" algn="just">
-                  <a:buFontTx/>
-                  <a:buAutoNum type="arabicPeriod"/>
-                </a:pPr>
-                <a:r>
-                  <a:rPr lang="zh-CN" altLang="en-US" sz="1200">
-                    <a:solidFill>
-                      <a:schemeClr val="bg2"/>
-                    </a:solidFill>
-                  </a:rPr>
-                  <a:t>固体地球潮</a:t>
-                </a:r>
-                <a:endParaRPr lang="en-US" altLang="zh-CN" sz="1200">
-                  <a:solidFill>
-                    <a:schemeClr val="bg2"/>
-                  </a:solidFill>
-                </a:endParaRPr>
-              </a:p>
-              <a:p>
-                <a:pPr marL="228600" indent="-228600" algn="just">
-                  <a:buAutoNum type="arabicPeriod"/>
-                </a:pPr>
-                <a:r>
-                  <a:rPr lang="zh-CN" altLang="en-US" sz="1200">
-                    <a:solidFill>
-                      <a:schemeClr val="bg2"/>
-                    </a:solidFill>
-                  </a:rPr>
-                  <a:t>极潮</a:t>
-                </a:r>
-                <a:endParaRPr lang="en-US" altLang="zh-CN" sz="1200">
-                  <a:solidFill>
-                    <a:schemeClr val="bg2"/>
-                  </a:solidFill>
-                </a:endParaRPr>
-              </a:p>
-              <a:p>
-                <a:pPr marL="228600" indent="-228600" algn="just">
-                  <a:buAutoNum type="arabicPeriod"/>
-                </a:pPr>
-                <a:r>
-                  <a:rPr lang="zh-CN" altLang="en-US" sz="1200">
-                    <a:solidFill>
-                      <a:schemeClr val="bg2"/>
-                    </a:solidFill>
-                  </a:rPr>
-                  <a:t>动态大气压</a:t>
-                </a:r>
-                <a:endParaRPr lang="en-US" altLang="zh-CN" sz="1200">
-                  <a:solidFill>
-                    <a:schemeClr val="bg2"/>
-                  </a:solidFill>
-                </a:endParaRPr>
-              </a:p>
-            </p:txBody>
-          </p:sp>
-        </p:grpSp>
-        <p:sp>
-          <p:nvSpPr>
-            <p:cNvPr id="16" name="Cloud 15">
-              <a:extLst>
-                <a:ext uri="{FF2B5EF4-FFF2-40B4-BE49-F238E27FC236}">
-                  <a16:creationId xmlns:a16="http://schemas.microsoft.com/office/drawing/2014/main" id="{FFCD0B73-F458-960A-6AAF-44C9587BA8C1}"/>
+                  <a16:creationId xmlns:a16="http://schemas.microsoft.com/office/drawing/2014/main" id="{4E7821BF-5058-FF96-3415-42E18FF205F0}"/>
                 </a:ext>
               </a:extLst>
             </p:cNvPr>
@@ -19052,15 +19077,13 @@
           </p:nvSpPr>
           <p:spPr>
             <a:xfrm>
-              <a:off x="5740044" y="3058264"/>
-              <a:ext cx="846029" cy="422398"/>
+              <a:off x="3912649" y="4467454"/>
+              <a:ext cx="1461072" cy="863925"/>
             </a:xfrm>
-            <a:prstGeom prst="cloud">
+            <a:prstGeom prst="rect">
               <a:avLst/>
             </a:prstGeom>
-            <a:solidFill>
-              <a:schemeClr val="tx1"/>
-            </a:solidFill>
+            <a:noFill/>
             <a:ln>
               <a:solidFill>
                 <a:schemeClr val="bg2"/>
@@ -19084,279 +19107,215 @@
             </a:p>
           </p:txBody>
         </p:sp>
-        <p:grpSp>
-          <p:nvGrpSpPr>
-            <p:cNvPr id="46" name="Group 45">
+        <p:sp>
+          <p:nvSpPr>
+            <p:cNvPr id="18" name="TextBox 17">
               <a:extLst>
                 <a:ext uri="{FF2B5EF4-FFF2-40B4-BE49-F238E27FC236}">
-                  <a16:creationId xmlns:a16="http://schemas.microsoft.com/office/drawing/2014/main" id="{DEF42C17-1687-AF14-1600-1DF166BACC58}"/>
+                  <a16:creationId xmlns:a16="http://schemas.microsoft.com/office/drawing/2014/main" id="{90B2D8A3-21E4-AB6E-B818-EE7A5A342BB4}"/>
                 </a:ext>
               </a:extLst>
             </p:cNvPr>
-            <p:cNvGrpSpPr/>
+            <p:cNvSpPr txBox="1"/>
             <p:nvPr/>
-          </p:nvGrpSpPr>
-          <p:grpSpPr>
+          </p:nvSpPr>
+          <p:spPr>
             <a:xfrm>
-              <a:off x="4187595" y="4306642"/>
-              <a:ext cx="1080277" cy="1200329"/>
-              <a:chOff x="4187595" y="4306642"/>
-              <a:chExt cx="1080277" cy="1200329"/>
+              <a:off x="3939444" y="4494768"/>
+              <a:ext cx="1398067" cy="830997"/>
             </a:xfrm>
-          </p:grpSpPr>
-          <p:sp>
-            <p:nvSpPr>
-              <p:cNvPr id="17" name="Rectangle 16">
-                <a:extLst>
-                  <a:ext uri="{FF2B5EF4-FFF2-40B4-BE49-F238E27FC236}">
-                    <a16:creationId xmlns:a16="http://schemas.microsoft.com/office/drawing/2014/main" id="{4E7821BF-5058-FF96-3415-42E18FF205F0}"/>
-                  </a:ext>
-                </a:extLst>
-              </p:cNvPr>
-              <p:cNvSpPr/>
-              <p:nvPr/>
-            </p:nvSpPr>
-            <p:spPr>
-              <a:xfrm>
-                <a:off x="4187595" y="4307628"/>
-                <a:ext cx="1080276" cy="766230"/>
-              </a:xfrm>
-              <a:prstGeom prst="rect">
-                <a:avLst/>
-              </a:prstGeom>
-              <a:noFill/>
-              <a:ln>
+            <a:prstGeom prst="rect">
+              <a:avLst/>
+            </a:prstGeom>
+            <a:noFill/>
+          </p:spPr>
+          <p:txBody>
+            <a:bodyPr wrap="square" rtlCol="0">
+              <a:spAutoFit/>
+            </a:bodyPr>
+            <a:lstStyle/>
+            <a:p>
+              <a:pPr algn="just"/>
+              <a:r>
+                <a:rPr lang="en-CN" sz="1200" dirty="0">
+                  <a:solidFill>
+                    <a:schemeClr val="bg2"/>
+                  </a:solidFill>
+                </a:rPr>
+                <a:t>海况偏差改正</a:t>
+              </a:r>
+            </a:p>
+            <a:p>
+              <a:pPr marL="228600" indent="-228600" algn="just">
+                <a:buAutoNum type="arabicPeriod"/>
+              </a:pPr>
+              <a:r>
+                <a:rPr lang="zh-CN" altLang="en-US" sz="1200" dirty="0">
+                  <a:solidFill>
+                    <a:schemeClr val="bg2"/>
+                  </a:solidFill>
+                </a:rPr>
+                <a:t>偏斜度偏差</a:t>
+              </a:r>
+              <a:endParaRPr lang="en-US" altLang="zh-CN" sz="1200" dirty="0">
                 <a:solidFill>
                   <a:schemeClr val="bg2"/>
                 </a:solidFill>
-              </a:ln>
-            </p:spPr>
-            <p:txBody>
-              <a:bodyPr wrap="square" lIns="0" rtlCol="0" anchor="ctr">
-                <a:noAutofit/>
-              </a:bodyPr>
-              <a:lstStyle/>
-              <a:p>
-                <a:pPr algn="l"/>
-                <a:endParaRPr lang="en-CN" b="1">
-                  <a:solidFill>
-                    <a:srgbClr val="FF0000"/>
-                  </a:solidFill>
-                  <a:latin typeface="微软雅黑" pitchFamily="34" charset="-122"/>
-                  <a:ea typeface="微软雅黑" pitchFamily="34" charset="-122"/>
-                </a:endParaRPr>
-              </a:p>
-            </p:txBody>
-          </p:sp>
-          <p:sp>
-            <p:nvSpPr>
-              <p:cNvPr id="18" name="TextBox 17">
-                <a:extLst>
-                  <a:ext uri="{FF2B5EF4-FFF2-40B4-BE49-F238E27FC236}">
-                    <a16:creationId xmlns:a16="http://schemas.microsoft.com/office/drawing/2014/main" id="{90B2D8A3-21E4-AB6E-B818-EE7A5A342BB4}"/>
-                  </a:ext>
-                </a:extLst>
-              </p:cNvPr>
-              <p:cNvSpPr txBox="1"/>
-              <p:nvPr/>
-            </p:nvSpPr>
-            <p:spPr>
-              <a:xfrm>
-                <a:off x="4187596" y="4306642"/>
-                <a:ext cx="1080276" cy="1200329"/>
-              </a:xfrm>
-              <a:prstGeom prst="rect">
-                <a:avLst/>
-              </a:prstGeom>
-              <a:noFill/>
-            </p:spPr>
-            <p:txBody>
-              <a:bodyPr wrap="square" rtlCol="0">
-                <a:spAutoFit/>
-              </a:bodyPr>
-              <a:lstStyle/>
-              <a:p>
-                <a:pPr algn="just"/>
-                <a:r>
-                  <a:rPr lang="en-CN" sz="1200">
-                    <a:solidFill>
-                      <a:schemeClr val="bg2"/>
-                    </a:solidFill>
-                  </a:rPr>
-                  <a:t>海况偏差改正</a:t>
-                </a:r>
-              </a:p>
-              <a:p>
-                <a:pPr marL="228600" indent="-228600" algn="just">
-                  <a:buAutoNum type="arabicPeriod"/>
-                </a:pPr>
-                <a:r>
-                  <a:rPr lang="zh-CN" altLang="en-US" sz="1200">
-                    <a:solidFill>
-                      <a:schemeClr val="bg2"/>
-                    </a:solidFill>
-                  </a:rPr>
-                  <a:t>偏斜度偏差</a:t>
-                </a:r>
-                <a:endParaRPr lang="en-US" altLang="zh-CN" sz="1200">
+              </a:endParaRPr>
+            </a:p>
+            <a:p>
+              <a:pPr marL="228600" indent="-228600" algn="just">
+                <a:buAutoNum type="arabicPeriod"/>
+              </a:pPr>
+              <a:r>
+                <a:rPr lang="zh-CN" altLang="en-US" sz="1200" dirty="0">
                   <a:solidFill>
                     <a:schemeClr val="bg2"/>
                   </a:solidFill>
-                </a:endParaRPr>
-              </a:p>
-              <a:p>
-                <a:pPr marL="228600" indent="-228600" algn="just">
-                  <a:buAutoNum type="arabicPeriod"/>
-                </a:pPr>
-                <a:r>
-                  <a:rPr lang="zh-CN" altLang="en-US" sz="1200">
-                    <a:solidFill>
-                      <a:schemeClr val="bg2"/>
-                    </a:solidFill>
-                  </a:rPr>
-                  <a:t>电磁偏移</a:t>
-                </a:r>
-                <a:endParaRPr lang="en-CN" sz="1200">
-                  <a:solidFill>
-                    <a:schemeClr val="bg2"/>
-                  </a:solidFill>
-                </a:endParaRPr>
-              </a:p>
-            </p:txBody>
-          </p:sp>
-        </p:grpSp>
-        <p:cxnSp>
-          <p:nvCxnSpPr>
-            <p:cNvPr id="20" name="Straight Arrow Connector 19">
-              <a:extLst>
-                <a:ext uri="{FF2B5EF4-FFF2-40B4-BE49-F238E27FC236}">
-                  <a16:creationId xmlns:a16="http://schemas.microsoft.com/office/drawing/2014/main" id="{AFE92835-8A06-05E6-F66C-7427E0068F7E}"/>
-                </a:ext>
-              </a:extLst>
-            </p:cNvPr>
-            <p:cNvCxnSpPr>
-              <a:cxnSpLocks/>
-              <a:stCxn id="27" idx="1"/>
-              <a:endCxn id="2" idx="3"/>
-            </p:cNvCxnSpPr>
-            <p:nvPr/>
-          </p:nvCxnSpPr>
-          <p:spPr bwMode="auto">
-            <a:xfrm flipH="1" flipV="1">
-              <a:off x="5359880" y="2455005"/>
-              <a:ext cx="516943" cy="47"/>
-            </a:xfrm>
-            <a:prstGeom prst="straightConnector1">
-              <a:avLst/>
-            </a:prstGeom>
-            <a:ln>
-              <a:headEnd type="none" w="med" len="med"/>
-              <a:tailEnd type="triangle"/>
-            </a:ln>
-          </p:spPr>
-          <p:style>
-            <a:lnRef idx="1">
-              <a:schemeClr val="dk1"/>
-            </a:lnRef>
-            <a:fillRef idx="0">
-              <a:schemeClr val="dk1"/>
-            </a:fillRef>
-            <a:effectRef idx="0">
-              <a:schemeClr val="dk1"/>
-            </a:effectRef>
-            <a:fontRef idx="minor">
-              <a:schemeClr val="tx1"/>
-            </a:fontRef>
-          </p:style>
-        </p:cxnSp>
-        <p:cxnSp>
-          <p:nvCxnSpPr>
-            <p:cNvPr id="21" name="Straight Arrow Connector 20">
-              <a:extLst>
-                <a:ext uri="{FF2B5EF4-FFF2-40B4-BE49-F238E27FC236}">
-                  <a16:creationId xmlns:a16="http://schemas.microsoft.com/office/drawing/2014/main" id="{0784CABF-6B9E-5D6D-7975-110C5D2D414E}"/>
-                </a:ext>
-              </a:extLst>
-            </p:cNvPr>
-            <p:cNvCxnSpPr>
-              <a:cxnSpLocks/>
-              <a:stCxn id="16" idx="0"/>
-            </p:cNvCxnSpPr>
-            <p:nvPr/>
-          </p:nvCxnSpPr>
-          <p:spPr bwMode="auto">
-            <a:xfrm flipV="1">
-              <a:off x="6585368" y="2761802"/>
-              <a:ext cx="569583" cy="507661"/>
-            </a:xfrm>
-            <a:prstGeom prst="straightConnector1">
-              <a:avLst/>
-            </a:prstGeom>
-            <a:ln>
-              <a:headEnd type="none" w="med" len="med"/>
-              <a:tailEnd type="triangle"/>
-            </a:ln>
-          </p:spPr>
-          <p:style>
-            <a:lnRef idx="1">
-              <a:schemeClr val="dk1"/>
-            </a:lnRef>
-            <a:fillRef idx="0">
-              <a:schemeClr val="dk1"/>
-            </a:fillRef>
-            <a:effectRef idx="0">
-              <a:schemeClr val="dk1"/>
-            </a:effectRef>
-            <a:fontRef idx="minor">
-              <a:schemeClr val="tx1"/>
-            </a:fontRef>
-          </p:style>
-        </p:cxnSp>
-        <p:cxnSp>
-          <p:nvCxnSpPr>
-            <p:cNvPr id="47" name="Straight Arrow Connector 46">
-              <a:extLst>
-                <a:ext uri="{FF2B5EF4-FFF2-40B4-BE49-F238E27FC236}">
-                  <a16:creationId xmlns:a16="http://schemas.microsoft.com/office/drawing/2014/main" id="{679C22A3-4C32-E958-5D10-DFD186B0418C}"/>
-                </a:ext>
-              </a:extLst>
-            </p:cNvPr>
-            <p:cNvCxnSpPr>
-              <a:cxnSpLocks/>
-              <a:stCxn id="29" idx="3"/>
-              <a:endCxn id="17" idx="3"/>
-            </p:cNvCxnSpPr>
-            <p:nvPr/>
-          </p:nvCxnSpPr>
-          <p:spPr bwMode="auto">
-            <a:xfrm flipH="1" flipV="1">
-              <a:off x="5267871" y="4690743"/>
-              <a:ext cx="282093" cy="435105"/>
-            </a:xfrm>
-            <a:prstGeom prst="straightConnector1">
-              <a:avLst/>
-            </a:prstGeom>
-            <a:ln>
-              <a:headEnd type="none" w="med" len="med"/>
-              <a:tailEnd type="triangle"/>
-            </a:ln>
-          </p:spPr>
-          <p:style>
-            <a:lnRef idx="1">
-              <a:schemeClr val="dk1"/>
-            </a:lnRef>
-            <a:fillRef idx="0">
-              <a:schemeClr val="dk1"/>
-            </a:fillRef>
-            <a:effectRef idx="0">
-              <a:schemeClr val="dk1"/>
-            </a:effectRef>
-            <a:fontRef idx="minor">
-              <a:schemeClr val="tx1"/>
-            </a:fontRef>
-          </p:style>
-        </p:cxnSp>
+                </a:rPr>
+                <a:t>电磁偏移</a:t>
+              </a:r>
+              <a:endParaRPr lang="en-CN" sz="1200" dirty="0">
+                <a:solidFill>
+                  <a:schemeClr val="bg2"/>
+                </a:solidFill>
+              </a:endParaRPr>
+            </a:p>
+          </p:txBody>
+        </p:sp>
       </p:grpSp>
+      <p:cxnSp>
+        <p:nvCxnSpPr>
+          <p:cNvPr id="20" name="Straight Arrow Connector 19">
+            <a:extLst>
+              <a:ext uri="{FF2B5EF4-FFF2-40B4-BE49-F238E27FC236}">
+                <a16:creationId xmlns:a16="http://schemas.microsoft.com/office/drawing/2014/main" id="{AFE92835-8A06-05E6-F66C-7427E0068F7E}"/>
+              </a:ext>
+            </a:extLst>
+          </p:cNvPr>
+          <p:cNvCxnSpPr>
+            <a:cxnSpLocks/>
+            <a:stCxn id="27" idx="1"/>
+            <a:endCxn id="2" idx="3"/>
+          </p:cNvCxnSpPr>
+          <p:nvPr/>
+        </p:nvCxnSpPr>
+        <p:spPr bwMode="auto">
+          <a:xfrm flipH="1" flipV="1">
+            <a:off x="4749742" y="1756653"/>
+            <a:ext cx="488679" cy="2536"/>
+          </a:xfrm>
+          <a:prstGeom prst="straightConnector1">
+            <a:avLst/>
+          </a:prstGeom>
+          <a:ln>
+            <a:headEnd type="none" w="med" len="med"/>
+            <a:tailEnd type="triangle"/>
+          </a:ln>
+        </p:spPr>
+        <p:style>
+          <a:lnRef idx="1">
+            <a:schemeClr val="dk1"/>
+          </a:lnRef>
+          <a:fillRef idx="0">
+            <a:schemeClr val="dk1"/>
+          </a:fillRef>
+          <a:effectRef idx="0">
+            <a:schemeClr val="dk1"/>
+          </a:effectRef>
+          <a:fontRef idx="minor">
+            <a:schemeClr val="tx1"/>
+          </a:fontRef>
+        </p:style>
+      </p:cxnSp>
+      <p:cxnSp>
+        <p:nvCxnSpPr>
+          <p:cNvPr id="21" name="Straight Arrow Connector 20">
+            <a:extLst>
+              <a:ext uri="{FF2B5EF4-FFF2-40B4-BE49-F238E27FC236}">
+                <a16:creationId xmlns:a16="http://schemas.microsoft.com/office/drawing/2014/main" id="{0784CABF-6B9E-5D6D-7975-110C5D2D414E}"/>
+              </a:ext>
+            </a:extLst>
+          </p:cNvPr>
+          <p:cNvCxnSpPr>
+            <a:cxnSpLocks/>
+            <a:stCxn id="16" idx="0"/>
+            <a:endCxn id="13" idx="1"/>
+          </p:cNvCxnSpPr>
+          <p:nvPr/>
+        </p:nvCxnSpPr>
+        <p:spPr bwMode="auto">
+          <a:xfrm flipV="1">
+            <a:off x="5946966" y="2572236"/>
+            <a:ext cx="402564" cy="1364"/>
+          </a:xfrm>
+          <a:prstGeom prst="straightConnector1">
+            <a:avLst/>
+          </a:prstGeom>
+          <a:ln>
+            <a:headEnd type="none" w="med" len="med"/>
+            <a:tailEnd type="triangle"/>
+          </a:ln>
+        </p:spPr>
+        <p:style>
+          <a:lnRef idx="1">
+            <a:schemeClr val="dk1"/>
+          </a:lnRef>
+          <a:fillRef idx="0">
+            <a:schemeClr val="dk1"/>
+          </a:fillRef>
+          <a:effectRef idx="0">
+            <a:schemeClr val="dk1"/>
+          </a:effectRef>
+          <a:fontRef idx="minor">
+            <a:schemeClr val="tx1"/>
+          </a:fontRef>
+        </p:style>
+      </p:cxnSp>
+      <p:cxnSp>
+        <p:nvCxnSpPr>
+          <p:cNvPr id="47" name="Straight Arrow Connector 46">
+            <a:extLst>
+              <a:ext uri="{FF2B5EF4-FFF2-40B4-BE49-F238E27FC236}">
+                <a16:creationId xmlns:a16="http://schemas.microsoft.com/office/drawing/2014/main" id="{679C22A3-4C32-E958-5D10-DFD186B0418C}"/>
+              </a:ext>
+            </a:extLst>
+          </p:cNvPr>
+          <p:cNvCxnSpPr>
+            <a:cxnSpLocks/>
+            <a:stCxn id="29" idx="3"/>
+            <a:endCxn id="17" idx="3"/>
+          </p:cNvCxnSpPr>
+          <p:nvPr/>
+        </p:nvCxnSpPr>
+        <p:spPr bwMode="auto">
+          <a:xfrm flipH="1" flipV="1">
+            <a:off x="4527798" y="3898861"/>
+            <a:ext cx="383764" cy="531124"/>
+          </a:xfrm>
+          <a:prstGeom prst="straightConnector1">
+            <a:avLst/>
+          </a:prstGeom>
+          <a:ln>
+            <a:headEnd type="none" w="med" len="med"/>
+            <a:tailEnd type="triangle"/>
+          </a:ln>
+        </p:spPr>
+        <p:style>
+          <a:lnRef idx="1">
+            <a:schemeClr val="dk1"/>
+          </a:lnRef>
+          <a:fillRef idx="0">
+            <a:schemeClr val="dk1"/>
+          </a:fillRef>
+          <a:effectRef idx="0">
+            <a:schemeClr val="dk1"/>
+          </a:effectRef>
+          <a:fontRef idx="minor">
+            <a:schemeClr val="tx1"/>
+          </a:fontRef>
+        </p:style>
+      </p:cxnSp>
       <mc:AlternateContent xmlns:mc="http://schemas.openxmlformats.org/markup-compatibility/2006" xmlns:a14="http://schemas.microsoft.com/office/drawing/2010/main">
         <mc:Choice Requires="a14">
           <p:sp>
@@ -19461,7 +19420,7 @@
                   </m:oMath>
                 </a14:m>
                 <a:r>
-                  <a:rPr lang="zh-CN" altLang="en-US" sz="1600" i="1">
+                  <a:rPr lang="zh-CN" altLang="en-US" sz="1600" i="1" dirty="0">
                     <a:solidFill>
                       <a:srgbClr val="000000"/>
                     </a:solidFill>
@@ -19529,7 +19488,7 @@
                   </m:oMath>
                 </a14:m>
                 <a:r>
-                  <a:rPr lang="zh-CN" altLang="en-US" sz="1600" i="1">
+                  <a:rPr lang="zh-CN" altLang="en-US" sz="1600" i="1" dirty="0">
                     <a:solidFill>
                       <a:srgbClr val="000000"/>
                     </a:solidFill>
@@ -19597,7 +19556,7 @@
                   </m:oMath>
                 </a14:m>
                 <a:r>
-                  <a:rPr lang="zh-CN" altLang="en-US" sz="1600" i="1">
+                  <a:rPr lang="zh-CN" altLang="en-US" sz="1600" i="1" dirty="0">
                     <a:solidFill>
                       <a:srgbClr val="000000"/>
                     </a:solidFill>
@@ -19665,7 +19624,7 @@
                   </m:oMath>
                 </a14:m>
                 <a:r>
-                  <a:rPr lang="zh-CN" altLang="en-US" sz="1600" i="1">
+                  <a:rPr lang="zh-CN" altLang="en-US" sz="1600" i="1" dirty="0">
                     <a:solidFill>
                       <a:srgbClr val="000000"/>
                     </a:solidFill>
@@ -19733,7 +19692,7 @@
                   </m:oMath>
                 </a14:m>
                 <a:r>
-                  <a:rPr lang="zh-CN" altLang="en-US" sz="1600" i="1">
+                  <a:rPr lang="zh-CN" altLang="en-US" sz="1600" i="1" dirty="0">
                     <a:solidFill>
                       <a:srgbClr val="000000"/>
                     </a:solidFill>
@@ -19741,7 +19700,7 @@
                   </a:rPr>
                   <a:t>为动态大气改正。</a:t>
                 </a:r>
-                <a:endParaRPr lang="en-US" altLang="zh-CN" sz="1600" i="1">
+                <a:endParaRPr lang="en-US" altLang="zh-CN" sz="1600" i="1" dirty="0">
                   <a:solidFill>
                     <a:srgbClr val="000000"/>
                   </a:solidFill>
@@ -20747,7 +20706,7 @@
         <p:spPr>
           <a:xfrm>
             <a:off x="289971" y="952281"/>
-            <a:ext cx="4156185" cy="662489"/>
+            <a:ext cx="2895991" cy="662489"/>
           </a:xfrm>
           <a:prstGeom prst="rect">
             <a:avLst/>
@@ -22235,7 +22194,7 @@
                     <a:latin typeface="+mn-ea"/>
                     <a:ea typeface="+mn-ea"/>
                   </a:rPr>
-                  <a:t>，假定脉冲信号得有效持续时间为</a:t>
+                  <a:t>，假定脉冲信号的有效持续时间为</a:t>
                 </a:r>
                 <a14:m>
                   <m:oMath xmlns:m="http://schemas.openxmlformats.org/officeDocument/2006/math">
@@ -22445,7 +22404,7 @@
               <a:blipFill>
                 <a:blip r:embed="rId3"/>
                 <a:stretch>
-                  <a:fillRect l="-2183" r="-1143" b="-1114"/>
+                  <a:fillRect l="-2160" r="-1080" b="-1157"/>
                 </a:stretch>
               </a:blipFill>
             </p:spPr>
@@ -22454,7 +22413,7 @@
               <a:lstStyle/>
               <a:p>
                 <a:r>
-                  <a:rPr lang="zh-CN" altLang="en-US">
+                  <a:rPr lang="en-CN">
                     <a:noFill/>
                   </a:rPr>
                   <a:t> </a:t>
@@ -24055,8 +24014,8 @@
           </p:nvSpPr>
           <p:spPr>
             <a:xfrm>
-              <a:off x="4139264" y="6140060"/>
-              <a:ext cx="877163" cy="369332"/>
+              <a:off x="4154429" y="6140060"/>
+              <a:ext cx="846833" cy="361023"/>
             </a:xfrm>
             <a:prstGeom prst="rect">
               <a:avLst/>
@@ -24070,14 +24029,14 @@
             <a:lstStyle/>
             <a:p>
               <a:r>
-                <a:rPr lang="en-CN" sz="1600">
+                <a:rPr lang="en-CN" sz="1600" dirty="0">
                   <a:solidFill>
                     <a:schemeClr val="bg2"/>
                   </a:solidFill>
                   <a:latin typeface="+mn-ea"/>
                   <a:ea typeface="+mn-ea"/>
                 </a:rPr>
-                <a:t>方位向</a:t>
+                <a:t>沿轨向</a:t>
               </a:r>
             </a:p>
           </p:txBody>
@@ -24800,8 +24759,8 @@
         </p:nvSpPr>
         <p:spPr>
           <a:xfrm>
-            <a:off x="396340" y="1602462"/>
-            <a:ext cx="8250703" cy="400110"/>
+            <a:off x="396341" y="1470364"/>
+            <a:ext cx="8250703" cy="961225"/>
           </a:xfrm>
           <a:prstGeom prst="rect">
             <a:avLst/>
@@ -24814,7 +24773,11 @@
           </a:bodyPr>
           <a:lstStyle/>
           <a:p>
-            <a:pPr algn="just"/>
+            <a:pPr algn="just">
+              <a:lnSpc>
+                <a:spcPct val="150000"/>
+              </a:lnSpc>
+            </a:pPr>
             <a:r>
               <a:rPr lang="zh-CN" altLang="en-US" sz="2000" dirty="0">
                 <a:solidFill>
@@ -24823,7 +24786,27 @@
                 <a:latin typeface="+mn-ea"/>
                 <a:ea typeface="+mn-ea"/>
               </a:rPr>
-              <a:t>雷达高度计的关键原理是测量雷达回波的脉冲形状和时间信息。</a:t>
+              <a:t>雷达高度计（脉冲有限</a:t>
+            </a:r>
+            <a:r>
+              <a:rPr lang="en-US" altLang="zh-CN" sz="2000" dirty="0">
+                <a:solidFill>
+                  <a:schemeClr val="bg2"/>
+                </a:solidFill>
+                <a:latin typeface="+mn-ea"/>
+                <a:ea typeface="+mn-ea"/>
+              </a:rPr>
+              <a:t>/SAR</a:t>
+            </a:r>
+            <a:r>
+              <a:rPr lang="zh-CN" altLang="en-US" sz="2000" dirty="0">
+                <a:solidFill>
+                  <a:schemeClr val="bg2"/>
+                </a:solidFill>
+                <a:latin typeface="+mn-ea"/>
+                <a:ea typeface="+mn-ea"/>
+              </a:rPr>
+              <a:t>高度计）的关键原理是测量雷达回波的脉冲形状和时间信息。</a:t>
             </a:r>
             <a:endParaRPr lang="en-US" sz="2000" dirty="0">
               <a:solidFill>
@@ -24857,8 +24840,8 @@
         </p:blipFill>
         <p:spPr>
           <a:xfrm>
-            <a:off x="1549203" y="2114182"/>
-            <a:ext cx="5660403" cy="4446747"/>
+            <a:off x="1882104" y="2522942"/>
+            <a:ext cx="5379791" cy="4226301"/>
           </a:xfrm>
           <a:prstGeom prst="rect">
             <a:avLst/>
@@ -26325,7 +26308,7 @@
               <a:lstStyle/>
               <a:p>
                 <a:r>
-                  <a:rPr lang="en-CN" sz="1600">
+                  <a:rPr lang="en-CN" sz="1600" dirty="0">
                     <a:solidFill>
                       <a:schemeClr val="bg2"/>
                     </a:solidFill>
@@ -27000,8 +26983,8 @@
               </p:nvSpPr>
               <p:spPr>
                 <a:xfrm>
-                  <a:off x="2295649" y="6257937"/>
-                  <a:ext cx="343940" cy="261610"/>
+                  <a:off x="2273496" y="6257937"/>
+                  <a:ext cx="388248" cy="307777"/>
                 </a:xfrm>
                 <a:prstGeom prst="rect">
                   <a:avLst/>
@@ -27024,7 +27007,7 @@
                         <m:sSub>
                           <m:sSubPr>
                             <m:ctrlPr>
-                              <a:rPr lang="en-CN" sz="1100" i="1" smtClean="0">
+                              <a:rPr lang="en-CN" sz="1400" i="1" smtClean="0">
                                 <a:solidFill>
                                   <a:schemeClr val="bg2"/>
                                 </a:solidFill>
@@ -27035,7 +27018,7 @@
                           </m:sSubPr>
                           <m:e>
                             <m:r>
-                              <a:rPr lang="en-US" sz="1100" b="0" i="1" smtClean="0">
+                              <a:rPr lang="en-US" sz="1400" b="0" i="1" smtClean="0">
                                 <a:solidFill>
                                   <a:schemeClr val="bg2"/>
                                 </a:solidFill>
@@ -27047,7 +27030,7 @@
                           </m:e>
                           <m:sub>
                             <m:r>
-                              <a:rPr lang="en-US" sz="1100" b="0" i="1" smtClean="0">
+                              <a:rPr lang="en-US" sz="1400" b="0" i="1" smtClean="0">
                                 <a:solidFill>
                                   <a:schemeClr val="bg2"/>
                                 </a:solidFill>
@@ -27061,7 +27044,7 @@
                       </m:oMath>
                     </m:oMathPara>
                   </a14:m>
-                  <a:endParaRPr lang="en-CN" sz="1100">
+                  <a:endParaRPr lang="en-CN" sz="1400" dirty="0">
                     <a:solidFill>
                       <a:schemeClr val="bg2"/>
                     </a:solidFill>
@@ -27089,8 +27072,8 @@
               </p:nvSpPr>
               <p:spPr>
                 <a:xfrm>
-                  <a:off x="2295649" y="6257937"/>
-                  <a:ext cx="343940" cy="261610"/>
+                  <a:off x="2273496" y="6257937"/>
+                  <a:ext cx="388248" cy="307777"/>
                 </a:xfrm>
                 <a:prstGeom prst="rect">
                   <a:avLst/>
@@ -27107,7 +27090,7 @@
                 <a:lstStyle/>
                 <a:p>
                   <a:r>
-                    <a:rPr lang="zh-CN" altLang="en-US">
+                    <a:rPr lang="en-CN">
                       <a:noFill/>
                     </a:rPr>
                     <a:t> </a:t>
@@ -27133,8 +27116,8 @@
               </p:nvSpPr>
               <p:spPr>
                 <a:xfrm>
-                  <a:off x="3218766" y="6256676"/>
-                  <a:ext cx="451342" cy="276742"/>
+                  <a:off x="3182667" y="6256676"/>
+                  <a:ext cx="523541" cy="327077"/>
                 </a:xfrm>
                 <a:prstGeom prst="rect">
                   <a:avLst/>
@@ -27157,7 +27140,7 @@
                         <m:sSub>
                           <m:sSubPr>
                             <m:ctrlPr>
-                              <a:rPr lang="en-CN" sz="1100" i="1" smtClean="0">
+                              <a:rPr lang="en-CN" sz="1400" i="1" smtClean="0">
                                 <a:solidFill>
                                   <a:schemeClr val="bg2"/>
                                 </a:solidFill>
@@ -27168,7 +27151,7 @@
                           </m:sSubPr>
                           <m:e>
                             <m:r>
-                              <a:rPr lang="en-US" sz="1100" b="0" i="1" smtClean="0">
+                              <a:rPr lang="en-US" sz="1400" b="0" i="1" smtClean="0">
                                 <a:solidFill>
                                   <a:schemeClr val="bg2"/>
                                 </a:solidFill>
@@ -27180,7 +27163,7 @@
                           </m:e>
                           <m:sub>
                             <m:r>
-                              <a:rPr lang="en-US" sz="1100" b="0" i="1" smtClean="0">
+                              <a:rPr lang="en-US" sz="1400" b="0" i="1" smtClean="0">
                                 <a:solidFill>
                                   <a:schemeClr val="bg2"/>
                                 </a:solidFill>
@@ -27194,7 +27177,7 @@
                       </m:oMath>
                     </m:oMathPara>
                   </a14:m>
-                  <a:endParaRPr lang="en-CN" sz="1100">
+                  <a:endParaRPr lang="en-CN" sz="1400" dirty="0">
                     <a:solidFill>
                       <a:schemeClr val="bg2"/>
                     </a:solidFill>
@@ -27222,8 +27205,8 @@
               </p:nvSpPr>
               <p:spPr>
                 <a:xfrm>
-                  <a:off x="3218766" y="6256676"/>
-                  <a:ext cx="451342" cy="276742"/>
+                  <a:off x="3182667" y="6256676"/>
+                  <a:ext cx="523541" cy="327077"/>
                 </a:xfrm>
                 <a:prstGeom prst="rect">
                   <a:avLst/>
@@ -27231,7 +27214,7 @@
                 <a:blipFill>
                   <a:blip r:embed="rId5"/>
                   <a:stretch>
-                    <a:fillRect b="-4444"/>
+                    <a:fillRect/>
                   </a:stretch>
                 </a:blipFill>
               </p:spPr>
@@ -27240,7 +27223,7 @@
                 <a:lstStyle/>
                 <a:p>
                   <a:r>
-                    <a:rPr lang="zh-CN" altLang="en-US">
+                    <a:rPr lang="en-CN">
                       <a:noFill/>
                     </a:rPr>
                     <a:t> </a:t>
@@ -27266,8 +27249,8 @@
               </p:nvSpPr>
               <p:spPr>
                 <a:xfrm>
-                  <a:off x="4280239" y="6257182"/>
-                  <a:ext cx="343940" cy="261610"/>
+                  <a:off x="4260169" y="6257182"/>
+                  <a:ext cx="384080" cy="307777"/>
                 </a:xfrm>
                 <a:prstGeom prst="rect">
                   <a:avLst/>
@@ -27290,7 +27273,7 @@
                         <m:sSub>
                           <m:sSubPr>
                             <m:ctrlPr>
-                              <a:rPr lang="en-CN" sz="1100" i="1" smtClean="0">
+                              <a:rPr lang="en-CN" sz="1400" i="1" smtClean="0">
                                 <a:solidFill>
                                   <a:schemeClr val="bg2"/>
                                 </a:solidFill>
@@ -27301,7 +27284,7 @@
                           </m:sSubPr>
                           <m:e>
                             <m:r>
-                              <a:rPr lang="en-US" sz="1100" b="0" i="1" smtClean="0">
+                              <a:rPr lang="en-US" sz="1400" b="0" i="1" smtClean="0">
                                 <a:solidFill>
                                   <a:schemeClr val="bg2"/>
                                 </a:solidFill>
@@ -27313,7 +27296,7 @@
                           </m:e>
                           <m:sub>
                             <m:r>
-                              <a:rPr lang="en-US" sz="1100" b="0" i="1" smtClean="0">
+                              <a:rPr lang="en-US" sz="1400" b="0" i="1" smtClean="0">
                                 <a:solidFill>
                                   <a:schemeClr val="bg2"/>
                                 </a:solidFill>
@@ -27327,7 +27310,7 @@
                       </m:oMath>
                     </m:oMathPara>
                   </a14:m>
-                  <a:endParaRPr lang="en-CN" sz="1100">
+                  <a:endParaRPr lang="en-CN" sz="1400">
                     <a:solidFill>
                       <a:schemeClr val="bg2"/>
                     </a:solidFill>
@@ -27355,8 +27338,8 @@
               </p:nvSpPr>
               <p:spPr>
                 <a:xfrm>
-                  <a:off x="4280239" y="6257182"/>
-                  <a:ext cx="343940" cy="261610"/>
+                  <a:off x="4260169" y="6257182"/>
+                  <a:ext cx="384080" cy="307777"/>
                 </a:xfrm>
                 <a:prstGeom prst="rect">
                   <a:avLst/>
@@ -27373,7 +27356,7 @@
                 <a:lstStyle/>
                 <a:p>
                   <a:r>
-                    <a:rPr lang="zh-CN" altLang="en-US">
+                    <a:rPr lang="en-CN">
                       <a:noFill/>
                     </a:rPr>
                     <a:t> </a:t>
@@ -27399,8 +27382,8 @@
               </p:nvSpPr>
               <p:spPr>
                 <a:xfrm>
-                  <a:off x="5254515" y="6250084"/>
-                  <a:ext cx="448136" cy="276742"/>
+                  <a:off x="5214729" y="6250084"/>
+                  <a:ext cx="527709" cy="327077"/>
                 </a:xfrm>
                 <a:prstGeom prst="rect">
                   <a:avLst/>
@@ -27423,7 +27406,7 @@
                         <m:sSub>
                           <m:sSubPr>
                             <m:ctrlPr>
-                              <a:rPr lang="en-CN" sz="1100" i="1" smtClean="0">
+                              <a:rPr lang="en-CN" sz="1400" i="1" smtClean="0">
                                 <a:solidFill>
                                   <a:schemeClr val="bg2"/>
                                 </a:solidFill>
@@ -27434,7 +27417,7 @@
                           </m:sSubPr>
                           <m:e>
                             <m:r>
-                              <a:rPr lang="en-US" sz="1100" b="0" i="1" smtClean="0">
+                              <a:rPr lang="en-US" sz="1400" b="0" i="1" smtClean="0">
                                 <a:solidFill>
                                   <a:schemeClr val="bg2"/>
                                 </a:solidFill>
@@ -27446,7 +27429,7 @@
                           </m:e>
                           <m:sub>
                             <m:r>
-                              <a:rPr lang="en-US" sz="1100" b="0" i="1" smtClean="0">
+                              <a:rPr lang="en-US" sz="1400" b="0" i="1" smtClean="0">
                                 <a:solidFill>
                                   <a:schemeClr val="bg2"/>
                                 </a:solidFill>
@@ -27460,7 +27443,7 @@
                       </m:oMath>
                     </m:oMathPara>
                   </a14:m>
-                  <a:endParaRPr lang="en-CN" sz="1100">
+                  <a:endParaRPr lang="en-CN" sz="1400">
                     <a:solidFill>
                       <a:schemeClr val="bg2"/>
                     </a:solidFill>
@@ -27488,8 +27471,8 @@
               </p:nvSpPr>
               <p:spPr>
                 <a:xfrm>
-                  <a:off x="5254515" y="6250084"/>
-                  <a:ext cx="448136" cy="276742"/>
+                  <a:off x="5214729" y="6250084"/>
+                  <a:ext cx="527709" cy="327077"/>
                 </a:xfrm>
                 <a:prstGeom prst="rect">
                   <a:avLst/>
@@ -27497,7 +27480,7 @@
                 <a:blipFill>
                   <a:blip r:embed="rId7"/>
                   <a:stretch>
-                    <a:fillRect b="-4444"/>
+                    <a:fillRect b="-3704"/>
                   </a:stretch>
                 </a:blipFill>
               </p:spPr>
@@ -27506,7 +27489,7 @@
                 <a:lstStyle/>
                 <a:p>
                   <a:r>
-                    <a:rPr lang="en-US">
+                    <a:rPr lang="en-CN">
                       <a:noFill/>
                     </a:rPr>
                     <a:t> </a:t>
@@ -27532,8 +27515,8 @@
               </p:nvSpPr>
               <p:spPr>
                 <a:xfrm>
-                  <a:off x="6366635" y="6231661"/>
-                  <a:ext cx="343940" cy="261610"/>
+                  <a:off x="6344482" y="6231661"/>
+                  <a:ext cx="388248" cy="307777"/>
                 </a:xfrm>
                 <a:prstGeom prst="rect">
                   <a:avLst/>
@@ -27556,7 +27539,7 @@
                         <m:sSub>
                           <m:sSubPr>
                             <m:ctrlPr>
-                              <a:rPr lang="en-CN" sz="1100" i="1" smtClean="0">
+                              <a:rPr lang="en-CN" sz="1400" i="1" smtClean="0">
                                 <a:solidFill>
                                   <a:schemeClr val="bg2"/>
                                 </a:solidFill>
@@ -27567,7 +27550,7 @@
                           </m:sSubPr>
                           <m:e>
                             <m:r>
-                              <a:rPr lang="en-US" sz="1100" b="0" i="1" smtClean="0">
+                              <a:rPr lang="en-US" sz="1400" b="0" i="1" smtClean="0">
                                 <a:solidFill>
                                   <a:schemeClr val="bg2"/>
                                 </a:solidFill>
@@ -27579,7 +27562,7 @@
                           </m:e>
                           <m:sub>
                             <m:r>
-                              <a:rPr lang="en-US" sz="1100" b="0" i="1" smtClean="0">
+                              <a:rPr lang="en-US" sz="1400" b="0" i="1" smtClean="0">
                                 <a:solidFill>
                                   <a:schemeClr val="bg2"/>
                                 </a:solidFill>
@@ -27593,7 +27576,7 @@
                       </m:oMath>
                     </m:oMathPara>
                   </a14:m>
-                  <a:endParaRPr lang="en-CN" sz="1100">
+                  <a:endParaRPr lang="en-CN" sz="1400">
                     <a:solidFill>
                       <a:schemeClr val="bg2"/>
                     </a:solidFill>
@@ -27621,8 +27604,8 @@
               </p:nvSpPr>
               <p:spPr>
                 <a:xfrm>
-                  <a:off x="6366635" y="6231661"/>
-                  <a:ext cx="343940" cy="261610"/>
+                  <a:off x="6344482" y="6231661"/>
+                  <a:ext cx="388248" cy="307777"/>
                 </a:xfrm>
                 <a:prstGeom prst="rect">
                   <a:avLst/>
@@ -27639,7 +27622,7 @@
                 <a:lstStyle/>
                 <a:p>
                   <a:r>
-                    <a:rPr lang="zh-CN" altLang="en-US">
+                    <a:rPr lang="en-CN">
                       <a:noFill/>
                     </a:rPr>
                     <a:t> </a:t>
@@ -27666,7 +27649,7 @@
             </p:nvSpPr>
             <p:spPr>
               <a:xfrm>
-                <a:off x="447224" y="6257182"/>
+                <a:off x="485598" y="6057862"/>
                 <a:ext cx="304891" cy="261610"/>
               </a:xfrm>
               <a:prstGeom prst="rect">
@@ -27700,7 +27683,7 @@
                     </m:oMath>
                   </m:oMathPara>
                 </a14:m>
-                <a:endParaRPr lang="en-CN" sz="1100">
+                <a:endParaRPr lang="en-CN" sz="1100" dirty="0">
                   <a:solidFill>
                     <a:schemeClr val="bg2"/>
                   </a:solidFill>
@@ -27728,7 +27711,7 @@
             </p:nvSpPr>
             <p:spPr>
               <a:xfrm>
-                <a:off x="447224" y="6257182"/>
+                <a:off x="485598" y="6057862"/>
                 <a:ext cx="304891" cy="261610"/>
               </a:xfrm>
               <a:prstGeom prst="rect">
@@ -27746,7 +27729,7 @@
               <a:lstStyle/>
               <a:p>
                 <a:r>
-                  <a:rPr lang="zh-CN" altLang="en-US">
+                  <a:rPr lang="en-CN">
                     <a:noFill/>
                   </a:rPr>
                   <a:t> </a:t>
@@ -29476,8 +29459,8 @@
         </p:nvCxnSpPr>
         <p:spPr bwMode="auto">
           <a:xfrm>
-            <a:off x="3633391" y="3487584"/>
-            <a:ext cx="18067" cy="2210061"/>
+            <a:off x="3297499" y="3350237"/>
+            <a:ext cx="6386" cy="2599238"/>
           </a:xfrm>
           <a:prstGeom prst="line">
             <a:avLst/>
@@ -29505,136 +29488,395 @@
           </a:fontRef>
         </p:style>
       </p:cxnSp>
-      <p:grpSp>
-        <p:nvGrpSpPr>
-          <p:cNvPr id="60" name="Group 59">
+      <p:cxnSp>
+        <p:nvCxnSpPr>
+          <p:cNvPr id="30" name="Straight Arrow Connector 29">
             <a:extLst>
               <a:ext uri="{FF2B5EF4-FFF2-40B4-BE49-F238E27FC236}">
-                <a16:creationId xmlns:a16="http://schemas.microsoft.com/office/drawing/2014/main" id="{AF3B08FD-7385-D786-9C26-B064E522A2A5}"/>
+                <a16:creationId xmlns:a16="http://schemas.microsoft.com/office/drawing/2014/main" id="{26C5FF93-F7F6-4134-2836-7037DEFB5B4D}"/>
               </a:ext>
             </a:extLst>
           </p:cNvPr>
-          <p:cNvGrpSpPr/>
+          <p:cNvCxnSpPr>
+            <a:cxnSpLocks/>
+          </p:cNvCxnSpPr>
           <p:nvPr/>
-        </p:nvGrpSpPr>
-        <p:grpSpPr>
+        </p:nvCxnSpPr>
+        <p:spPr bwMode="auto">
           <a:xfrm>
-            <a:off x="1599357" y="3225799"/>
-            <a:ext cx="5834617" cy="3492605"/>
-            <a:chOff x="1388884" y="4321270"/>
-            <a:chExt cx="5979195" cy="2274124"/>
+            <a:off x="2171969" y="5967764"/>
+            <a:ext cx="5104421" cy="0"/>
           </a:xfrm>
-        </p:grpSpPr>
-        <p:grpSp>
-          <p:nvGrpSpPr>
-            <p:cNvPr id="18" name="Group 17">
-              <a:extLst>
-                <a:ext uri="{FF2B5EF4-FFF2-40B4-BE49-F238E27FC236}">
-                  <a16:creationId xmlns:a16="http://schemas.microsoft.com/office/drawing/2014/main" id="{1091B69F-A1A5-4496-C1D1-10A4842D32AE}"/>
-                </a:ext>
-              </a:extLst>
-            </p:cNvPr>
-            <p:cNvGrpSpPr/>
-            <p:nvPr/>
-          </p:nvGrpSpPr>
-          <p:grpSpPr>
-            <a:xfrm>
-              <a:off x="1388884" y="4321270"/>
-              <a:ext cx="5979195" cy="2001958"/>
-              <a:chOff x="255835" y="4512270"/>
-              <a:chExt cx="5979195" cy="2144223"/>
-            </a:xfrm>
-          </p:grpSpPr>
-          <p:cxnSp>
-            <p:nvCxnSpPr>
-              <p:cNvPr id="30" name="Straight Arrow Connector 29">
+          <a:prstGeom prst="straightConnector1">
+            <a:avLst/>
+          </a:prstGeom>
+          <a:ln>
+            <a:headEnd type="none" w="med" len="med"/>
+            <a:tailEnd type="triangle"/>
+          </a:ln>
+        </p:spPr>
+        <p:style>
+          <a:lnRef idx="1">
+            <a:schemeClr val="dk1"/>
+          </a:lnRef>
+          <a:fillRef idx="0">
+            <a:schemeClr val="dk1"/>
+          </a:fillRef>
+          <a:effectRef idx="0">
+            <a:schemeClr val="dk1"/>
+          </a:effectRef>
+          <a:fontRef idx="minor">
+            <a:schemeClr val="tx1"/>
+          </a:fontRef>
+        </p:style>
+      </p:cxnSp>
+      <p:cxnSp>
+        <p:nvCxnSpPr>
+          <p:cNvPr id="31" name="Straight Arrow Connector 30">
+            <a:extLst>
+              <a:ext uri="{FF2B5EF4-FFF2-40B4-BE49-F238E27FC236}">
+                <a16:creationId xmlns:a16="http://schemas.microsoft.com/office/drawing/2014/main" id="{60E905C7-DE14-39E8-2099-3EF3AA54E833}"/>
+              </a:ext>
+            </a:extLst>
+          </p:cNvPr>
+          <p:cNvCxnSpPr>
+            <a:cxnSpLocks/>
+          </p:cNvCxnSpPr>
+          <p:nvPr/>
+        </p:nvCxnSpPr>
+        <p:spPr bwMode="auto">
+          <a:xfrm flipV="1">
+            <a:off x="2171969" y="3225799"/>
+            <a:ext cx="0" cy="2741965"/>
+          </a:xfrm>
+          <a:prstGeom prst="straightConnector1">
+            <a:avLst/>
+          </a:prstGeom>
+          <a:ln>
+            <a:headEnd type="none" w="med" len="med"/>
+            <a:tailEnd type="triangle"/>
+          </a:ln>
+        </p:spPr>
+        <p:style>
+          <a:lnRef idx="1">
+            <a:schemeClr val="dk1"/>
+          </a:lnRef>
+          <a:fillRef idx="0">
+            <a:schemeClr val="dk1"/>
+          </a:fillRef>
+          <a:effectRef idx="0">
+            <a:schemeClr val="dk1"/>
+          </a:effectRef>
+          <a:fontRef idx="minor">
+            <a:schemeClr val="tx1"/>
+          </a:fontRef>
+        </p:style>
+      </p:cxnSp>
+      <p:sp>
+        <p:nvSpPr>
+          <p:cNvPr id="32" name="TextBox 31">
+            <a:extLst>
+              <a:ext uri="{FF2B5EF4-FFF2-40B4-BE49-F238E27FC236}">
+                <a16:creationId xmlns:a16="http://schemas.microsoft.com/office/drawing/2014/main" id="{B1369311-1423-5BFB-9698-B2DE9D05E222}"/>
+              </a:ext>
+            </a:extLst>
+          </p:cNvPr>
+          <p:cNvSpPr txBox="1"/>
+          <p:nvPr/>
+        </p:nvSpPr>
+        <p:spPr>
+          <a:xfrm>
+            <a:off x="1599357" y="3295629"/>
+            <a:ext cx="595036" cy="338554"/>
+          </a:xfrm>
+          <a:prstGeom prst="rect">
+            <a:avLst/>
+          </a:prstGeom>
+          <a:noFill/>
+        </p:spPr>
+        <p:txBody>
+          <a:bodyPr wrap="none" rtlCol="0">
+            <a:spAutoFit/>
+          </a:bodyPr>
+          <a:lstStyle/>
+          <a:p>
+            <a:r>
+              <a:rPr lang="en-CN" sz="1600" b="1">
+                <a:solidFill>
+                  <a:schemeClr val="bg2"/>
+                </a:solidFill>
+                <a:latin typeface="+mn-ea"/>
+                <a:ea typeface="+mn-ea"/>
+              </a:rPr>
+              <a:t>功率</a:t>
+            </a:r>
+          </a:p>
+        </p:txBody>
+      </p:sp>
+      <p:sp>
+        <p:nvSpPr>
+          <p:cNvPr id="33" name="TextBox 32">
+            <a:extLst>
+              <a:ext uri="{FF2B5EF4-FFF2-40B4-BE49-F238E27FC236}">
+                <a16:creationId xmlns:a16="http://schemas.microsoft.com/office/drawing/2014/main" id="{A2C7C78F-2BE2-6FDC-104B-0F90405907A5}"/>
+              </a:ext>
+            </a:extLst>
+          </p:cNvPr>
+          <p:cNvSpPr txBox="1"/>
+          <p:nvPr/>
+        </p:nvSpPr>
+        <p:spPr>
+          <a:xfrm>
+            <a:off x="6838938" y="5961857"/>
+            <a:ext cx="595036" cy="338554"/>
+          </a:xfrm>
+          <a:prstGeom prst="rect">
+            <a:avLst/>
+          </a:prstGeom>
+          <a:noFill/>
+        </p:spPr>
+        <p:txBody>
+          <a:bodyPr wrap="none" rtlCol="0">
+            <a:spAutoFit/>
+          </a:bodyPr>
+          <a:lstStyle/>
+          <a:p>
+            <a:r>
+              <a:rPr lang="en-CN" sz="1600" b="1">
+                <a:solidFill>
+                  <a:schemeClr val="bg2"/>
+                </a:solidFill>
+                <a:latin typeface="+mn-ea"/>
+                <a:ea typeface="+mn-ea"/>
+              </a:rPr>
+              <a:t>时间</a:t>
+            </a:r>
+          </a:p>
+        </p:txBody>
+      </p:sp>
+      <p:sp>
+        <p:nvSpPr>
+          <p:cNvPr id="35" name="Oval 34">
+            <a:extLst>
+              <a:ext uri="{FF2B5EF4-FFF2-40B4-BE49-F238E27FC236}">
+                <a16:creationId xmlns:a16="http://schemas.microsoft.com/office/drawing/2014/main" id="{EB6B8ADD-74C9-741C-C681-BE0FA317AE14}"/>
+              </a:ext>
+            </a:extLst>
+          </p:cNvPr>
+          <p:cNvSpPr/>
+          <p:nvPr/>
+        </p:nvSpPr>
+        <p:spPr>
+          <a:xfrm>
+            <a:off x="3816495" y="4481029"/>
+            <a:ext cx="58657" cy="67176"/>
+          </a:xfrm>
+          <a:prstGeom prst="ellipse">
+            <a:avLst/>
+          </a:prstGeom>
+          <a:solidFill>
+            <a:schemeClr val="bg2">
+              <a:lumMod val="85000"/>
+              <a:lumOff val="15000"/>
+            </a:schemeClr>
+          </a:solidFill>
+        </p:spPr>
+        <p:txBody>
+          <a:bodyPr wrap="square" lIns="0" rtlCol="0" anchor="ctr">
+            <a:noAutofit/>
+          </a:bodyPr>
+          <a:lstStyle/>
+          <a:p>
+            <a:pPr algn="l"/>
+            <a:endParaRPr lang="en-CN" b="1">
+              <a:solidFill>
+                <a:srgbClr val="FF0000"/>
+              </a:solidFill>
+              <a:latin typeface="+mn-ea"/>
+              <a:ea typeface="+mn-ea"/>
+            </a:endParaRPr>
+          </a:p>
+        </p:txBody>
+      </p:sp>
+      <p:sp>
+        <p:nvSpPr>
+          <p:cNvPr id="39" name="Freeform 38">
+            <a:extLst>
+              <a:ext uri="{FF2B5EF4-FFF2-40B4-BE49-F238E27FC236}">
+                <a16:creationId xmlns:a16="http://schemas.microsoft.com/office/drawing/2014/main" id="{1E709BDB-7270-38FD-2EC1-396846CDC346}"/>
+              </a:ext>
+            </a:extLst>
+          </p:cNvPr>
+          <p:cNvSpPr/>
+          <p:nvPr/>
+        </p:nvSpPr>
+        <p:spPr>
+          <a:xfrm>
+            <a:off x="2607622" y="3568270"/>
+            <a:ext cx="4048862" cy="2066846"/>
+          </a:xfrm>
+          <a:custGeom>
+            <a:avLst/>
+            <a:gdLst>
+              <a:gd name="connsiteX0" fmla="*/ 0 w 4071487"/>
+              <a:gd name="connsiteY0" fmla="*/ 1380185 h 1380185"/>
+              <a:gd name="connsiteX1" fmla="*/ 972152 w 4071487"/>
+              <a:gd name="connsiteY1" fmla="*/ 860421 h 1380185"/>
+              <a:gd name="connsiteX2" fmla="*/ 1973179 w 4071487"/>
+              <a:gd name="connsiteY2" fmla="*/ 42273 h 1380185"/>
+              <a:gd name="connsiteX3" fmla="*/ 2993457 w 4071487"/>
+              <a:gd name="connsiteY3" fmla="*/ 109650 h 1380185"/>
+              <a:gd name="connsiteX4" fmla="*/ 4071487 w 4071487"/>
+              <a:gd name="connsiteY4" fmla="*/ 196278 h 1380185"/>
+            </a:gdLst>
+            <a:ahLst/>
+            <a:cxnLst>
+              <a:cxn ang="0">
+                <a:pos x="connsiteX0" y="connsiteY0"/>
+              </a:cxn>
+              <a:cxn ang="0">
+                <a:pos x="connsiteX1" y="connsiteY1"/>
+              </a:cxn>
+              <a:cxn ang="0">
+                <a:pos x="connsiteX2" y="connsiteY2"/>
+              </a:cxn>
+              <a:cxn ang="0">
+                <a:pos x="connsiteX3" y="connsiteY3"/>
+              </a:cxn>
+              <a:cxn ang="0">
+                <a:pos x="connsiteX4" y="connsiteY4"/>
+              </a:cxn>
+            </a:cxnLst>
+            <a:rect l="l" t="t" r="r" b="b"/>
+            <a:pathLst>
+              <a:path w="4071487" h="1380185">
+                <a:moveTo>
+                  <a:pt x="0" y="1380185"/>
+                </a:moveTo>
+                <a:cubicBezTo>
+                  <a:pt x="321644" y="1231795"/>
+                  <a:pt x="643289" y="1083406"/>
+                  <a:pt x="972152" y="860421"/>
+                </a:cubicBezTo>
+                <a:cubicBezTo>
+                  <a:pt x="1301015" y="637436"/>
+                  <a:pt x="1636295" y="167401"/>
+                  <a:pt x="1973179" y="42273"/>
+                </a:cubicBezTo>
+                <a:cubicBezTo>
+                  <a:pt x="2310063" y="-82856"/>
+                  <a:pt x="2993457" y="109650"/>
+                  <a:pt x="2993457" y="109650"/>
+                </a:cubicBezTo>
+                <a:lnTo>
+                  <a:pt x="4071487" y="196278"/>
+                </a:lnTo>
+              </a:path>
+            </a:pathLst>
+          </a:custGeom>
+          <a:ln w="28575"/>
+        </p:spPr>
+        <p:style>
+          <a:lnRef idx="1">
+            <a:schemeClr val="accent2"/>
+          </a:lnRef>
+          <a:fillRef idx="0">
+            <a:schemeClr val="accent2"/>
+          </a:fillRef>
+          <a:effectRef idx="0">
+            <a:schemeClr val="accent2"/>
+          </a:effectRef>
+          <a:fontRef idx="minor">
+            <a:schemeClr val="tx1"/>
+          </a:fontRef>
+        </p:style>
+        <p:txBody>
+          <a:bodyPr vert="horz" wrap="square" lIns="0" tIns="0" rIns="0" bIns="0" numCol="1" rtlCol="0" anchor="t" anchorCtr="0" compatLnSpc="1">
+            <a:prstTxWarp prst="textNoShape">
+              <a:avLst/>
+            </a:prstTxWarp>
+            <a:spAutoFit/>
+          </a:bodyPr>
+          <a:lstStyle/>
+          <a:p>
+            <a:pPr marL="0" marR="0" indent="0" algn="ctr" defTabSz="914400" rtl="0" eaLnBrk="1" fontAlgn="base" latinLnBrk="0" hangingPunct="1">
+              <a:lnSpc>
+                <a:spcPct val="100000"/>
+              </a:lnSpc>
+              <a:spcBef>
+                <a:spcPct val="50000"/>
+              </a:spcBef>
+              <a:spcAft>
+                <a:spcPct val="0"/>
+              </a:spcAft>
+              <a:buClrTx/>
+              <a:buSzTx/>
+              <a:buFontTx/>
+              <a:buNone/>
+              <a:tabLst/>
+            </a:pPr>
+            <a:endParaRPr kumimoji="0" lang="en-CN" sz="2400" b="1" i="0" u="none" strike="noStrike" cap="none" normalizeH="0" baseline="0">
+              <a:ln>
+                <a:noFill/>
+              </a:ln>
+              <a:solidFill>
+                <a:schemeClr val="tx1"/>
+              </a:solidFill>
+              <a:effectLst/>
+              <a:latin typeface="+mn-ea"/>
+            </a:endParaRPr>
+          </a:p>
+        </p:txBody>
+      </p:sp>
+      <p:sp>
+        <p:nvSpPr>
+          <p:cNvPr id="19" name="TextBox 18">
+            <a:extLst>
+              <a:ext uri="{FF2B5EF4-FFF2-40B4-BE49-F238E27FC236}">
+                <a16:creationId xmlns:a16="http://schemas.microsoft.com/office/drawing/2014/main" id="{310C8937-615B-C43D-913E-2F999DF2B2F0}"/>
+              </a:ext>
+            </a:extLst>
+          </p:cNvPr>
+          <p:cNvSpPr txBox="1"/>
+          <p:nvPr/>
+        </p:nvSpPr>
+        <p:spPr>
+          <a:xfrm>
+            <a:off x="3257098" y="6379850"/>
+            <a:ext cx="3208488" cy="338554"/>
+          </a:xfrm>
+          <a:prstGeom prst="rect">
+            <a:avLst/>
+          </a:prstGeom>
+          <a:noFill/>
+        </p:spPr>
+        <p:txBody>
+          <a:bodyPr wrap="square" rtlCol="0">
+            <a:spAutoFit/>
+          </a:bodyPr>
+          <a:lstStyle/>
+          <a:p>
+            <a:r>
+              <a:rPr lang="en-CN" sz="1600" b="1" dirty="0">
+                <a:solidFill>
+                  <a:schemeClr val="bg2"/>
+                </a:solidFill>
+                <a:latin typeface="+mn-ea"/>
+                <a:ea typeface="+mn-ea"/>
+              </a:rPr>
+              <a:t>雷达高度计回波波形</a:t>
+            </a:r>
+          </a:p>
+        </p:txBody>
+      </p:sp>
+      <mc:AlternateContent xmlns:mc="http://schemas.openxmlformats.org/markup-compatibility/2006">
+        <mc:Choice xmlns:a14="http://schemas.microsoft.com/office/drawing/2010/main" Requires="a14">
+          <p:sp>
+            <p:nvSpPr>
+              <p:cNvPr id="25" name="TextBox 24">
                 <a:extLst>
                   <a:ext uri="{FF2B5EF4-FFF2-40B4-BE49-F238E27FC236}">
-                    <a16:creationId xmlns:a16="http://schemas.microsoft.com/office/drawing/2014/main" id="{26C5FF93-F7F6-4134-2836-7037DEFB5B4D}"/>
-                  </a:ext>
-                </a:extLst>
-              </p:cNvPr>
-              <p:cNvCxnSpPr>
-                <a:cxnSpLocks/>
-              </p:cNvCxnSpPr>
-              <p:nvPr/>
-            </p:nvCxnSpPr>
-            <p:spPr bwMode="auto">
-              <a:xfrm>
-                <a:off x="842636" y="6424506"/>
-                <a:ext cx="5230905" cy="0"/>
-              </a:xfrm>
-              <a:prstGeom prst="straightConnector1">
-                <a:avLst/>
-              </a:prstGeom>
-              <a:ln>
-                <a:headEnd type="none" w="med" len="med"/>
-                <a:tailEnd type="triangle"/>
-              </a:ln>
-            </p:spPr>
-            <p:style>
-              <a:lnRef idx="1">
-                <a:schemeClr val="dk1"/>
-              </a:lnRef>
-              <a:fillRef idx="0">
-                <a:schemeClr val="dk1"/>
-              </a:fillRef>
-              <a:effectRef idx="0">
-                <a:schemeClr val="dk1"/>
-              </a:effectRef>
-              <a:fontRef idx="minor">
-                <a:schemeClr val="tx1"/>
-              </a:fontRef>
-            </p:style>
-          </p:cxnSp>
-          <p:cxnSp>
-            <p:nvCxnSpPr>
-              <p:cNvPr id="31" name="Straight Arrow Connector 30">
-                <a:extLst>
-                  <a:ext uri="{FF2B5EF4-FFF2-40B4-BE49-F238E27FC236}">
-                    <a16:creationId xmlns:a16="http://schemas.microsoft.com/office/drawing/2014/main" id="{60E905C7-DE14-39E8-2099-3EF3AA54E833}"/>
-                  </a:ext>
-                </a:extLst>
-              </p:cNvPr>
-              <p:cNvCxnSpPr>
-                <a:cxnSpLocks/>
-              </p:cNvCxnSpPr>
-              <p:nvPr/>
-            </p:nvCxnSpPr>
-            <p:spPr bwMode="auto">
-              <a:xfrm flipV="1">
-                <a:off x="842636" y="4512270"/>
-                <a:ext cx="0" cy="1912236"/>
-              </a:xfrm>
-              <a:prstGeom prst="straightConnector1">
-                <a:avLst/>
-              </a:prstGeom>
-              <a:ln>
-                <a:headEnd type="none" w="med" len="med"/>
-                <a:tailEnd type="triangle"/>
-              </a:ln>
-            </p:spPr>
-            <p:style>
-              <a:lnRef idx="1">
-                <a:schemeClr val="dk1"/>
-              </a:lnRef>
-              <a:fillRef idx="0">
-                <a:schemeClr val="dk1"/>
-              </a:fillRef>
-              <a:effectRef idx="0">
-                <a:schemeClr val="dk1"/>
-              </a:effectRef>
-              <a:fontRef idx="minor">
-                <a:schemeClr val="tx1"/>
-              </a:fontRef>
-            </p:style>
-          </p:cxnSp>
-          <p:sp>
-            <p:nvSpPr>
-              <p:cNvPr id="32" name="TextBox 31">
-                <a:extLst>
-                  <a:ext uri="{FF2B5EF4-FFF2-40B4-BE49-F238E27FC236}">
-                    <a16:creationId xmlns:a16="http://schemas.microsoft.com/office/drawing/2014/main" id="{B1369311-1423-5BFB-9698-B2DE9D05E222}"/>
+                    <a16:creationId xmlns:a16="http://schemas.microsoft.com/office/drawing/2014/main" id="{F2E941EC-EF6F-D00A-907A-70378D3F0417}"/>
                   </a:ext>
                 </a:extLst>
               </p:cNvPr>
@@ -29643,8 +29885,8 @@
             </p:nvSpPr>
             <p:spPr>
               <a:xfrm>
-                <a:off x="255835" y="4560969"/>
-                <a:ext cx="609781" cy="236106"/>
+                <a:off x="2553353" y="5991318"/>
+                <a:ext cx="352404" cy="261610"/>
               </a:xfrm>
               <a:prstGeom prst="rect">
                 <a:avLst/>
@@ -29657,25 +29899,117 @@
               </a:bodyPr>
               <a:lstStyle/>
               <a:p>
+                <a:pPr/>
+                <a14:m>
+                  <m:oMathPara xmlns:m="http://schemas.openxmlformats.org/officeDocument/2006/math">
+                    <m:oMathParaPr>
+                      <m:jc m:val="centerGroup"/>
+                    </m:oMathParaPr>
+                    <m:oMath xmlns:m="http://schemas.openxmlformats.org/officeDocument/2006/math">
+                      <m:sSub>
+                        <m:sSubPr>
+                          <m:ctrlPr>
+                            <a:rPr lang="en-CN" sz="1100" b="1" i="1" smtClean="0">
+                              <a:solidFill>
+                                <a:schemeClr val="bg2"/>
+                              </a:solidFill>
+                              <a:latin typeface="Cambria Math" panose="02040503050406030204" pitchFamily="18" charset="0"/>
+                              <a:ea typeface="+mn-ea"/>
+                            </a:rPr>
+                          </m:ctrlPr>
+                        </m:sSubPr>
+                        <m:e>
+                          <m:r>
+                            <a:rPr lang="en-US" sz="1100" b="1" i="1" smtClean="0">
+                              <a:solidFill>
+                                <a:schemeClr val="bg2"/>
+                              </a:solidFill>
+                              <a:latin typeface="Cambria Math" panose="02040503050406030204" pitchFamily="18" charset="0"/>
+                              <a:ea typeface="+mn-ea"/>
+                            </a:rPr>
+                            <m:t>𝒕</m:t>
+                          </m:r>
+                        </m:e>
+                        <m:sub>
+                          <m:r>
+                            <a:rPr lang="en-US" sz="1100" b="1" i="1" smtClean="0">
+                              <a:solidFill>
+                                <a:schemeClr val="bg2"/>
+                              </a:solidFill>
+                              <a:latin typeface="Cambria Math" panose="02040503050406030204" pitchFamily="18" charset="0"/>
+                              <a:ea typeface="+mn-ea"/>
+                            </a:rPr>
+                            <m:t>𝟎</m:t>
+                          </m:r>
+                        </m:sub>
+                      </m:sSub>
+                    </m:oMath>
+                  </m:oMathPara>
+                </a14:m>
+                <a:endParaRPr lang="en-CN" sz="1100" b="1">
+                  <a:solidFill>
+                    <a:schemeClr val="bg2"/>
+                  </a:solidFill>
+                  <a:latin typeface="+mn-ea"/>
+                  <a:ea typeface="+mn-ea"/>
+                </a:endParaRPr>
+              </a:p>
+            </p:txBody>
+          </p:sp>
+        </mc:Choice>
+        <mc:Fallback>
+          <p:sp>
+            <p:nvSpPr>
+              <p:cNvPr id="25" name="TextBox 24">
+                <a:extLst>
+                  <a:ext uri="{FF2B5EF4-FFF2-40B4-BE49-F238E27FC236}">
+                    <a16:creationId xmlns:a16="http://schemas.microsoft.com/office/drawing/2014/main" id="{F2E941EC-EF6F-D00A-907A-70378D3F0417}"/>
+                  </a:ext>
+                </a:extLst>
+              </p:cNvPr>
+              <p:cNvSpPr txBox="1">
+                <a:spLocks noRot="1" noChangeAspect="1" noMove="1" noResize="1" noEditPoints="1" noAdjustHandles="1" noChangeArrowheads="1" noChangeShapeType="1" noTextEdit="1"/>
+              </p:cNvSpPr>
+              <p:nvPr/>
+            </p:nvSpPr>
+            <p:spPr>
+              <a:xfrm>
+                <a:off x="2553353" y="5991318"/>
+                <a:ext cx="352404" cy="261610"/>
+              </a:xfrm>
+              <a:prstGeom prst="rect">
+                <a:avLst/>
+              </a:prstGeom>
+              <a:blipFill>
+                <a:blip r:embed="rId3"/>
+                <a:stretch>
+                  <a:fillRect/>
+                </a:stretch>
+              </a:blipFill>
+            </p:spPr>
+            <p:txBody>
+              <a:bodyPr/>
+              <a:lstStyle/>
+              <a:p>
                 <a:r>
-                  <a:rPr lang="en-CN" sz="1600" b="1">
-                    <a:solidFill>
-                      <a:schemeClr val="bg2"/>
-                    </a:solidFill>
-                    <a:latin typeface="+mn-ea"/>
-                    <a:ea typeface="+mn-ea"/>
+                  <a:rPr lang="en-CN">
+                    <a:noFill/>
                   </a:rPr>
-                  <a:t>功率</a:t>
+                  <a:t> </a:t>
                 </a:r>
               </a:p>
             </p:txBody>
           </p:sp>
+        </mc:Fallback>
+      </mc:AlternateContent>
+      <mc:AlternateContent xmlns:mc="http://schemas.openxmlformats.org/markup-compatibility/2006">
+        <mc:Choice xmlns:a14="http://schemas.microsoft.com/office/drawing/2010/main" Requires="a14">
           <p:sp>
             <p:nvSpPr>
-              <p:cNvPr id="33" name="TextBox 32">
+              <p:cNvPr id="26" name="TextBox 25">
                 <a:extLst>
                   <a:ext uri="{FF2B5EF4-FFF2-40B4-BE49-F238E27FC236}">
-                    <a16:creationId xmlns:a16="http://schemas.microsoft.com/office/drawing/2014/main" id="{A2C7C78F-2BE2-6FDC-104B-0F90405907A5}"/>
+                    <a16:creationId xmlns:a16="http://schemas.microsoft.com/office/drawing/2014/main" id="{695B36E4-62B8-DC0B-D971-831D8C9D8445}"/>
                   </a:ext>
                 </a:extLst>
               </p:cNvPr>
@@ -29684,8 +30018,8 @@
             </p:nvSpPr>
             <p:spPr>
               <a:xfrm>
-                <a:off x="5625249" y="6420387"/>
-                <a:ext cx="609781" cy="236106"/>
+                <a:off x="3451247" y="5989382"/>
+                <a:ext cx="463011" cy="276742"/>
               </a:xfrm>
               <a:prstGeom prst="rect">
                 <a:avLst/>
@@ -29698,56 +30032,76 @@
               </a:bodyPr>
               <a:lstStyle/>
               <a:p>
-                <a:r>
-                  <a:rPr lang="en-CN" sz="1600" b="1">
-                    <a:solidFill>
-                      <a:schemeClr val="bg2"/>
-                    </a:solidFill>
-                    <a:latin typeface="+mn-ea"/>
-                    <a:ea typeface="+mn-ea"/>
-                  </a:rPr>
-                  <a:t>时间</a:t>
-                </a:r>
-              </a:p>
-            </p:txBody>
-          </p:sp>
-          <p:sp>
-            <p:nvSpPr>
-              <p:cNvPr id="34" name="Oval 33">
-                <a:extLst>
-                  <a:ext uri="{FF2B5EF4-FFF2-40B4-BE49-F238E27FC236}">
-                    <a16:creationId xmlns:a16="http://schemas.microsoft.com/office/drawing/2014/main" id="{A71E8040-4E06-6A8F-4EB5-ED7CEE1A853C}"/>
-                  </a:ext>
-                </a:extLst>
-              </p:cNvPr>
-              <p:cNvSpPr/>
-              <p:nvPr/>
-            </p:nvSpPr>
-            <p:spPr>
-              <a:xfrm>
-                <a:off x="1336414" y="6112379"/>
-                <a:ext cx="65712" cy="67300"/>
-              </a:xfrm>
-              <a:prstGeom prst="ellipse">
-                <a:avLst/>
-              </a:prstGeom>
-              <a:solidFill>
-                <a:schemeClr val="bg2">
-                  <a:lumMod val="85000"/>
-                  <a:lumOff val="15000"/>
-                </a:schemeClr>
-              </a:solidFill>
-            </p:spPr>
-            <p:txBody>
-              <a:bodyPr wrap="square" lIns="0" rtlCol="0" anchor="ctr">
-                <a:noAutofit/>
-              </a:bodyPr>
-              <a:lstStyle/>
-              <a:p>
-                <a:pPr algn="l"/>
-                <a:endParaRPr lang="en-CN" b="1">
+                <a:pPr/>
+                <a14:m>
+                  <m:oMathPara xmlns:m="http://schemas.openxmlformats.org/officeDocument/2006/math">
+                    <m:oMathParaPr>
+                      <m:jc m:val="centerGroup"/>
+                    </m:oMathParaPr>
+                    <m:oMath xmlns:m="http://schemas.openxmlformats.org/officeDocument/2006/math">
+                      <m:sSub>
+                        <m:sSubPr>
+                          <m:ctrlPr>
+                            <a:rPr lang="en-CN" sz="1100" b="1" i="1" smtClean="0">
+                              <a:solidFill>
+                                <a:schemeClr val="bg2"/>
+                              </a:solidFill>
+                              <a:latin typeface="Cambria Math" panose="02040503050406030204" pitchFamily="18" charset="0"/>
+                              <a:ea typeface="+mn-ea"/>
+                            </a:rPr>
+                          </m:ctrlPr>
+                        </m:sSubPr>
+                        <m:e>
+                          <m:r>
+                            <a:rPr lang="en-US" sz="1100" b="1" i="1" smtClean="0">
+                              <a:solidFill>
+                                <a:schemeClr val="bg2"/>
+                              </a:solidFill>
+                              <a:latin typeface="Cambria Math" panose="02040503050406030204" pitchFamily="18" charset="0"/>
+                              <a:ea typeface="+mn-ea"/>
+                            </a:rPr>
+                            <m:t>𝒕</m:t>
+                          </m:r>
+                        </m:e>
+                        <m:sub>
+                          <m:r>
+                            <a:rPr lang="en-US" sz="1100" b="1" i="1" smtClean="0">
+                              <a:solidFill>
+                                <a:schemeClr val="bg2"/>
+                              </a:solidFill>
+                              <a:latin typeface="Cambria Math" panose="02040503050406030204" pitchFamily="18" charset="0"/>
+                              <a:ea typeface="+mn-ea"/>
+                            </a:rPr>
+                            <m:t>𝟏</m:t>
+                          </m:r>
+                          <m:r>
+                            <a:rPr lang="en-US" sz="1100" b="1" i="1" smtClean="0">
+                              <a:solidFill>
+                                <a:schemeClr val="bg2"/>
+                              </a:solidFill>
+                              <a:latin typeface="Cambria Math" panose="02040503050406030204" pitchFamily="18" charset="0"/>
+                              <a:ea typeface="+mn-ea"/>
+                            </a:rPr>
+                            <m:t>/</m:t>
+                          </m:r>
+                          <m:r>
+                            <a:rPr lang="en-US" sz="1100" b="1" i="1" smtClean="0">
+                              <a:solidFill>
+                                <a:schemeClr val="bg2"/>
+                              </a:solidFill>
+                              <a:latin typeface="Cambria Math" panose="02040503050406030204" pitchFamily="18" charset="0"/>
+                              <a:ea typeface="+mn-ea"/>
+                            </a:rPr>
+                            <m:t>𝟐</m:t>
+                          </m:r>
+                        </m:sub>
+                      </m:sSub>
+                    </m:oMath>
+                  </m:oMathPara>
+                </a14:m>
+                <a:endParaRPr lang="en-CN" sz="1100" b="1">
                   <a:solidFill>
-                    <a:srgbClr val="FF0000"/>
+                    <a:schemeClr val="bg2"/>
                   </a:solidFill>
                   <a:latin typeface="+mn-ea"/>
                   <a:ea typeface="+mn-ea"/>
@@ -29755,43 +30109,132 @@
               </a:p>
             </p:txBody>
           </p:sp>
+        </mc:Choice>
+        <mc:Fallback>
           <p:sp>
             <p:nvSpPr>
-              <p:cNvPr id="35" name="Oval 34">
+              <p:cNvPr id="26" name="TextBox 25">
                 <a:extLst>
                   <a:ext uri="{FF2B5EF4-FFF2-40B4-BE49-F238E27FC236}">
-                    <a16:creationId xmlns:a16="http://schemas.microsoft.com/office/drawing/2014/main" id="{EB6B8ADD-74C9-741C-C681-BE0FA317AE14}"/>
+                    <a16:creationId xmlns:a16="http://schemas.microsoft.com/office/drawing/2014/main" id="{695B36E4-62B8-DC0B-D971-831D8C9D8445}"/>
                   </a:ext>
                 </a:extLst>
               </p:cNvPr>
-              <p:cNvSpPr/>
+              <p:cNvSpPr txBox="1">
+                <a:spLocks noRot="1" noChangeAspect="1" noMove="1" noResize="1" noEditPoints="1" noAdjustHandles="1" noChangeArrowheads="1" noChangeShapeType="1" noTextEdit="1"/>
+              </p:cNvSpPr>
               <p:nvPr/>
             </p:nvSpPr>
             <p:spPr>
               <a:xfrm>
-                <a:off x="2313355" y="5578936"/>
-                <a:ext cx="65712" cy="67300"/>
+                <a:off x="3451247" y="5989382"/>
+                <a:ext cx="463011" cy="276742"/>
               </a:xfrm>
-              <a:prstGeom prst="ellipse">
+              <a:prstGeom prst="rect">
                 <a:avLst/>
               </a:prstGeom>
-              <a:solidFill>
-                <a:schemeClr val="bg2">
-                  <a:lumMod val="85000"/>
-                  <a:lumOff val="15000"/>
-                </a:schemeClr>
-              </a:solidFill>
+              <a:blipFill>
+                <a:blip r:embed="rId4"/>
+                <a:stretch>
+                  <a:fillRect/>
+                </a:stretch>
+              </a:blipFill>
             </p:spPr>
             <p:txBody>
-              <a:bodyPr wrap="square" lIns="0" rtlCol="0" anchor="ctr">
-                <a:noAutofit/>
+              <a:bodyPr/>
+              <a:lstStyle/>
+              <a:p>
+                <a:r>
+                  <a:rPr lang="en-CN">
+                    <a:noFill/>
+                  </a:rPr>
+                  <a:t> </a:t>
+                </a:r>
+              </a:p>
+            </p:txBody>
+          </p:sp>
+        </mc:Fallback>
+      </mc:AlternateContent>
+      <mc:AlternateContent xmlns:mc="http://schemas.openxmlformats.org/markup-compatibility/2006">
+        <mc:Choice xmlns:a14="http://schemas.microsoft.com/office/drawing/2010/main" Requires="a14">
+          <p:sp>
+            <p:nvSpPr>
+              <p:cNvPr id="27" name="TextBox 26">
+                <a:extLst>
+                  <a:ext uri="{FF2B5EF4-FFF2-40B4-BE49-F238E27FC236}">
+                    <a16:creationId xmlns:a16="http://schemas.microsoft.com/office/drawing/2014/main" id="{C94EB4A6-BAF8-125F-E269-B8A62A807E90}"/>
+                  </a:ext>
+                </a:extLst>
+              </p:cNvPr>
+              <p:cNvSpPr txBox="1"/>
+              <p:nvPr/>
+            </p:nvSpPr>
+            <p:spPr>
+              <a:xfrm>
+                <a:off x="4489954" y="5990159"/>
+                <a:ext cx="352404" cy="261610"/>
+              </a:xfrm>
+              <a:prstGeom prst="rect">
+                <a:avLst/>
+              </a:prstGeom>
+              <a:noFill/>
+            </p:spPr>
+            <p:txBody>
+              <a:bodyPr wrap="none" rtlCol="0">
+                <a:spAutoFit/>
               </a:bodyPr>
               <a:lstStyle/>
               <a:p>
-                <a:pPr algn="l"/>
-                <a:endParaRPr lang="en-CN" b="1">
+                <a:pPr/>
+                <a14:m>
+                  <m:oMathPara xmlns:m="http://schemas.openxmlformats.org/officeDocument/2006/math">
+                    <m:oMathParaPr>
+                      <m:jc m:val="centerGroup"/>
+                    </m:oMathParaPr>
+                    <m:oMath xmlns:m="http://schemas.openxmlformats.org/officeDocument/2006/math">
+                      <m:sSub>
+                        <m:sSubPr>
+                          <m:ctrlPr>
+                            <a:rPr lang="en-CN" sz="1100" b="1" i="1" smtClean="0">
+                              <a:solidFill>
+                                <a:schemeClr val="bg2"/>
+                              </a:solidFill>
+                              <a:latin typeface="Cambria Math" panose="02040503050406030204" pitchFamily="18" charset="0"/>
+                              <a:ea typeface="+mn-ea"/>
+                            </a:rPr>
+                          </m:ctrlPr>
+                        </m:sSubPr>
+                        <m:e>
+                          <m:r>
+                            <a:rPr lang="en-US" sz="1100" b="1" i="1" smtClean="0">
+                              <a:solidFill>
+                                <a:schemeClr val="bg2"/>
+                              </a:solidFill>
+                              <a:latin typeface="Cambria Math" panose="02040503050406030204" pitchFamily="18" charset="0"/>
+                              <a:ea typeface="+mn-ea"/>
+                            </a:rPr>
+                            <m:t>𝒕</m:t>
+                          </m:r>
+                        </m:e>
+                        <m:sub>
+                          <m:r>
+                            <a:rPr lang="en-US" sz="1100" b="1" i="1" smtClean="0">
+                              <a:solidFill>
+                                <a:schemeClr val="bg2"/>
+                              </a:solidFill>
+                              <a:latin typeface="Cambria Math" panose="02040503050406030204" pitchFamily="18" charset="0"/>
+                              <a:ea typeface="+mn-ea"/>
+                            </a:rPr>
+                            <m:t>𝟏</m:t>
+                          </m:r>
+                        </m:sub>
+                      </m:sSub>
+                    </m:oMath>
+                  </m:oMathPara>
+                </a14:m>
+                <a:endParaRPr lang="en-CN" sz="1100" b="1">
                   <a:solidFill>
-                    <a:srgbClr val="FF0000"/>
+                    <a:schemeClr val="bg2"/>
                   </a:solidFill>
                   <a:latin typeface="+mn-ea"/>
                   <a:ea typeface="+mn-ea"/>
@@ -29799,43 +30242,152 @@
               </a:p>
             </p:txBody>
           </p:sp>
+        </mc:Choice>
+        <mc:Fallback>
           <p:sp>
             <p:nvSpPr>
-              <p:cNvPr id="36" name="Oval 35">
+              <p:cNvPr id="27" name="TextBox 26">
                 <a:extLst>
                   <a:ext uri="{FF2B5EF4-FFF2-40B4-BE49-F238E27FC236}">
-                    <a16:creationId xmlns:a16="http://schemas.microsoft.com/office/drawing/2014/main" id="{8D1F1277-93D6-1A72-7C32-CE832051FA5D}"/>
+                    <a16:creationId xmlns:a16="http://schemas.microsoft.com/office/drawing/2014/main" id="{C94EB4A6-BAF8-125F-E269-B8A62A807E90}"/>
                   </a:ext>
                 </a:extLst>
               </p:cNvPr>
-              <p:cNvSpPr/>
+              <p:cNvSpPr txBox="1">
+                <a:spLocks noRot="1" noChangeAspect="1" noMove="1" noResize="1" noEditPoints="1" noAdjustHandles="1" noChangeArrowheads="1" noChangeShapeType="1" noTextEdit="1"/>
+              </p:cNvSpPr>
               <p:nvPr/>
             </p:nvSpPr>
             <p:spPr>
               <a:xfrm>
-                <a:off x="3320181" y="4757301"/>
-                <a:ext cx="65712" cy="67300"/>
+                <a:off x="4489954" y="5990159"/>
+                <a:ext cx="352404" cy="261610"/>
               </a:xfrm>
-              <a:prstGeom prst="ellipse">
+              <a:prstGeom prst="rect">
                 <a:avLst/>
               </a:prstGeom>
-              <a:solidFill>
-                <a:schemeClr val="bg2">
-                  <a:lumMod val="85000"/>
-                  <a:lumOff val="15000"/>
-                </a:schemeClr>
-              </a:solidFill>
+              <a:blipFill>
+                <a:blip r:embed="rId5"/>
+                <a:stretch>
+                  <a:fillRect/>
+                </a:stretch>
+              </a:blipFill>
             </p:spPr>
             <p:txBody>
-              <a:bodyPr wrap="square" lIns="0" rtlCol="0" anchor="ctr">
-                <a:noAutofit/>
+              <a:bodyPr/>
+              <a:lstStyle/>
+              <a:p>
+                <a:r>
+                  <a:rPr lang="en-CN">
+                    <a:noFill/>
+                  </a:rPr>
+                  <a:t> </a:t>
+                </a:r>
+              </a:p>
+            </p:txBody>
+          </p:sp>
+        </mc:Fallback>
+      </mc:AlternateContent>
+      <mc:AlternateContent xmlns:mc="http://schemas.openxmlformats.org/markup-compatibility/2006">
+        <mc:Choice xmlns:a14="http://schemas.microsoft.com/office/drawing/2010/main" Requires="a14">
+          <p:sp>
+            <p:nvSpPr>
+              <p:cNvPr id="28" name="TextBox 27">
+                <a:extLst>
+                  <a:ext uri="{FF2B5EF4-FFF2-40B4-BE49-F238E27FC236}">
+                    <a16:creationId xmlns:a16="http://schemas.microsoft.com/office/drawing/2014/main" id="{98CEC57C-B896-6DF9-991C-F6A6A0FB877B}"/>
+                  </a:ext>
+                </a:extLst>
+              </p:cNvPr>
+              <p:cNvSpPr txBox="1"/>
+              <p:nvPr/>
+            </p:nvSpPr>
+            <p:spPr>
+              <a:xfrm>
+                <a:off x="5436206" y="5979258"/>
+                <a:ext cx="463012" cy="276742"/>
+              </a:xfrm>
+              <a:prstGeom prst="rect">
+                <a:avLst/>
+              </a:prstGeom>
+              <a:noFill/>
+            </p:spPr>
+            <p:txBody>
+              <a:bodyPr wrap="none" rtlCol="0">
+                <a:spAutoFit/>
               </a:bodyPr>
               <a:lstStyle/>
               <a:p>
-                <a:pPr algn="l"/>
-                <a:endParaRPr lang="en-CN" b="1">
+                <a:pPr/>
+                <a14:m>
+                  <m:oMathPara xmlns:m="http://schemas.openxmlformats.org/officeDocument/2006/math">
+                    <m:oMathParaPr>
+                      <m:jc m:val="centerGroup"/>
+                    </m:oMathParaPr>
+                    <m:oMath xmlns:m="http://schemas.openxmlformats.org/officeDocument/2006/math">
+                      <m:sSub>
+                        <m:sSubPr>
+                          <m:ctrlPr>
+                            <a:rPr lang="en-CN" sz="1100" b="1" i="1" smtClean="0">
+                              <a:solidFill>
+                                <a:schemeClr val="bg2"/>
+                              </a:solidFill>
+                              <a:latin typeface="Cambria Math" panose="02040503050406030204" pitchFamily="18" charset="0"/>
+                              <a:ea typeface="+mn-ea"/>
+                            </a:rPr>
+                          </m:ctrlPr>
+                        </m:sSubPr>
+                        <m:e>
+                          <m:r>
+                            <a:rPr lang="en-US" sz="1100" b="1" i="1" smtClean="0">
+                              <a:solidFill>
+                                <a:schemeClr val="bg2"/>
+                              </a:solidFill>
+                              <a:latin typeface="Cambria Math" panose="02040503050406030204" pitchFamily="18" charset="0"/>
+                              <a:ea typeface="+mn-ea"/>
+                            </a:rPr>
+                            <m:t>𝒕</m:t>
+                          </m:r>
+                        </m:e>
+                        <m:sub>
+                          <m:r>
+                            <a:rPr lang="en-US" sz="1100" b="1" i="1" smtClean="0">
+                              <a:solidFill>
+                                <a:schemeClr val="bg2"/>
+                              </a:solidFill>
+                              <a:latin typeface="Cambria Math" panose="02040503050406030204" pitchFamily="18" charset="0"/>
+                              <a:ea typeface="+mn-ea"/>
+                            </a:rPr>
+                            <m:t>𝟑</m:t>
+                          </m:r>
+                          <m:r>
+                            <a:rPr lang="en-US" sz="1100" b="1" i="1" smtClean="0">
+                              <a:solidFill>
+                                <a:schemeClr val="bg2"/>
+                              </a:solidFill>
+                              <a:latin typeface="Cambria Math" panose="02040503050406030204" pitchFamily="18" charset="0"/>
+                              <a:ea typeface="+mn-ea"/>
+                            </a:rPr>
+                            <m:t>/</m:t>
+                          </m:r>
+                          <m:r>
+                            <a:rPr lang="en-US" sz="1100" b="1" i="1" smtClean="0">
+                              <a:solidFill>
+                                <a:schemeClr val="bg2"/>
+                              </a:solidFill>
+                              <a:latin typeface="Cambria Math" panose="02040503050406030204" pitchFamily="18" charset="0"/>
+                              <a:ea typeface="+mn-ea"/>
+                            </a:rPr>
+                            <m:t>𝟐</m:t>
+                          </m:r>
+                        </m:sub>
+                      </m:sSub>
+                    </m:oMath>
+                  </m:oMathPara>
+                </a14:m>
+                <a:endParaRPr lang="en-CN" sz="1100" b="1">
                   <a:solidFill>
-                    <a:srgbClr val="FF0000"/>
+                    <a:schemeClr val="bg2"/>
                   </a:solidFill>
                   <a:latin typeface="+mn-ea"/>
                   <a:ea typeface="+mn-ea"/>
@@ -29843,43 +30395,132 @@
               </a:p>
             </p:txBody>
           </p:sp>
+        </mc:Choice>
+        <mc:Fallback>
           <p:sp>
             <p:nvSpPr>
-              <p:cNvPr id="37" name="Oval 36">
+              <p:cNvPr id="28" name="TextBox 27">
                 <a:extLst>
                   <a:ext uri="{FF2B5EF4-FFF2-40B4-BE49-F238E27FC236}">
-                    <a16:creationId xmlns:a16="http://schemas.microsoft.com/office/drawing/2014/main" id="{86ABD933-C73E-3DD7-7211-A3E18BECCDA9}"/>
+                    <a16:creationId xmlns:a16="http://schemas.microsoft.com/office/drawing/2014/main" id="{98CEC57C-B896-6DF9-991C-F6A6A0FB877B}"/>
                   </a:ext>
                 </a:extLst>
               </p:cNvPr>
-              <p:cNvSpPr/>
+              <p:cNvSpPr txBox="1">
+                <a:spLocks noRot="1" noChangeAspect="1" noMove="1" noResize="1" noEditPoints="1" noAdjustHandles="1" noChangeArrowheads="1" noChangeShapeType="1" noTextEdit="1"/>
+              </p:cNvSpPr>
               <p:nvPr/>
             </p:nvSpPr>
             <p:spPr>
               <a:xfrm>
-                <a:off x="4343408" y="4834177"/>
-                <a:ext cx="65712" cy="67300"/>
+                <a:off x="5436206" y="5979258"/>
+                <a:ext cx="463012" cy="276742"/>
               </a:xfrm>
-              <a:prstGeom prst="ellipse">
+              <a:prstGeom prst="rect">
                 <a:avLst/>
               </a:prstGeom>
-              <a:solidFill>
-                <a:schemeClr val="bg2">
-                  <a:lumMod val="85000"/>
-                  <a:lumOff val="15000"/>
-                </a:schemeClr>
-              </a:solidFill>
+              <a:blipFill>
+                <a:blip r:embed="rId6"/>
+                <a:stretch>
+                  <a:fillRect/>
+                </a:stretch>
+              </a:blipFill>
             </p:spPr>
             <p:txBody>
-              <a:bodyPr wrap="square" lIns="0" rtlCol="0" anchor="ctr">
-                <a:noAutofit/>
+              <a:bodyPr/>
+              <a:lstStyle/>
+              <a:p>
+                <a:r>
+                  <a:rPr lang="en-CN">
+                    <a:noFill/>
+                  </a:rPr>
+                  <a:t> </a:t>
+                </a:r>
+              </a:p>
+            </p:txBody>
+          </p:sp>
+        </mc:Fallback>
+      </mc:AlternateContent>
+      <mc:AlternateContent xmlns:mc="http://schemas.openxmlformats.org/markup-compatibility/2006">
+        <mc:Choice xmlns:a14="http://schemas.microsoft.com/office/drawing/2010/main" Requires="a14">
+          <p:sp>
+            <p:nvSpPr>
+              <p:cNvPr id="29" name="TextBox 28">
+                <a:extLst>
+                  <a:ext uri="{FF2B5EF4-FFF2-40B4-BE49-F238E27FC236}">
+                    <a16:creationId xmlns:a16="http://schemas.microsoft.com/office/drawing/2014/main" id="{B2C7E1BE-CEF7-51C3-F4A6-212A000473D9}"/>
+                  </a:ext>
+                </a:extLst>
+              </p:cNvPr>
+              <p:cNvSpPr txBox="1"/>
+              <p:nvPr/>
+            </p:nvSpPr>
+            <p:spPr>
+              <a:xfrm>
+                <a:off x="6525901" y="5950964"/>
+                <a:ext cx="352404" cy="261610"/>
+              </a:xfrm>
+              <a:prstGeom prst="rect">
+                <a:avLst/>
+              </a:prstGeom>
+              <a:noFill/>
+            </p:spPr>
+            <p:txBody>
+              <a:bodyPr wrap="none" rtlCol="0">
+                <a:spAutoFit/>
               </a:bodyPr>
               <a:lstStyle/>
               <a:p>
-                <a:pPr algn="l"/>
-                <a:endParaRPr lang="en-CN" b="1">
+                <a:pPr/>
+                <a14:m>
+                  <m:oMathPara xmlns:m="http://schemas.openxmlformats.org/officeDocument/2006/math">
+                    <m:oMathParaPr>
+                      <m:jc m:val="centerGroup"/>
+                    </m:oMathParaPr>
+                    <m:oMath xmlns:m="http://schemas.openxmlformats.org/officeDocument/2006/math">
+                      <m:sSub>
+                        <m:sSubPr>
+                          <m:ctrlPr>
+                            <a:rPr lang="en-CN" sz="1100" b="1" i="1" smtClean="0">
+                              <a:solidFill>
+                                <a:schemeClr val="bg2"/>
+                              </a:solidFill>
+                              <a:latin typeface="Cambria Math" panose="02040503050406030204" pitchFamily="18" charset="0"/>
+                              <a:ea typeface="+mn-ea"/>
+                            </a:rPr>
+                          </m:ctrlPr>
+                        </m:sSubPr>
+                        <m:e>
+                          <m:r>
+                            <a:rPr lang="en-US" sz="1100" b="1" i="1" smtClean="0">
+                              <a:solidFill>
+                                <a:schemeClr val="bg2"/>
+                              </a:solidFill>
+                              <a:latin typeface="Cambria Math" panose="02040503050406030204" pitchFamily="18" charset="0"/>
+                              <a:ea typeface="+mn-ea"/>
+                            </a:rPr>
+                            <m:t>𝒕</m:t>
+                          </m:r>
+                        </m:e>
+                        <m:sub>
+                          <m:r>
+                            <a:rPr lang="en-US" sz="1100" b="1" i="1" smtClean="0">
+                              <a:solidFill>
+                                <a:schemeClr val="bg2"/>
+                              </a:solidFill>
+                              <a:latin typeface="Cambria Math" panose="02040503050406030204" pitchFamily="18" charset="0"/>
+                              <a:ea typeface="+mn-ea"/>
+                            </a:rPr>
+                            <m:t>𝟐</m:t>
+                          </m:r>
+                        </m:sub>
+                      </m:sSub>
+                    </m:oMath>
+                  </m:oMathPara>
+                </a14:m>
+                <a:endParaRPr lang="en-CN" sz="1100" b="1">
                   <a:solidFill>
-                    <a:srgbClr val="FF0000"/>
+                    <a:schemeClr val="bg2"/>
                   </a:solidFill>
                   <a:latin typeface="+mn-ea"/>
                   <a:ea typeface="+mn-ea"/>
@@ -29887,927 +30528,52 @@
               </a:p>
             </p:txBody>
           </p:sp>
+        </mc:Choice>
+        <mc:Fallback>
           <p:sp>
             <p:nvSpPr>
-              <p:cNvPr id="38" name="Oval 37">
+              <p:cNvPr id="29" name="TextBox 28">
                 <a:extLst>
                   <a:ext uri="{FF2B5EF4-FFF2-40B4-BE49-F238E27FC236}">
-                    <a16:creationId xmlns:a16="http://schemas.microsoft.com/office/drawing/2014/main" id="{DBF41332-59D2-3125-8B6D-53E0C693EA94}"/>
+                    <a16:creationId xmlns:a16="http://schemas.microsoft.com/office/drawing/2014/main" id="{B2C7E1BE-CEF7-51C3-F4A6-212A000473D9}"/>
                   </a:ext>
                 </a:extLst>
               </p:cNvPr>
-              <p:cNvSpPr/>
+              <p:cNvSpPr txBox="1">
+                <a:spLocks noRot="1" noChangeAspect="1" noMove="1" noResize="1" noEditPoints="1" noAdjustHandles="1" noChangeArrowheads="1" noChangeShapeType="1" noTextEdit="1"/>
+              </p:cNvSpPr>
               <p:nvPr/>
             </p:nvSpPr>
             <p:spPr>
               <a:xfrm>
-                <a:off x="5419311" y="4917755"/>
-                <a:ext cx="65712" cy="67300"/>
+                <a:off x="6525901" y="5950964"/>
+                <a:ext cx="352404" cy="261610"/>
               </a:xfrm>
-              <a:prstGeom prst="ellipse">
+              <a:prstGeom prst="rect">
                 <a:avLst/>
               </a:prstGeom>
-              <a:solidFill>
-                <a:schemeClr val="bg2">
-                  <a:lumMod val="85000"/>
-                  <a:lumOff val="15000"/>
-                </a:schemeClr>
-              </a:solidFill>
+              <a:blipFill>
+                <a:blip r:embed="rId7"/>
+                <a:stretch>
+                  <a:fillRect/>
+                </a:stretch>
+              </a:blipFill>
             </p:spPr>
             <p:txBody>
-              <a:bodyPr wrap="square" lIns="0" rtlCol="0" anchor="ctr">
-                <a:noAutofit/>
-              </a:bodyPr>
+              <a:bodyPr/>
               <a:lstStyle/>
               <a:p>
-                <a:pPr algn="l"/>
-                <a:endParaRPr lang="en-CN" b="1">
-                  <a:solidFill>
-                    <a:srgbClr val="FF0000"/>
-                  </a:solidFill>
-                  <a:latin typeface="+mn-ea"/>
-                  <a:ea typeface="+mn-ea"/>
-                </a:endParaRPr>
+                <a:r>
+                  <a:rPr lang="en-CN">
+                    <a:noFill/>
+                  </a:rPr>
+                  <a:t> </a:t>
+                </a:r>
               </a:p>
             </p:txBody>
           </p:sp>
-          <p:sp>
-            <p:nvSpPr>
-              <p:cNvPr id="39" name="Freeform 38">
-                <a:extLst>
-                  <a:ext uri="{FF2B5EF4-FFF2-40B4-BE49-F238E27FC236}">
-                    <a16:creationId xmlns:a16="http://schemas.microsoft.com/office/drawing/2014/main" id="{1E709BDB-7270-38FD-2EC1-396846CDC346}"/>
-                  </a:ext>
-                </a:extLst>
-              </p:cNvPr>
-              <p:cNvSpPr/>
-              <p:nvPr/>
-            </p:nvSpPr>
-            <p:spPr>
-              <a:xfrm>
-                <a:off x="1289084" y="4751108"/>
-                <a:ext cx="4149190" cy="1441411"/>
-              </a:xfrm>
-              <a:custGeom>
-                <a:avLst/>
-                <a:gdLst>
-                  <a:gd name="connsiteX0" fmla="*/ 0 w 4071487"/>
-                  <a:gd name="connsiteY0" fmla="*/ 1380185 h 1380185"/>
-                  <a:gd name="connsiteX1" fmla="*/ 972152 w 4071487"/>
-                  <a:gd name="connsiteY1" fmla="*/ 860421 h 1380185"/>
-                  <a:gd name="connsiteX2" fmla="*/ 1973179 w 4071487"/>
-                  <a:gd name="connsiteY2" fmla="*/ 42273 h 1380185"/>
-                  <a:gd name="connsiteX3" fmla="*/ 2993457 w 4071487"/>
-                  <a:gd name="connsiteY3" fmla="*/ 109650 h 1380185"/>
-                  <a:gd name="connsiteX4" fmla="*/ 4071487 w 4071487"/>
-                  <a:gd name="connsiteY4" fmla="*/ 196278 h 1380185"/>
-                </a:gdLst>
-                <a:ahLst/>
-                <a:cxnLst>
-                  <a:cxn ang="0">
-                    <a:pos x="connsiteX0" y="connsiteY0"/>
-                  </a:cxn>
-                  <a:cxn ang="0">
-                    <a:pos x="connsiteX1" y="connsiteY1"/>
-                  </a:cxn>
-                  <a:cxn ang="0">
-                    <a:pos x="connsiteX2" y="connsiteY2"/>
-                  </a:cxn>
-                  <a:cxn ang="0">
-                    <a:pos x="connsiteX3" y="connsiteY3"/>
-                  </a:cxn>
-                  <a:cxn ang="0">
-                    <a:pos x="connsiteX4" y="connsiteY4"/>
-                  </a:cxn>
-                </a:cxnLst>
-                <a:rect l="l" t="t" r="r" b="b"/>
-                <a:pathLst>
-                  <a:path w="4071487" h="1380185">
-                    <a:moveTo>
-                      <a:pt x="0" y="1380185"/>
-                    </a:moveTo>
-                    <a:cubicBezTo>
-                      <a:pt x="321644" y="1231795"/>
-                      <a:pt x="643289" y="1083406"/>
-                      <a:pt x="972152" y="860421"/>
-                    </a:cubicBezTo>
-                    <a:cubicBezTo>
-                      <a:pt x="1301015" y="637436"/>
-                      <a:pt x="1636295" y="167401"/>
-                      <a:pt x="1973179" y="42273"/>
-                    </a:cubicBezTo>
-                    <a:cubicBezTo>
-                      <a:pt x="2310063" y="-82856"/>
-                      <a:pt x="2993457" y="109650"/>
-                      <a:pt x="2993457" y="109650"/>
-                    </a:cubicBezTo>
-                    <a:lnTo>
-                      <a:pt x="4071487" y="196278"/>
-                    </a:lnTo>
-                  </a:path>
-                </a:pathLst>
-              </a:custGeom>
-            </p:spPr>
-            <p:style>
-              <a:lnRef idx="1">
-                <a:schemeClr val="accent2"/>
-              </a:lnRef>
-              <a:fillRef idx="0">
-                <a:schemeClr val="accent2"/>
-              </a:fillRef>
-              <a:effectRef idx="0">
-                <a:schemeClr val="accent2"/>
-              </a:effectRef>
-              <a:fontRef idx="minor">
-                <a:schemeClr val="tx1"/>
-              </a:fontRef>
-            </p:style>
-            <p:txBody>
-              <a:bodyPr vert="horz" wrap="square" lIns="0" tIns="0" rIns="0" bIns="0" numCol="1" rtlCol="0" anchor="t" anchorCtr="0" compatLnSpc="1">
-                <a:prstTxWarp prst="textNoShape">
-                  <a:avLst/>
-                </a:prstTxWarp>
-                <a:spAutoFit/>
-              </a:bodyPr>
-              <a:lstStyle/>
-              <a:p>
-                <a:pPr marL="0" marR="0" indent="0" algn="ctr" defTabSz="914400" rtl="0" eaLnBrk="1" fontAlgn="base" latinLnBrk="0" hangingPunct="1">
-                  <a:lnSpc>
-                    <a:spcPct val="100000"/>
-                  </a:lnSpc>
-                  <a:spcBef>
-                    <a:spcPct val="50000"/>
-                  </a:spcBef>
-                  <a:spcAft>
-                    <a:spcPct val="0"/>
-                  </a:spcAft>
-                  <a:buClrTx/>
-                  <a:buSzTx/>
-                  <a:buFontTx/>
-                  <a:buNone/>
-                  <a:tabLst/>
-                </a:pPr>
-                <a:endParaRPr kumimoji="0" lang="en-CN" sz="2400" b="1" i="0" u="none" strike="noStrike" cap="none" normalizeH="0" baseline="0">
-                  <a:ln>
-                    <a:noFill/>
-                  </a:ln>
-                  <a:solidFill>
-                    <a:schemeClr val="tx1"/>
-                  </a:solidFill>
-                  <a:effectLst/>
-                  <a:latin typeface="+mn-ea"/>
-                </a:endParaRPr>
-              </a:p>
-            </p:txBody>
-          </p:sp>
-        </p:grpSp>
-        <p:sp>
-          <p:nvSpPr>
-            <p:cNvPr id="19" name="TextBox 18">
-              <a:extLst>
-                <a:ext uri="{FF2B5EF4-FFF2-40B4-BE49-F238E27FC236}">
-                  <a16:creationId xmlns:a16="http://schemas.microsoft.com/office/drawing/2014/main" id="{310C8937-615B-C43D-913E-2F999DF2B2F0}"/>
-                </a:ext>
-              </a:extLst>
-            </p:cNvPr>
-            <p:cNvSpPr txBox="1"/>
-            <p:nvPr/>
-          </p:nvSpPr>
-          <p:spPr>
-            <a:xfrm>
-              <a:off x="3087703" y="6374953"/>
-              <a:ext cx="3287992" cy="220441"/>
-            </a:xfrm>
-            <a:prstGeom prst="rect">
-              <a:avLst/>
-            </a:prstGeom>
-            <a:noFill/>
-          </p:spPr>
-          <p:txBody>
-            <a:bodyPr wrap="square" rtlCol="0">
-              <a:spAutoFit/>
-            </a:bodyPr>
-            <a:lstStyle/>
-            <a:p>
-              <a:r>
-                <a:rPr lang="en-CN" sz="1600" b="1" dirty="0">
-                  <a:solidFill>
-                    <a:schemeClr val="bg2"/>
-                  </a:solidFill>
-                  <a:latin typeface="+mn-ea"/>
-                  <a:ea typeface="+mn-ea"/>
-                </a:rPr>
-                <a:t>雷达高度计回波波形</a:t>
-              </a:r>
-            </a:p>
-          </p:txBody>
-        </p:sp>
-        <mc:AlternateContent xmlns:mc="http://schemas.openxmlformats.org/markup-compatibility/2006" xmlns:a14="http://schemas.microsoft.com/office/drawing/2010/main">
-          <mc:Choice Requires="a14">
-            <p:sp>
-              <p:nvSpPr>
-                <p:cNvPr id="25" name="TextBox 24">
-                  <a:extLst>
-                    <a:ext uri="{FF2B5EF4-FFF2-40B4-BE49-F238E27FC236}">
-                      <a16:creationId xmlns:a16="http://schemas.microsoft.com/office/drawing/2014/main" id="{F2E941EC-EF6F-D00A-907A-70378D3F0417}"/>
-                    </a:ext>
-                  </a:extLst>
-                </p:cNvPr>
-                <p:cNvSpPr txBox="1"/>
-                <p:nvPr/>
-              </p:nvSpPr>
-              <p:spPr>
-                <a:xfrm>
-                  <a:off x="2366519" y="6121970"/>
-                  <a:ext cx="361136" cy="170341"/>
-                </a:xfrm>
-                <a:prstGeom prst="rect">
-                  <a:avLst/>
-                </a:prstGeom>
-                <a:noFill/>
-              </p:spPr>
-              <p:txBody>
-                <a:bodyPr wrap="none" rtlCol="0">
-                  <a:spAutoFit/>
-                </a:bodyPr>
-                <a:lstStyle/>
-                <a:p>
-                  <a:pPr/>
-                  <a14:m>
-                    <m:oMathPara xmlns:m="http://schemas.openxmlformats.org/officeDocument/2006/math">
-                      <m:oMathParaPr>
-                        <m:jc m:val="centerGroup"/>
-                      </m:oMathParaPr>
-                      <m:oMath xmlns:m="http://schemas.openxmlformats.org/officeDocument/2006/math">
-                        <m:sSub>
-                          <m:sSubPr>
-                            <m:ctrlPr>
-                              <a:rPr lang="en-CN" sz="1100" b="1" i="1" smtClean="0">
-                                <a:solidFill>
-                                  <a:schemeClr val="bg2"/>
-                                </a:solidFill>
-                                <a:latin typeface="Cambria Math" panose="02040503050406030204" pitchFamily="18" charset="0"/>
-                                <a:ea typeface="+mn-ea"/>
-                              </a:rPr>
-                            </m:ctrlPr>
-                          </m:sSubPr>
-                          <m:e>
-                            <m:r>
-                              <a:rPr lang="en-US" sz="1100" b="1" i="1" smtClean="0">
-                                <a:solidFill>
-                                  <a:schemeClr val="bg2"/>
-                                </a:solidFill>
-                                <a:latin typeface="Cambria Math" panose="02040503050406030204" pitchFamily="18" charset="0"/>
-                                <a:ea typeface="+mn-ea"/>
-                              </a:rPr>
-                              <m:t>𝒕</m:t>
-                            </m:r>
-                          </m:e>
-                          <m:sub>
-                            <m:r>
-                              <a:rPr lang="en-US" sz="1100" b="1" i="1" smtClean="0">
-                                <a:solidFill>
-                                  <a:schemeClr val="bg2"/>
-                                </a:solidFill>
-                                <a:latin typeface="Cambria Math" panose="02040503050406030204" pitchFamily="18" charset="0"/>
-                                <a:ea typeface="+mn-ea"/>
-                              </a:rPr>
-                              <m:t>𝟎</m:t>
-                            </m:r>
-                          </m:sub>
-                        </m:sSub>
-                      </m:oMath>
-                    </m:oMathPara>
-                  </a14:m>
-                  <a:endParaRPr lang="en-CN" sz="1100" b="1">
-                    <a:solidFill>
-                      <a:schemeClr val="bg2"/>
-                    </a:solidFill>
-                    <a:latin typeface="+mn-ea"/>
-                    <a:ea typeface="+mn-ea"/>
-                  </a:endParaRPr>
-                </a:p>
-              </p:txBody>
-            </p:sp>
-          </mc:Choice>
-          <mc:Fallback xmlns="">
-            <p:sp>
-              <p:nvSpPr>
-                <p:cNvPr id="25" name="TextBox 24">
-                  <a:extLst>
-                    <a:ext uri="{FF2B5EF4-FFF2-40B4-BE49-F238E27FC236}">
-                      <a16:creationId xmlns:a16="http://schemas.microsoft.com/office/drawing/2014/main" id="{F2E941EC-EF6F-D00A-907A-70378D3F0417}"/>
-                    </a:ext>
-                  </a:extLst>
-                </p:cNvPr>
-                <p:cNvSpPr txBox="1">
-                  <a:spLocks noRot="1" noChangeAspect="1" noMove="1" noResize="1" noEditPoints="1" noAdjustHandles="1" noChangeArrowheads="1" noChangeShapeType="1" noTextEdit="1"/>
-                </p:cNvSpPr>
-                <p:nvPr/>
-              </p:nvSpPr>
-              <p:spPr>
-                <a:xfrm>
-                  <a:off x="2366519" y="6121970"/>
-                  <a:ext cx="361136" cy="170341"/>
-                </a:xfrm>
-                <a:prstGeom prst="rect">
-                  <a:avLst/>
-                </a:prstGeom>
-                <a:blipFill>
-                  <a:blip r:embed="rId3"/>
-                  <a:stretch>
-                    <a:fillRect/>
-                  </a:stretch>
-                </a:blipFill>
-              </p:spPr>
-              <p:txBody>
-                <a:bodyPr/>
-                <a:lstStyle/>
-                <a:p>
-                  <a:r>
-                    <a:rPr lang="zh-CN" altLang="en-US">
-                      <a:noFill/>
-                    </a:rPr>
-                    <a:t> </a:t>
-                  </a:r>
-                </a:p>
-              </p:txBody>
-            </p:sp>
-          </mc:Fallback>
-        </mc:AlternateContent>
-        <mc:AlternateContent xmlns:mc="http://schemas.openxmlformats.org/markup-compatibility/2006" xmlns:a14="http://schemas.microsoft.com/office/drawing/2010/main">
-          <mc:Choice Requires="a14">
-            <p:sp>
-              <p:nvSpPr>
-                <p:cNvPr id="26" name="TextBox 25">
-                  <a:extLst>
-                    <a:ext uri="{FF2B5EF4-FFF2-40B4-BE49-F238E27FC236}">
-                      <a16:creationId xmlns:a16="http://schemas.microsoft.com/office/drawing/2014/main" id="{695B36E4-62B8-DC0B-D971-831D8C9D8445}"/>
-                    </a:ext>
-                  </a:extLst>
-                </p:cNvPr>
-                <p:cNvSpPr txBox="1"/>
-                <p:nvPr/>
-              </p:nvSpPr>
-              <p:spPr>
-                <a:xfrm>
-                  <a:off x="3286663" y="6120709"/>
-                  <a:ext cx="474484" cy="180194"/>
-                </a:xfrm>
-                <a:prstGeom prst="rect">
-                  <a:avLst/>
-                </a:prstGeom>
-                <a:noFill/>
-              </p:spPr>
-              <p:txBody>
-                <a:bodyPr wrap="none" rtlCol="0">
-                  <a:spAutoFit/>
-                </a:bodyPr>
-                <a:lstStyle/>
-                <a:p>
-                  <a:pPr/>
-                  <a14:m>
-                    <m:oMathPara xmlns:m="http://schemas.openxmlformats.org/officeDocument/2006/math">
-                      <m:oMathParaPr>
-                        <m:jc m:val="centerGroup"/>
-                      </m:oMathParaPr>
-                      <m:oMath xmlns:m="http://schemas.openxmlformats.org/officeDocument/2006/math">
-                        <m:sSub>
-                          <m:sSubPr>
-                            <m:ctrlPr>
-                              <a:rPr lang="en-CN" sz="1100" b="1" i="1" smtClean="0">
-                                <a:solidFill>
-                                  <a:schemeClr val="bg2"/>
-                                </a:solidFill>
-                                <a:latin typeface="Cambria Math" panose="02040503050406030204" pitchFamily="18" charset="0"/>
-                                <a:ea typeface="+mn-ea"/>
-                              </a:rPr>
-                            </m:ctrlPr>
-                          </m:sSubPr>
-                          <m:e>
-                            <m:r>
-                              <a:rPr lang="en-US" sz="1100" b="1" i="1" smtClean="0">
-                                <a:solidFill>
-                                  <a:schemeClr val="bg2"/>
-                                </a:solidFill>
-                                <a:latin typeface="Cambria Math" panose="02040503050406030204" pitchFamily="18" charset="0"/>
-                                <a:ea typeface="+mn-ea"/>
-                              </a:rPr>
-                              <m:t>𝒕</m:t>
-                            </m:r>
-                          </m:e>
-                          <m:sub>
-                            <m:r>
-                              <a:rPr lang="en-US" sz="1100" b="1" i="1" smtClean="0">
-                                <a:solidFill>
-                                  <a:schemeClr val="bg2"/>
-                                </a:solidFill>
-                                <a:latin typeface="Cambria Math" panose="02040503050406030204" pitchFamily="18" charset="0"/>
-                                <a:ea typeface="+mn-ea"/>
-                              </a:rPr>
-                              <m:t>𝟏</m:t>
-                            </m:r>
-                            <m:r>
-                              <a:rPr lang="en-US" sz="1100" b="1" i="1" smtClean="0">
-                                <a:solidFill>
-                                  <a:schemeClr val="bg2"/>
-                                </a:solidFill>
-                                <a:latin typeface="Cambria Math" panose="02040503050406030204" pitchFamily="18" charset="0"/>
-                                <a:ea typeface="+mn-ea"/>
-                              </a:rPr>
-                              <m:t>/</m:t>
-                            </m:r>
-                            <m:r>
-                              <a:rPr lang="en-US" sz="1100" b="1" i="1" smtClean="0">
-                                <a:solidFill>
-                                  <a:schemeClr val="bg2"/>
-                                </a:solidFill>
-                                <a:latin typeface="Cambria Math" panose="02040503050406030204" pitchFamily="18" charset="0"/>
-                                <a:ea typeface="+mn-ea"/>
-                              </a:rPr>
-                              <m:t>𝟐</m:t>
-                            </m:r>
-                          </m:sub>
-                        </m:sSub>
-                      </m:oMath>
-                    </m:oMathPara>
-                  </a14:m>
-                  <a:endParaRPr lang="en-CN" sz="1100" b="1">
-                    <a:solidFill>
-                      <a:schemeClr val="bg2"/>
-                    </a:solidFill>
-                    <a:latin typeface="+mn-ea"/>
-                    <a:ea typeface="+mn-ea"/>
-                  </a:endParaRPr>
-                </a:p>
-              </p:txBody>
-            </p:sp>
-          </mc:Choice>
-          <mc:Fallback xmlns="">
-            <p:sp>
-              <p:nvSpPr>
-                <p:cNvPr id="26" name="TextBox 25">
-                  <a:extLst>
-                    <a:ext uri="{FF2B5EF4-FFF2-40B4-BE49-F238E27FC236}">
-                      <a16:creationId xmlns:a16="http://schemas.microsoft.com/office/drawing/2014/main" id="{695B36E4-62B8-DC0B-D971-831D8C9D8445}"/>
-                    </a:ext>
-                  </a:extLst>
-                </p:cNvPr>
-                <p:cNvSpPr txBox="1">
-                  <a:spLocks noRot="1" noChangeAspect="1" noMove="1" noResize="1" noEditPoints="1" noAdjustHandles="1" noChangeArrowheads="1" noChangeShapeType="1" noTextEdit="1"/>
-                </p:cNvSpPr>
-                <p:nvPr/>
-              </p:nvSpPr>
-              <p:spPr>
-                <a:xfrm>
-                  <a:off x="3286663" y="6120709"/>
-                  <a:ext cx="474484" cy="180194"/>
-                </a:xfrm>
-                <a:prstGeom prst="rect">
-                  <a:avLst/>
-                </a:prstGeom>
-                <a:blipFill>
-                  <a:blip r:embed="rId4"/>
-                  <a:stretch>
-                    <a:fillRect b="-4444"/>
-                  </a:stretch>
-                </a:blipFill>
-              </p:spPr>
-              <p:txBody>
-                <a:bodyPr/>
-                <a:lstStyle/>
-                <a:p>
-                  <a:r>
-                    <a:rPr lang="zh-CN" altLang="en-US">
-                      <a:noFill/>
-                    </a:rPr>
-                    <a:t> </a:t>
-                  </a:r>
-                </a:p>
-              </p:txBody>
-            </p:sp>
-          </mc:Fallback>
-        </mc:AlternateContent>
-        <mc:AlternateContent xmlns:mc="http://schemas.openxmlformats.org/markup-compatibility/2006" xmlns:a14="http://schemas.microsoft.com/office/drawing/2010/main">
-          <mc:Choice Requires="a14">
-            <p:sp>
-              <p:nvSpPr>
-                <p:cNvPr id="27" name="TextBox 26">
-                  <a:extLst>
-                    <a:ext uri="{FF2B5EF4-FFF2-40B4-BE49-F238E27FC236}">
-                      <a16:creationId xmlns:a16="http://schemas.microsoft.com/office/drawing/2014/main" id="{C94EB4A6-BAF8-125F-E269-B8A62A807E90}"/>
-                    </a:ext>
-                  </a:extLst>
-                </p:cNvPr>
-                <p:cNvSpPr txBox="1"/>
-                <p:nvPr/>
-              </p:nvSpPr>
-              <p:spPr>
-                <a:xfrm>
-                  <a:off x="4351108" y="6121215"/>
-                  <a:ext cx="361136" cy="170341"/>
-                </a:xfrm>
-                <a:prstGeom prst="rect">
-                  <a:avLst/>
-                </a:prstGeom>
-                <a:noFill/>
-              </p:spPr>
-              <p:txBody>
-                <a:bodyPr wrap="none" rtlCol="0">
-                  <a:spAutoFit/>
-                </a:bodyPr>
-                <a:lstStyle/>
-                <a:p>
-                  <a:pPr/>
-                  <a14:m>
-                    <m:oMathPara xmlns:m="http://schemas.openxmlformats.org/officeDocument/2006/math">
-                      <m:oMathParaPr>
-                        <m:jc m:val="centerGroup"/>
-                      </m:oMathParaPr>
-                      <m:oMath xmlns:m="http://schemas.openxmlformats.org/officeDocument/2006/math">
-                        <m:sSub>
-                          <m:sSubPr>
-                            <m:ctrlPr>
-                              <a:rPr lang="en-CN" sz="1100" b="1" i="1" smtClean="0">
-                                <a:solidFill>
-                                  <a:schemeClr val="bg2"/>
-                                </a:solidFill>
-                                <a:latin typeface="Cambria Math" panose="02040503050406030204" pitchFamily="18" charset="0"/>
-                                <a:ea typeface="+mn-ea"/>
-                              </a:rPr>
-                            </m:ctrlPr>
-                          </m:sSubPr>
-                          <m:e>
-                            <m:r>
-                              <a:rPr lang="en-US" sz="1100" b="1" i="1" smtClean="0">
-                                <a:solidFill>
-                                  <a:schemeClr val="bg2"/>
-                                </a:solidFill>
-                                <a:latin typeface="Cambria Math" panose="02040503050406030204" pitchFamily="18" charset="0"/>
-                                <a:ea typeface="+mn-ea"/>
-                              </a:rPr>
-                              <m:t>𝒕</m:t>
-                            </m:r>
-                          </m:e>
-                          <m:sub>
-                            <m:r>
-                              <a:rPr lang="en-US" sz="1100" b="1" i="1" smtClean="0">
-                                <a:solidFill>
-                                  <a:schemeClr val="bg2"/>
-                                </a:solidFill>
-                                <a:latin typeface="Cambria Math" panose="02040503050406030204" pitchFamily="18" charset="0"/>
-                                <a:ea typeface="+mn-ea"/>
-                              </a:rPr>
-                              <m:t>𝟏</m:t>
-                            </m:r>
-                          </m:sub>
-                        </m:sSub>
-                      </m:oMath>
-                    </m:oMathPara>
-                  </a14:m>
-                  <a:endParaRPr lang="en-CN" sz="1100" b="1">
-                    <a:solidFill>
-                      <a:schemeClr val="bg2"/>
-                    </a:solidFill>
-                    <a:latin typeface="+mn-ea"/>
-                    <a:ea typeface="+mn-ea"/>
-                  </a:endParaRPr>
-                </a:p>
-              </p:txBody>
-            </p:sp>
-          </mc:Choice>
-          <mc:Fallback xmlns="">
-            <p:sp>
-              <p:nvSpPr>
-                <p:cNvPr id="27" name="TextBox 26">
-                  <a:extLst>
-                    <a:ext uri="{FF2B5EF4-FFF2-40B4-BE49-F238E27FC236}">
-                      <a16:creationId xmlns:a16="http://schemas.microsoft.com/office/drawing/2014/main" id="{C94EB4A6-BAF8-125F-E269-B8A62A807E90}"/>
-                    </a:ext>
-                  </a:extLst>
-                </p:cNvPr>
-                <p:cNvSpPr txBox="1">
-                  <a:spLocks noRot="1" noChangeAspect="1" noMove="1" noResize="1" noEditPoints="1" noAdjustHandles="1" noChangeArrowheads="1" noChangeShapeType="1" noTextEdit="1"/>
-                </p:cNvSpPr>
-                <p:nvPr/>
-              </p:nvSpPr>
-              <p:spPr>
-                <a:xfrm>
-                  <a:off x="4351108" y="6121215"/>
-                  <a:ext cx="361136" cy="170341"/>
-                </a:xfrm>
-                <a:prstGeom prst="rect">
-                  <a:avLst/>
-                </a:prstGeom>
-                <a:blipFill>
-                  <a:blip r:embed="rId5"/>
-                  <a:stretch>
-                    <a:fillRect/>
-                  </a:stretch>
-                </a:blipFill>
-              </p:spPr>
-              <p:txBody>
-                <a:bodyPr/>
-                <a:lstStyle/>
-                <a:p>
-                  <a:r>
-                    <a:rPr lang="zh-CN" altLang="en-US">
-                      <a:noFill/>
-                    </a:rPr>
-                    <a:t> </a:t>
-                  </a:r>
-                </a:p>
-              </p:txBody>
-            </p:sp>
-          </mc:Fallback>
-        </mc:AlternateContent>
-        <mc:AlternateContent xmlns:mc="http://schemas.openxmlformats.org/markup-compatibility/2006" xmlns:a14="http://schemas.microsoft.com/office/drawing/2010/main">
-          <mc:Choice Requires="a14">
-            <p:sp>
-              <p:nvSpPr>
-                <p:cNvPr id="28" name="TextBox 27">
-                  <a:extLst>
-                    <a:ext uri="{FF2B5EF4-FFF2-40B4-BE49-F238E27FC236}">
-                      <a16:creationId xmlns:a16="http://schemas.microsoft.com/office/drawing/2014/main" id="{98CEC57C-B896-6DF9-991C-F6A6A0FB877B}"/>
-                    </a:ext>
-                  </a:extLst>
-                </p:cNvPr>
-                <p:cNvSpPr txBox="1"/>
-                <p:nvPr/>
-              </p:nvSpPr>
-              <p:spPr>
-                <a:xfrm>
-                  <a:off x="5320808" y="6114117"/>
-                  <a:ext cx="474485" cy="180194"/>
-                </a:xfrm>
-                <a:prstGeom prst="rect">
-                  <a:avLst/>
-                </a:prstGeom>
-                <a:noFill/>
-              </p:spPr>
-              <p:txBody>
-                <a:bodyPr wrap="none" rtlCol="0">
-                  <a:spAutoFit/>
-                </a:bodyPr>
-                <a:lstStyle/>
-                <a:p>
-                  <a:pPr/>
-                  <a14:m>
-                    <m:oMathPara xmlns:m="http://schemas.openxmlformats.org/officeDocument/2006/math">
-                      <m:oMathParaPr>
-                        <m:jc m:val="centerGroup"/>
-                      </m:oMathParaPr>
-                      <m:oMath xmlns:m="http://schemas.openxmlformats.org/officeDocument/2006/math">
-                        <m:sSub>
-                          <m:sSubPr>
-                            <m:ctrlPr>
-                              <a:rPr lang="en-CN" sz="1100" b="1" i="1" smtClean="0">
-                                <a:solidFill>
-                                  <a:schemeClr val="bg2"/>
-                                </a:solidFill>
-                                <a:latin typeface="Cambria Math" panose="02040503050406030204" pitchFamily="18" charset="0"/>
-                                <a:ea typeface="+mn-ea"/>
-                              </a:rPr>
-                            </m:ctrlPr>
-                          </m:sSubPr>
-                          <m:e>
-                            <m:r>
-                              <a:rPr lang="en-US" sz="1100" b="1" i="1" smtClean="0">
-                                <a:solidFill>
-                                  <a:schemeClr val="bg2"/>
-                                </a:solidFill>
-                                <a:latin typeface="Cambria Math" panose="02040503050406030204" pitchFamily="18" charset="0"/>
-                                <a:ea typeface="+mn-ea"/>
-                              </a:rPr>
-                              <m:t>𝒕</m:t>
-                            </m:r>
-                          </m:e>
-                          <m:sub>
-                            <m:r>
-                              <a:rPr lang="en-US" sz="1100" b="1" i="1" smtClean="0">
-                                <a:solidFill>
-                                  <a:schemeClr val="bg2"/>
-                                </a:solidFill>
-                                <a:latin typeface="Cambria Math" panose="02040503050406030204" pitchFamily="18" charset="0"/>
-                                <a:ea typeface="+mn-ea"/>
-                              </a:rPr>
-                              <m:t>𝟑</m:t>
-                            </m:r>
-                            <m:r>
-                              <a:rPr lang="en-US" sz="1100" b="1" i="1" smtClean="0">
-                                <a:solidFill>
-                                  <a:schemeClr val="bg2"/>
-                                </a:solidFill>
-                                <a:latin typeface="Cambria Math" panose="02040503050406030204" pitchFamily="18" charset="0"/>
-                                <a:ea typeface="+mn-ea"/>
-                              </a:rPr>
-                              <m:t>/</m:t>
-                            </m:r>
-                            <m:r>
-                              <a:rPr lang="en-US" sz="1100" b="1" i="1" smtClean="0">
-                                <a:solidFill>
-                                  <a:schemeClr val="bg2"/>
-                                </a:solidFill>
-                                <a:latin typeface="Cambria Math" panose="02040503050406030204" pitchFamily="18" charset="0"/>
-                                <a:ea typeface="+mn-ea"/>
-                              </a:rPr>
-                              <m:t>𝟐</m:t>
-                            </m:r>
-                          </m:sub>
-                        </m:sSub>
-                      </m:oMath>
-                    </m:oMathPara>
-                  </a14:m>
-                  <a:endParaRPr lang="en-CN" sz="1100" b="1">
-                    <a:solidFill>
-                      <a:schemeClr val="bg2"/>
-                    </a:solidFill>
-                    <a:latin typeface="+mn-ea"/>
-                    <a:ea typeface="+mn-ea"/>
-                  </a:endParaRPr>
-                </a:p>
-              </p:txBody>
-            </p:sp>
-          </mc:Choice>
-          <mc:Fallback xmlns="">
-            <p:sp>
-              <p:nvSpPr>
-                <p:cNvPr id="28" name="TextBox 27">
-                  <a:extLst>
-                    <a:ext uri="{FF2B5EF4-FFF2-40B4-BE49-F238E27FC236}">
-                      <a16:creationId xmlns:a16="http://schemas.microsoft.com/office/drawing/2014/main" id="{98CEC57C-B896-6DF9-991C-F6A6A0FB877B}"/>
-                    </a:ext>
-                  </a:extLst>
-                </p:cNvPr>
-                <p:cNvSpPr txBox="1">
-                  <a:spLocks noRot="1" noChangeAspect="1" noMove="1" noResize="1" noEditPoints="1" noAdjustHandles="1" noChangeArrowheads="1" noChangeShapeType="1" noTextEdit="1"/>
-                </p:cNvSpPr>
-                <p:nvPr/>
-              </p:nvSpPr>
-              <p:spPr>
-                <a:xfrm>
-                  <a:off x="5320808" y="6114117"/>
-                  <a:ext cx="474485" cy="180194"/>
-                </a:xfrm>
-                <a:prstGeom prst="rect">
-                  <a:avLst/>
-                </a:prstGeom>
-                <a:blipFill>
-                  <a:blip r:embed="rId6"/>
-                  <a:stretch>
-                    <a:fillRect b="-4444"/>
-                  </a:stretch>
-                </a:blipFill>
-              </p:spPr>
-              <p:txBody>
-                <a:bodyPr/>
-                <a:lstStyle/>
-                <a:p>
-                  <a:r>
-                    <a:rPr lang="zh-CN" altLang="en-US">
-                      <a:noFill/>
-                    </a:rPr>
-                    <a:t> </a:t>
-                  </a:r>
-                </a:p>
-              </p:txBody>
-            </p:sp>
-          </mc:Fallback>
-        </mc:AlternateContent>
-        <mc:AlternateContent xmlns:mc="http://schemas.openxmlformats.org/markup-compatibility/2006" xmlns:a14="http://schemas.microsoft.com/office/drawing/2010/main">
-          <mc:Choice Requires="a14">
-            <p:sp>
-              <p:nvSpPr>
-                <p:cNvPr id="29" name="TextBox 28">
-                  <a:extLst>
-                    <a:ext uri="{FF2B5EF4-FFF2-40B4-BE49-F238E27FC236}">
-                      <a16:creationId xmlns:a16="http://schemas.microsoft.com/office/drawing/2014/main" id="{B2C7E1BE-CEF7-51C3-F4A6-212A000473D9}"/>
-                    </a:ext>
-                  </a:extLst>
-                </p:cNvPr>
-                <p:cNvSpPr txBox="1"/>
-                <p:nvPr/>
-              </p:nvSpPr>
-              <p:spPr>
-                <a:xfrm>
-                  <a:off x="6437505" y="6095694"/>
-                  <a:ext cx="361136" cy="170341"/>
-                </a:xfrm>
-                <a:prstGeom prst="rect">
-                  <a:avLst/>
-                </a:prstGeom>
-                <a:noFill/>
-              </p:spPr>
-              <p:txBody>
-                <a:bodyPr wrap="none" rtlCol="0">
-                  <a:spAutoFit/>
-                </a:bodyPr>
-                <a:lstStyle/>
-                <a:p>
-                  <a:pPr/>
-                  <a14:m>
-                    <m:oMathPara xmlns:m="http://schemas.openxmlformats.org/officeDocument/2006/math">
-                      <m:oMathParaPr>
-                        <m:jc m:val="centerGroup"/>
-                      </m:oMathParaPr>
-                      <m:oMath xmlns:m="http://schemas.openxmlformats.org/officeDocument/2006/math">
-                        <m:sSub>
-                          <m:sSubPr>
-                            <m:ctrlPr>
-                              <a:rPr lang="en-CN" sz="1100" b="1" i="1" smtClean="0">
-                                <a:solidFill>
-                                  <a:schemeClr val="bg2"/>
-                                </a:solidFill>
-                                <a:latin typeface="Cambria Math" panose="02040503050406030204" pitchFamily="18" charset="0"/>
-                                <a:ea typeface="+mn-ea"/>
-                              </a:rPr>
-                            </m:ctrlPr>
-                          </m:sSubPr>
-                          <m:e>
-                            <m:r>
-                              <a:rPr lang="en-US" sz="1100" b="1" i="1" smtClean="0">
-                                <a:solidFill>
-                                  <a:schemeClr val="bg2"/>
-                                </a:solidFill>
-                                <a:latin typeface="Cambria Math" panose="02040503050406030204" pitchFamily="18" charset="0"/>
-                                <a:ea typeface="+mn-ea"/>
-                              </a:rPr>
-                              <m:t>𝒕</m:t>
-                            </m:r>
-                          </m:e>
-                          <m:sub>
-                            <m:r>
-                              <a:rPr lang="en-US" sz="1100" b="1" i="1" smtClean="0">
-                                <a:solidFill>
-                                  <a:schemeClr val="bg2"/>
-                                </a:solidFill>
-                                <a:latin typeface="Cambria Math" panose="02040503050406030204" pitchFamily="18" charset="0"/>
-                                <a:ea typeface="+mn-ea"/>
-                              </a:rPr>
-                              <m:t>𝟐</m:t>
-                            </m:r>
-                          </m:sub>
-                        </m:sSub>
-                      </m:oMath>
-                    </m:oMathPara>
-                  </a14:m>
-                  <a:endParaRPr lang="en-CN" sz="1100" b="1">
-                    <a:solidFill>
-                      <a:schemeClr val="bg2"/>
-                    </a:solidFill>
-                    <a:latin typeface="+mn-ea"/>
-                    <a:ea typeface="+mn-ea"/>
-                  </a:endParaRPr>
-                </a:p>
-              </p:txBody>
-            </p:sp>
-          </mc:Choice>
-          <mc:Fallback xmlns="">
-            <p:sp>
-              <p:nvSpPr>
-                <p:cNvPr id="29" name="TextBox 28">
-                  <a:extLst>
-                    <a:ext uri="{FF2B5EF4-FFF2-40B4-BE49-F238E27FC236}">
-                      <a16:creationId xmlns:a16="http://schemas.microsoft.com/office/drawing/2014/main" id="{B2C7E1BE-CEF7-51C3-F4A6-212A000473D9}"/>
-                    </a:ext>
-                  </a:extLst>
-                </p:cNvPr>
-                <p:cNvSpPr txBox="1">
-                  <a:spLocks noRot="1" noChangeAspect="1" noMove="1" noResize="1" noEditPoints="1" noAdjustHandles="1" noChangeArrowheads="1" noChangeShapeType="1" noTextEdit="1"/>
-                </p:cNvSpPr>
-                <p:nvPr/>
-              </p:nvSpPr>
-              <p:spPr>
-                <a:xfrm>
-                  <a:off x="6437505" y="6095694"/>
-                  <a:ext cx="361136" cy="170341"/>
-                </a:xfrm>
-                <a:prstGeom prst="rect">
-                  <a:avLst/>
-                </a:prstGeom>
-                <a:blipFill>
-                  <a:blip r:embed="rId7"/>
-                  <a:stretch>
-                    <a:fillRect/>
-                  </a:stretch>
-                </a:blipFill>
-              </p:spPr>
-              <p:txBody>
-                <a:bodyPr/>
-                <a:lstStyle/>
-                <a:p>
-                  <a:r>
-                    <a:rPr lang="zh-CN" altLang="en-US">
-                      <a:noFill/>
-                    </a:rPr>
-                    <a:t> </a:t>
-                  </a:r>
-                </a:p>
-              </p:txBody>
-            </p:sp>
-          </mc:Fallback>
-        </mc:AlternateContent>
-      </p:grpSp>
+        </mc:Fallback>
+      </mc:AlternateContent>
       <p:sp>
         <p:nvSpPr>
           <p:cNvPr id="116" name="TextBox 115">
@@ -30822,7 +30588,7 @@
         </p:nvSpPr>
         <p:spPr>
           <a:xfrm>
-            <a:off x="4519679" y="3648847"/>
+            <a:off x="3826192" y="4481029"/>
             <a:ext cx="1068413" cy="276999"/>
           </a:xfrm>
           <a:prstGeom prst="rect">
@@ -30870,7 +30636,7 @@
         </p:nvSpPr>
         <p:spPr>
           <a:xfrm>
-            <a:off x="3221804" y="4931748"/>
+            <a:off x="2679004" y="3851386"/>
             <a:ext cx="1011547" cy="461665"/>
           </a:xfrm>
           <a:prstGeom prst="rect">
@@ -30885,7 +30651,7 @@
           <a:lstStyle/>
           <a:p>
             <a:r>
-              <a:rPr lang="zh-CN" altLang="en-US" sz="1200" b="1">
+              <a:rPr lang="zh-CN" altLang="en-US" sz="1200" b="1" dirty="0">
                 <a:solidFill>
                   <a:schemeClr val="accent3"/>
                 </a:solidFill>
@@ -30894,7 +30660,7 @@
               </a:rPr>
               <a:t>实际波形前缘中点</a:t>
             </a:r>
-            <a:endParaRPr lang="en-CN" sz="1200" b="1">
+            <a:endParaRPr lang="en-CN" sz="1200" b="1" dirty="0">
               <a:solidFill>
                 <a:schemeClr val="accent3"/>
               </a:solidFill>
@@ -30920,8 +30686,8 @@
         </p:nvCxnSpPr>
         <p:spPr bwMode="auto">
           <a:xfrm>
-            <a:off x="3624242" y="4514126"/>
-            <a:ext cx="989376" cy="0"/>
+            <a:off x="3303885" y="4862228"/>
+            <a:ext cx="555107" cy="0"/>
           </a:xfrm>
           <a:prstGeom prst="straightConnector1">
             <a:avLst/>
@@ -30960,8 +30726,8 @@
         </p:nvSpPr>
         <p:spPr>
           <a:xfrm>
-            <a:off x="3807108" y="4178358"/>
-            <a:ext cx="723275" cy="253916"/>
+            <a:off x="3258272" y="4893271"/>
+            <a:ext cx="646331" cy="230832"/>
           </a:xfrm>
           <a:prstGeom prst="rect">
             <a:avLst/>
@@ -30975,7 +30741,7 @@
           <a:lstStyle/>
           <a:p>
             <a:r>
-              <a:rPr lang="en-CN" sz="1050" b="1" dirty="0">
+              <a:rPr lang="en-CN" sz="900" b="1" dirty="0">
                 <a:solidFill>
                   <a:schemeClr val="bg1"/>
                 </a:solidFill>
@@ -31003,8 +30769,8 @@
         </p:nvCxnSpPr>
         <p:spPr bwMode="auto">
           <a:xfrm>
-            <a:off x="4613618" y="3478415"/>
-            <a:ext cx="22512" cy="2210061"/>
+            <a:off x="3843495" y="3350237"/>
+            <a:ext cx="15497" cy="2614573"/>
           </a:xfrm>
           <a:prstGeom prst="line">
             <a:avLst/>
@@ -31013,7 +30779,7 @@
             <a:solidFill>
               <a:srgbClr val="269FA0"/>
             </a:solidFill>
-            <a:prstDash val="dash"/>
+            <a:prstDash val="solid"/>
             <a:headEnd type="none" w="med" len="med"/>
             <a:tailEnd type="none" w="med" len="med"/>
           </a:ln>
@@ -31035,10 +30801,10 @@
       </p:cxnSp>
       <p:sp>
         <p:nvSpPr>
-          <p:cNvPr id="11" name="流程图: 接点 10">
+          <p:cNvPr id="7" name="Freeform 6">
             <a:extLst>
               <a:ext uri="{FF2B5EF4-FFF2-40B4-BE49-F238E27FC236}">
-                <a16:creationId xmlns:a16="http://schemas.microsoft.com/office/drawing/2014/main" id="{6E07C617-6551-2D72-3E52-61B4E87E7010}"/>
+                <a16:creationId xmlns:a16="http://schemas.microsoft.com/office/drawing/2014/main" id="{AA1FE7C1-2A10-0690-269E-FBA79D1A8FFD}"/>
               </a:ext>
             </a:extLst>
           </p:cNvPr>
@@ -31047,14 +30813,298 @@
         </p:nvSpPr>
         <p:spPr>
           <a:xfrm>
-            <a:off x="4580407" y="3577072"/>
-            <a:ext cx="83649" cy="86363"/>
+            <a:off x="2613151" y="3461010"/>
+            <a:ext cx="4265154" cy="2158053"/>
           </a:xfrm>
-          <a:prstGeom prst="flowChartConnector">
+          <a:custGeom>
+            <a:avLst/>
+            <a:gdLst>
+              <a:gd name="connsiteX0" fmla="*/ 0 w 4265154"/>
+              <a:gd name="connsiteY0" fmla="*/ 2145122 h 2145122"/>
+              <a:gd name="connsiteX1" fmla="*/ 214792 w 4265154"/>
+              <a:gd name="connsiteY1" fmla="*/ 2016247 h 2145122"/>
+              <a:gd name="connsiteX2" fmla="*/ 288435 w 4265154"/>
+              <a:gd name="connsiteY2" fmla="*/ 1905782 h 2145122"/>
+              <a:gd name="connsiteX3" fmla="*/ 386626 w 4265154"/>
+              <a:gd name="connsiteY3" fmla="*/ 1807592 h 2145122"/>
+              <a:gd name="connsiteX4" fmla="*/ 460269 w 4265154"/>
+              <a:gd name="connsiteY4" fmla="*/ 1586663 h 2145122"/>
+              <a:gd name="connsiteX5" fmla="*/ 693471 w 4265154"/>
+              <a:gd name="connsiteY5" fmla="*/ 758180 h 2145122"/>
+              <a:gd name="connsiteX6" fmla="*/ 1129192 w 4265154"/>
+              <a:gd name="connsiteY6" fmla="*/ 89256 h 2145122"/>
+              <a:gd name="connsiteX7" fmla="*/ 1528091 w 4265154"/>
+              <a:gd name="connsiteY7" fmla="*/ 3339 h 2145122"/>
+              <a:gd name="connsiteX8" fmla="*/ 2276795 w 4265154"/>
+              <a:gd name="connsiteY8" fmla="*/ 52435 h 2145122"/>
+              <a:gd name="connsiteX9" fmla="*/ 3534862 w 4265154"/>
+              <a:gd name="connsiteY9" fmla="*/ 211994 h 2145122"/>
+              <a:gd name="connsiteX10" fmla="*/ 4265154 w 4265154"/>
+              <a:gd name="connsiteY10" fmla="*/ 291774 h 2145122"/>
+              <a:gd name="connsiteX0" fmla="*/ 0 w 4265154"/>
+              <a:gd name="connsiteY0" fmla="*/ 2145122 h 2145122"/>
+              <a:gd name="connsiteX1" fmla="*/ 214792 w 4265154"/>
+              <a:gd name="connsiteY1" fmla="*/ 2016247 h 2145122"/>
+              <a:gd name="connsiteX2" fmla="*/ 318068 w 4265154"/>
+              <a:gd name="connsiteY2" fmla="*/ 1935416 h 2145122"/>
+              <a:gd name="connsiteX3" fmla="*/ 386626 w 4265154"/>
+              <a:gd name="connsiteY3" fmla="*/ 1807592 h 2145122"/>
+              <a:gd name="connsiteX4" fmla="*/ 460269 w 4265154"/>
+              <a:gd name="connsiteY4" fmla="*/ 1586663 h 2145122"/>
+              <a:gd name="connsiteX5" fmla="*/ 693471 w 4265154"/>
+              <a:gd name="connsiteY5" fmla="*/ 758180 h 2145122"/>
+              <a:gd name="connsiteX6" fmla="*/ 1129192 w 4265154"/>
+              <a:gd name="connsiteY6" fmla="*/ 89256 h 2145122"/>
+              <a:gd name="connsiteX7" fmla="*/ 1528091 w 4265154"/>
+              <a:gd name="connsiteY7" fmla="*/ 3339 h 2145122"/>
+              <a:gd name="connsiteX8" fmla="*/ 2276795 w 4265154"/>
+              <a:gd name="connsiteY8" fmla="*/ 52435 h 2145122"/>
+              <a:gd name="connsiteX9" fmla="*/ 3534862 w 4265154"/>
+              <a:gd name="connsiteY9" fmla="*/ 211994 h 2145122"/>
+              <a:gd name="connsiteX10" fmla="*/ 4265154 w 4265154"/>
+              <a:gd name="connsiteY10" fmla="*/ 291774 h 2145122"/>
+              <a:gd name="connsiteX0" fmla="*/ 0 w 4265154"/>
+              <a:gd name="connsiteY0" fmla="*/ 2145122 h 2145122"/>
+              <a:gd name="connsiteX1" fmla="*/ 172459 w 4265154"/>
+              <a:gd name="connsiteY1" fmla="*/ 2045881 h 2145122"/>
+              <a:gd name="connsiteX2" fmla="*/ 318068 w 4265154"/>
+              <a:gd name="connsiteY2" fmla="*/ 1935416 h 2145122"/>
+              <a:gd name="connsiteX3" fmla="*/ 386626 w 4265154"/>
+              <a:gd name="connsiteY3" fmla="*/ 1807592 h 2145122"/>
+              <a:gd name="connsiteX4" fmla="*/ 460269 w 4265154"/>
+              <a:gd name="connsiteY4" fmla="*/ 1586663 h 2145122"/>
+              <a:gd name="connsiteX5" fmla="*/ 693471 w 4265154"/>
+              <a:gd name="connsiteY5" fmla="*/ 758180 h 2145122"/>
+              <a:gd name="connsiteX6" fmla="*/ 1129192 w 4265154"/>
+              <a:gd name="connsiteY6" fmla="*/ 89256 h 2145122"/>
+              <a:gd name="connsiteX7" fmla="*/ 1528091 w 4265154"/>
+              <a:gd name="connsiteY7" fmla="*/ 3339 h 2145122"/>
+              <a:gd name="connsiteX8" fmla="*/ 2276795 w 4265154"/>
+              <a:gd name="connsiteY8" fmla="*/ 52435 h 2145122"/>
+              <a:gd name="connsiteX9" fmla="*/ 3534862 w 4265154"/>
+              <a:gd name="connsiteY9" fmla="*/ 211994 h 2145122"/>
+              <a:gd name="connsiteX10" fmla="*/ 4265154 w 4265154"/>
+              <a:gd name="connsiteY10" fmla="*/ 291774 h 2145122"/>
+              <a:gd name="connsiteX0" fmla="*/ 0 w 4265154"/>
+              <a:gd name="connsiteY0" fmla="*/ 2146179 h 2146179"/>
+              <a:gd name="connsiteX1" fmla="*/ 172459 w 4265154"/>
+              <a:gd name="connsiteY1" fmla="*/ 2046938 h 2146179"/>
+              <a:gd name="connsiteX2" fmla="*/ 318068 w 4265154"/>
+              <a:gd name="connsiteY2" fmla="*/ 1936473 h 2146179"/>
+              <a:gd name="connsiteX3" fmla="*/ 386626 w 4265154"/>
+              <a:gd name="connsiteY3" fmla="*/ 1808649 h 2146179"/>
+              <a:gd name="connsiteX4" fmla="*/ 460269 w 4265154"/>
+              <a:gd name="connsiteY4" fmla="*/ 1587720 h 2146179"/>
+              <a:gd name="connsiteX5" fmla="*/ 693471 w 4265154"/>
+              <a:gd name="connsiteY5" fmla="*/ 759237 h 2146179"/>
+              <a:gd name="connsiteX6" fmla="*/ 1065692 w 4265154"/>
+              <a:gd name="connsiteY6" fmla="*/ 149580 h 2146179"/>
+              <a:gd name="connsiteX7" fmla="*/ 1528091 w 4265154"/>
+              <a:gd name="connsiteY7" fmla="*/ 4396 h 2146179"/>
+              <a:gd name="connsiteX8" fmla="*/ 2276795 w 4265154"/>
+              <a:gd name="connsiteY8" fmla="*/ 53492 h 2146179"/>
+              <a:gd name="connsiteX9" fmla="*/ 3534862 w 4265154"/>
+              <a:gd name="connsiteY9" fmla="*/ 213051 h 2146179"/>
+              <a:gd name="connsiteX10" fmla="*/ 4265154 w 4265154"/>
+              <a:gd name="connsiteY10" fmla="*/ 292831 h 2146179"/>
+              <a:gd name="connsiteX0" fmla="*/ 0 w 4265154"/>
+              <a:gd name="connsiteY0" fmla="*/ 2158053 h 2158053"/>
+              <a:gd name="connsiteX1" fmla="*/ 172459 w 4265154"/>
+              <a:gd name="connsiteY1" fmla="*/ 2058812 h 2158053"/>
+              <a:gd name="connsiteX2" fmla="*/ 318068 w 4265154"/>
+              <a:gd name="connsiteY2" fmla="*/ 1948347 h 2158053"/>
+              <a:gd name="connsiteX3" fmla="*/ 386626 w 4265154"/>
+              <a:gd name="connsiteY3" fmla="*/ 1820523 h 2158053"/>
+              <a:gd name="connsiteX4" fmla="*/ 460269 w 4265154"/>
+              <a:gd name="connsiteY4" fmla="*/ 1599594 h 2158053"/>
+              <a:gd name="connsiteX5" fmla="*/ 693471 w 4265154"/>
+              <a:gd name="connsiteY5" fmla="*/ 771111 h 2158053"/>
+              <a:gd name="connsiteX6" fmla="*/ 1065692 w 4265154"/>
+              <a:gd name="connsiteY6" fmla="*/ 161454 h 2158053"/>
+              <a:gd name="connsiteX7" fmla="*/ 1528091 w 4265154"/>
+              <a:gd name="connsiteY7" fmla="*/ 3570 h 2158053"/>
+              <a:gd name="connsiteX8" fmla="*/ 2276795 w 4265154"/>
+              <a:gd name="connsiteY8" fmla="*/ 65366 h 2158053"/>
+              <a:gd name="connsiteX9" fmla="*/ 3534862 w 4265154"/>
+              <a:gd name="connsiteY9" fmla="*/ 224925 h 2158053"/>
+              <a:gd name="connsiteX10" fmla="*/ 4265154 w 4265154"/>
+              <a:gd name="connsiteY10" fmla="*/ 304705 h 2158053"/>
+            </a:gdLst>
+            <a:ahLst/>
+            <a:cxnLst>
+              <a:cxn ang="0">
+                <a:pos x="connsiteX0" y="connsiteY0"/>
+              </a:cxn>
+              <a:cxn ang="0">
+                <a:pos x="connsiteX1" y="connsiteY1"/>
+              </a:cxn>
+              <a:cxn ang="0">
+                <a:pos x="connsiteX2" y="connsiteY2"/>
+              </a:cxn>
+              <a:cxn ang="0">
+                <a:pos x="connsiteX3" y="connsiteY3"/>
+              </a:cxn>
+              <a:cxn ang="0">
+                <a:pos x="connsiteX4" y="connsiteY4"/>
+              </a:cxn>
+              <a:cxn ang="0">
+                <a:pos x="connsiteX5" y="connsiteY5"/>
+              </a:cxn>
+              <a:cxn ang="0">
+                <a:pos x="connsiteX6" y="connsiteY6"/>
+              </a:cxn>
+              <a:cxn ang="0">
+                <a:pos x="connsiteX7" y="connsiteY7"/>
+              </a:cxn>
+              <a:cxn ang="0">
+                <a:pos x="connsiteX8" y="connsiteY8"/>
+              </a:cxn>
+              <a:cxn ang="0">
+                <a:pos x="connsiteX9" y="connsiteY9"/>
+              </a:cxn>
+              <a:cxn ang="0">
+                <a:pos x="connsiteX10" y="connsiteY10"/>
+              </a:cxn>
+            </a:cxnLst>
+            <a:rect l="l" t="t" r="r" b="b"/>
+            <a:pathLst>
+              <a:path w="4265154" h="2158053">
+                <a:moveTo>
+                  <a:pt x="0" y="2158053"/>
+                </a:moveTo>
+                <a:cubicBezTo>
+                  <a:pt x="83360" y="2113560"/>
+                  <a:pt x="119448" y="2093763"/>
+                  <a:pt x="172459" y="2058812"/>
+                </a:cubicBezTo>
+                <a:cubicBezTo>
+                  <a:pt x="225470" y="2023861"/>
+                  <a:pt x="282374" y="1988062"/>
+                  <a:pt x="318068" y="1948347"/>
+                </a:cubicBezTo>
+                <a:cubicBezTo>
+                  <a:pt x="353762" y="1908632"/>
+                  <a:pt x="362926" y="1878649"/>
+                  <a:pt x="386626" y="1820523"/>
+                </a:cubicBezTo>
+                <a:cubicBezTo>
+                  <a:pt x="410326" y="1762397"/>
+                  <a:pt x="409128" y="1774496"/>
+                  <a:pt x="460269" y="1599594"/>
+                </a:cubicBezTo>
+                <a:cubicBezTo>
+                  <a:pt x="511410" y="1424692"/>
+                  <a:pt x="592567" y="1010801"/>
+                  <a:pt x="693471" y="771111"/>
+                </a:cubicBezTo>
+                <a:cubicBezTo>
+                  <a:pt x="794375" y="531421"/>
+                  <a:pt x="926589" y="289378"/>
+                  <a:pt x="1065692" y="161454"/>
+                </a:cubicBezTo>
+                <a:cubicBezTo>
+                  <a:pt x="1204795" y="33531"/>
+                  <a:pt x="1326240" y="19585"/>
+                  <a:pt x="1528091" y="3570"/>
+                </a:cubicBezTo>
+                <a:cubicBezTo>
+                  <a:pt x="1729942" y="-12445"/>
+                  <a:pt x="1942333" y="28474"/>
+                  <a:pt x="2276795" y="65366"/>
+                </a:cubicBezTo>
+                <a:cubicBezTo>
+                  <a:pt x="2611257" y="102259"/>
+                  <a:pt x="3203469" y="185035"/>
+                  <a:pt x="3534862" y="224925"/>
+                </a:cubicBezTo>
+                <a:cubicBezTo>
+                  <a:pt x="3866255" y="264815"/>
+                  <a:pt x="4065704" y="284760"/>
+                  <a:pt x="4265154" y="304705"/>
+                </a:cubicBezTo>
+              </a:path>
+            </a:pathLst>
+          </a:custGeom>
+          <a:ln w="28575"/>
+        </p:spPr>
+        <p:style>
+          <a:lnRef idx="1">
+            <a:schemeClr val="accent1"/>
+          </a:lnRef>
+          <a:fillRef idx="0">
+            <a:schemeClr val="accent1"/>
+          </a:fillRef>
+          <a:effectRef idx="0">
+            <a:schemeClr val="accent1"/>
+          </a:effectRef>
+          <a:fontRef idx="minor">
+            <a:schemeClr val="tx1"/>
+          </a:fontRef>
+        </p:style>
+        <p:txBody>
+          <a:bodyPr vert="horz" wrap="square" lIns="0" tIns="0" rIns="0" bIns="0" numCol="1" rtlCol="0" anchor="t" anchorCtr="0" compatLnSpc="1">
+            <a:prstTxWarp prst="textNoShape">
+              <a:avLst/>
+            </a:prstTxWarp>
+            <a:spAutoFit/>
+          </a:bodyPr>
+          <a:lstStyle/>
+          <a:p>
+            <a:pPr marL="0" marR="0" indent="0" algn="ctr" defTabSz="914400" rtl="0" eaLnBrk="1" fontAlgn="base" latinLnBrk="0" hangingPunct="1">
+              <a:lnSpc>
+                <a:spcPct val="100000"/>
+              </a:lnSpc>
+              <a:spcBef>
+                <a:spcPct val="50000"/>
+              </a:spcBef>
+              <a:spcAft>
+                <a:spcPct val="0"/>
+              </a:spcAft>
+              <a:buClrTx/>
+              <a:buSzTx/>
+              <a:buFontTx/>
+              <a:buNone/>
+              <a:tabLst/>
+            </a:pPr>
+            <a:endParaRPr kumimoji="0" lang="en-CN" sz="2400" b="0" i="0" u="none" strike="noStrike" cap="none" normalizeH="0" baseline="0" dirty="0">
+              <a:ln>
+                <a:noFill/>
+              </a:ln>
+              <a:solidFill>
+                <a:schemeClr val="tx1"/>
+              </a:solidFill>
+              <a:effectLst/>
+              <a:latin typeface="Times New Roman" pitchFamily="18" charset="0"/>
+              <a:ea typeface="宋体" pitchFamily="2" charset="-122"/>
+            </a:endParaRPr>
+          </a:p>
+        </p:txBody>
+      </p:sp>
+      <p:sp>
+        <p:nvSpPr>
+          <p:cNvPr id="9" name="Oval 8">
+            <a:extLst>
+              <a:ext uri="{FF2B5EF4-FFF2-40B4-BE49-F238E27FC236}">
+                <a16:creationId xmlns:a16="http://schemas.microsoft.com/office/drawing/2014/main" id="{E7E0400D-C805-1A75-AFB8-28B145D2240E}"/>
+              </a:ext>
+            </a:extLst>
+          </p:cNvPr>
+          <p:cNvSpPr/>
+          <p:nvPr/>
+        </p:nvSpPr>
+        <p:spPr>
+          <a:xfrm>
+            <a:off x="3267295" y="4236876"/>
+            <a:ext cx="64123" cy="68439"/>
+          </a:xfrm>
+          <a:prstGeom prst="ellipse">
             <a:avLst/>
           </a:prstGeom>
           <a:solidFill>
-            <a:srgbClr val="269FA0"/>
+            <a:schemeClr val="bg2">
+              <a:lumMod val="85000"/>
+              <a:lumOff val="15000"/>
+            </a:schemeClr>
           </a:solidFill>
         </p:spPr>
         <p:txBody>
@@ -31064,9 +31114,192 @@
           <a:lstStyle/>
           <a:p>
             <a:pPr algn="l"/>
-            <a:endParaRPr lang="zh-CN" altLang="en-US" b="1" dirty="0">
+            <a:endParaRPr lang="en-CN" b="1">
               <a:solidFill>
                 <a:srgbClr val="FF0000"/>
+              </a:solidFill>
+              <a:latin typeface="+mn-ea"/>
+              <a:ea typeface="+mn-ea"/>
+            </a:endParaRPr>
+          </a:p>
+        </p:txBody>
+      </p:sp>
+      <p:cxnSp>
+        <p:nvCxnSpPr>
+          <p:cNvPr id="17" name="Straight Connector 16">
+            <a:extLst>
+              <a:ext uri="{FF2B5EF4-FFF2-40B4-BE49-F238E27FC236}">
+                <a16:creationId xmlns:a16="http://schemas.microsoft.com/office/drawing/2014/main" id="{899E9F75-4F70-B8BF-6D8F-8AFA792FA1E6}"/>
+              </a:ext>
+            </a:extLst>
+          </p:cNvPr>
+          <p:cNvCxnSpPr>
+            <a:cxnSpLocks/>
+          </p:cNvCxnSpPr>
+          <p:nvPr/>
+        </p:nvCxnSpPr>
+        <p:spPr bwMode="auto">
+          <a:xfrm>
+            <a:off x="5225982" y="5515187"/>
+            <a:ext cx="441181" cy="0"/>
+          </a:xfrm>
+          <a:prstGeom prst="line">
+            <a:avLst/>
+          </a:prstGeom>
+          <a:ln w="28575">
+            <a:headEnd type="none" w="med" len="med"/>
+            <a:tailEnd type="none" w="med" len="med"/>
+          </a:ln>
+        </p:spPr>
+        <p:style>
+          <a:lnRef idx="1">
+            <a:schemeClr val="accent5"/>
+          </a:lnRef>
+          <a:fillRef idx="0">
+            <a:schemeClr val="accent5"/>
+          </a:fillRef>
+          <a:effectRef idx="0">
+            <a:schemeClr val="accent5"/>
+          </a:effectRef>
+          <a:fontRef idx="minor">
+            <a:schemeClr val="tx1"/>
+          </a:fontRef>
+        </p:style>
+      </p:cxnSp>
+      <p:sp>
+        <p:nvSpPr>
+          <p:cNvPr id="21" name="TextBox 20">
+            <a:extLst>
+              <a:ext uri="{FF2B5EF4-FFF2-40B4-BE49-F238E27FC236}">
+                <a16:creationId xmlns:a16="http://schemas.microsoft.com/office/drawing/2014/main" id="{E566414E-20BE-4C20-F054-6AF88375B45B}"/>
+              </a:ext>
+            </a:extLst>
+          </p:cNvPr>
+          <p:cNvSpPr txBox="1"/>
+          <p:nvPr/>
+        </p:nvSpPr>
+        <p:spPr>
+          <a:xfrm>
+            <a:off x="5678952" y="5376687"/>
+            <a:ext cx="1068413" cy="276999"/>
+          </a:xfrm>
+          <a:prstGeom prst="rect">
+            <a:avLst/>
+          </a:prstGeom>
+          <a:noFill/>
+        </p:spPr>
+        <p:txBody>
+          <a:bodyPr wrap="square">
+            <a:spAutoFit/>
+          </a:bodyPr>
+          <a:lstStyle/>
+          <a:p>
+            <a:r>
+              <a:rPr lang="zh-CN" altLang="en-US" sz="1200" b="1" dirty="0">
+                <a:solidFill>
+                  <a:schemeClr val="accent3"/>
+                </a:solidFill>
+                <a:latin typeface="+mn-ea"/>
+                <a:ea typeface="+mn-ea"/>
+              </a:rPr>
+              <a:t>非标准波形</a:t>
+            </a:r>
+            <a:endParaRPr lang="en-CN" sz="1200" b="1" dirty="0">
+              <a:solidFill>
+                <a:schemeClr val="accent3"/>
+              </a:solidFill>
+              <a:latin typeface="+mn-ea"/>
+              <a:ea typeface="+mn-ea"/>
+            </a:endParaRPr>
+          </a:p>
+        </p:txBody>
+      </p:sp>
+      <p:cxnSp>
+        <p:nvCxnSpPr>
+          <p:cNvPr id="22" name="Straight Connector 21">
+            <a:extLst>
+              <a:ext uri="{FF2B5EF4-FFF2-40B4-BE49-F238E27FC236}">
+                <a16:creationId xmlns:a16="http://schemas.microsoft.com/office/drawing/2014/main" id="{837C6C5B-21E4-E416-1632-286F62811EEC}"/>
+              </a:ext>
+            </a:extLst>
+          </p:cNvPr>
+          <p:cNvCxnSpPr>
+            <a:cxnSpLocks/>
+          </p:cNvCxnSpPr>
+          <p:nvPr/>
+        </p:nvCxnSpPr>
+        <p:spPr bwMode="auto">
+          <a:xfrm>
+            <a:off x="5225982" y="5239381"/>
+            <a:ext cx="441181" cy="0"/>
+          </a:xfrm>
+          <a:prstGeom prst="line">
+            <a:avLst/>
+          </a:prstGeom>
+          <a:ln w="28575">
+            <a:solidFill>
+              <a:schemeClr val="accent2"/>
+            </a:solidFill>
+            <a:headEnd type="none" w="med" len="med"/>
+            <a:tailEnd type="none" w="med" len="med"/>
+          </a:ln>
+        </p:spPr>
+        <p:style>
+          <a:lnRef idx="1">
+            <a:schemeClr val="accent5"/>
+          </a:lnRef>
+          <a:fillRef idx="0">
+            <a:schemeClr val="accent5"/>
+          </a:fillRef>
+          <a:effectRef idx="0">
+            <a:schemeClr val="accent5"/>
+          </a:effectRef>
+          <a:fontRef idx="minor">
+            <a:schemeClr val="tx1"/>
+          </a:fontRef>
+        </p:style>
+      </p:cxnSp>
+      <p:sp>
+        <p:nvSpPr>
+          <p:cNvPr id="23" name="TextBox 22">
+            <a:extLst>
+              <a:ext uri="{FF2B5EF4-FFF2-40B4-BE49-F238E27FC236}">
+                <a16:creationId xmlns:a16="http://schemas.microsoft.com/office/drawing/2014/main" id="{5F35411C-FC15-E549-EE41-6DCD0DF230F7}"/>
+              </a:ext>
+            </a:extLst>
+          </p:cNvPr>
+          <p:cNvSpPr txBox="1"/>
+          <p:nvPr/>
+        </p:nvSpPr>
+        <p:spPr>
+          <a:xfrm>
+            <a:off x="5678952" y="5100881"/>
+            <a:ext cx="1231358" cy="276999"/>
+          </a:xfrm>
+          <a:prstGeom prst="rect">
+            <a:avLst/>
+          </a:prstGeom>
+          <a:noFill/>
+        </p:spPr>
+        <p:txBody>
+          <a:bodyPr wrap="square">
+            <a:spAutoFit/>
+          </a:bodyPr>
+          <a:lstStyle/>
+          <a:p>
+            <a:r>
+              <a:rPr lang="zh-CN" altLang="en-US" sz="1200" b="1" dirty="0">
+                <a:solidFill>
+                  <a:schemeClr val="accent3"/>
+                </a:solidFill>
+                <a:latin typeface="+mn-ea"/>
+                <a:ea typeface="+mn-ea"/>
+              </a:rPr>
+              <a:t>标准海洋波形</a:t>
+            </a:r>
+            <a:endParaRPr lang="en-CN" sz="1200" b="1" dirty="0">
+              <a:solidFill>
+                <a:schemeClr val="accent3"/>
               </a:solidFill>
               <a:latin typeface="+mn-ea"/>
               <a:ea typeface="+mn-ea"/>
@@ -31077,7 +31310,7 @@
     </p:spTree>
     <p:extLst>
       <p:ext uri="{BB962C8B-B14F-4D97-AF65-F5344CB8AC3E}">
-        <p14:creationId xmlns:p14="http://schemas.microsoft.com/office/powerpoint/2010/main" val="2999177072"/>
+        <p14:creationId xmlns:p14="http://schemas.microsoft.com/office/powerpoint/2010/main" val="995212204"/>
       </p:ext>
     </p:extLst>
   </p:cSld>
@@ -31216,8 +31449,8 @@
         </p:nvSpPr>
         <p:spPr>
           <a:xfrm>
-            <a:off x="390941" y="1475297"/>
-            <a:ext cx="8362118" cy="3970318"/>
+            <a:off x="390941" y="1361834"/>
+            <a:ext cx="8362118" cy="4602991"/>
           </a:xfrm>
           <a:prstGeom prst="rect">
             <a:avLst/>
@@ -31230,9 +31463,13 @@
           </a:bodyPr>
           <a:lstStyle/>
           <a:p>
-            <a:pPr algn="just"/>
-            <a:r>
-              <a:rPr lang="zh-CN" altLang="en-US" dirty="0">
+            <a:pPr algn="just">
+              <a:lnSpc>
+                <a:spcPct val="150000"/>
+              </a:lnSpc>
+            </a:pPr>
+            <a:r>
+              <a:rPr lang="zh-CN" altLang="en-US" sz="2200" dirty="0">
                 <a:solidFill>
                   <a:srgbClr val="000000"/>
                 </a:solidFill>
@@ -31242,7 +31479,7 @@
               <a:t>﻿经过多年的发展，波形重跟踪被广泛用于水位监测中，具体包括：海洋波形重追踪方法、阈值法、</a:t>
             </a:r>
             <a:r>
-              <a:rPr lang="en-US" altLang="zh-CN" dirty="0">
+              <a:rPr lang="en-US" altLang="zh-CN" sz="2200" dirty="0">
                 <a:solidFill>
                   <a:srgbClr val="000000"/>
                 </a:solidFill>
@@ -31252,7 +31489,7 @@
               <a:t>OCOG</a:t>
             </a:r>
             <a:r>
-              <a:rPr lang="zh-CN" altLang="en-US" dirty="0">
+              <a:rPr lang="zh-CN" altLang="en-US" sz="2200" dirty="0">
                 <a:solidFill>
                   <a:srgbClr val="000000"/>
                 </a:solidFill>
@@ -31262,17 +31499,17 @@
               <a:t>、</a:t>
             </a:r>
             <a:r>
-              <a:rPr lang="en-US" altLang="zh-CN" dirty="0">
+              <a:rPr lang="en-US" altLang="zh-CN" sz="2200" dirty="0">
                 <a:solidFill>
                   <a:srgbClr val="000000"/>
                 </a:solidFill>
                 <a:latin typeface="+mn-ea"/>
                 <a:ea typeface="+mn-ea"/>
               </a:rPr>
-              <a:t> ICE1</a:t>
-            </a:r>
-            <a:r>
-              <a:rPr lang="zh-CN" altLang="en-US" dirty="0">
+              <a:t>ICE1</a:t>
+            </a:r>
+            <a:r>
+              <a:rPr lang="zh-CN" altLang="en-US" sz="2200" dirty="0">
                 <a:solidFill>
                   <a:srgbClr val="000000"/>
                 </a:solidFill>
@@ -31282,7 +31519,7 @@
               <a:t>、</a:t>
             </a:r>
             <a:r>
-              <a:rPr lang="en-US" altLang="zh-CN" dirty="0">
+              <a:rPr lang="en-US" altLang="zh-CN" sz="2200" dirty="0">
                 <a:solidFill>
                   <a:srgbClr val="000000"/>
                 </a:solidFill>
@@ -31292,7 +31529,7 @@
               <a:t>SAMOSA</a:t>
             </a:r>
             <a:r>
-              <a:rPr lang="zh-CN" altLang="en-US" dirty="0">
+              <a:rPr lang="zh-CN" altLang="en-US" sz="2200" dirty="0">
                 <a:solidFill>
                   <a:srgbClr val="000000"/>
                 </a:solidFill>
@@ -31301,7 +31538,7 @@
               </a:rPr>
               <a:t>算法等。</a:t>
             </a:r>
-            <a:endParaRPr lang="en-US" altLang="zh-CN" dirty="0">
+            <a:endParaRPr lang="en-US" altLang="zh-CN" sz="2200" dirty="0">
               <a:solidFill>
                 <a:srgbClr val="000000"/>
               </a:solidFill>
@@ -31311,10 +31548,13 @@
           </a:p>
           <a:p>
             <a:pPr marL="457200" indent="-457200" algn="just">
+              <a:lnSpc>
+                <a:spcPct val="150000"/>
+              </a:lnSpc>
               <a:buAutoNum type="arabicPeriod"/>
             </a:pPr>
             <a:r>
-              <a:rPr lang="zh-CN" altLang="en-US" dirty="0">
+              <a:rPr lang="zh-CN" altLang="en-US" sz="2200" dirty="0">
                 <a:solidFill>
                   <a:srgbClr val="000000"/>
                 </a:solidFill>
@@ -31323,7 +31563,7 @@
               </a:rPr>
               <a:t>海洋波形重追踪方法</a:t>
             </a:r>
-            <a:endParaRPr lang="en-US" altLang="zh-CN" dirty="0">
+            <a:endParaRPr lang="en-US" altLang="zh-CN" sz="2200" dirty="0">
               <a:solidFill>
                 <a:srgbClr val="000000"/>
               </a:solidFill>
@@ -31332,9 +31572,13 @@
             </a:endParaRPr>
           </a:p>
           <a:p>
-            <a:pPr algn="just"/>
-            <a:r>
-              <a:rPr lang="zh-CN" altLang="en-US" dirty="0">
+            <a:pPr algn="just">
+              <a:lnSpc>
+                <a:spcPct val="150000"/>
+              </a:lnSpc>
+            </a:pPr>
+            <a:r>
+              <a:rPr lang="zh-CN" altLang="en-US" sz="2200" dirty="0">
                 <a:solidFill>
                   <a:srgbClr val="000000"/>
                 </a:solidFill>
@@ -31344,7 +31588,7 @@
               <a:t>对应海洋观测任务，一般采用</a:t>
             </a:r>
             <a:r>
-              <a:rPr lang="en-US" altLang="zh-CN" dirty="0">
+              <a:rPr lang="en-US" altLang="zh-CN" sz="2200" dirty="0">
                 <a:solidFill>
                   <a:srgbClr val="000000"/>
                 </a:solidFill>
@@ -31354,7 +31598,7 @@
               <a:t>Brown</a:t>
             </a:r>
             <a:r>
-              <a:rPr lang="zh-CN" altLang="en-US" dirty="0">
+              <a:rPr lang="zh-CN" altLang="en-US" sz="2200" dirty="0">
                 <a:solidFill>
                   <a:srgbClr val="000000"/>
                 </a:solidFill>
@@ -31364,7 +31608,7 @@
               <a:t>（</a:t>
             </a:r>
             <a:r>
-              <a:rPr lang="en-US" altLang="zh-CN" dirty="0">
+              <a:rPr lang="en-US" altLang="zh-CN" sz="2200" dirty="0">
                 <a:solidFill>
                   <a:srgbClr val="000000"/>
                 </a:solidFill>
@@ -31374,7 +31618,7 @@
               <a:t>1977</a:t>
             </a:r>
             <a:r>
-              <a:rPr lang="zh-CN" altLang="en-US" dirty="0">
+              <a:rPr lang="zh-CN" altLang="en-US" sz="2200" dirty="0">
                 <a:solidFill>
                   <a:srgbClr val="000000"/>
                 </a:solidFill>
@@ -31384,7 +31628,7 @@
               <a:t>）提出的经典回波波形，海洋波形重追踪法</a:t>
             </a:r>
             <a:r>
-              <a:rPr lang="zh-CN" altLang="en-US" b="1" dirty="0">
+              <a:rPr lang="zh-CN" altLang="en-US" sz="2200" b="1" dirty="0">
                 <a:solidFill>
                   <a:srgbClr val="000000"/>
                 </a:solidFill>
@@ -31394,7 +31638,7 @@
               <a:t>采用加权最小二乘估计</a:t>
             </a:r>
             <a:r>
-              <a:rPr lang="zh-CN" altLang="en-US" dirty="0">
+              <a:rPr lang="zh-CN" altLang="en-US" sz="2200" dirty="0">
                 <a:solidFill>
                   <a:srgbClr val="000000"/>
                 </a:solidFill>
@@ -31403,7 +31647,7 @@
               </a:rPr>
               <a:t>将所测波形拟合成理论回波功率波形模型。</a:t>
             </a:r>
-            <a:endParaRPr lang="en-US" altLang="zh-CN" dirty="0">
+            <a:endParaRPr lang="en-US" altLang="zh-CN" sz="2200" dirty="0">
               <a:solidFill>
                 <a:srgbClr val="000000"/>
               </a:solidFill>
@@ -31412,18 +31656,22 @@
             </a:endParaRPr>
           </a:p>
           <a:p>
-            <a:pPr algn="just"/>
-            <a:r>
-              <a:rPr lang="zh-CN" altLang="en-US" dirty="0">
+            <a:pPr algn="just">
+              <a:lnSpc>
+                <a:spcPct val="150000"/>
+              </a:lnSpc>
+            </a:pPr>
+            <a:r>
+              <a:rPr lang="zh-CN" altLang="en-US" sz="2200" dirty="0">
                 <a:solidFill>
                   <a:srgbClr val="000000"/>
                 </a:solidFill>
                 <a:latin typeface="+mn-ea"/>
                 <a:ea typeface="+mn-ea"/>
               </a:rPr>
-              <a:t>尽管海洋波形重追踪法的最佳应用场景为海面，然而在其他地表，也可使用该方法。</a:t>
-            </a:r>
-            <a:endParaRPr lang="en-US" altLang="zh-CN" dirty="0">
+              <a:t>尽管海洋波形重追踪法的最佳应用场景为海面，但在其他地表高程测量时，也常使用该方法。</a:t>
+            </a:r>
+            <a:endParaRPr lang="en-US" altLang="zh-CN" sz="2200" dirty="0">
               <a:solidFill>
                 <a:srgbClr val="000000"/>
               </a:solidFill>
@@ -31447,8 +31695,8 @@
         </p:nvSpPr>
         <p:spPr>
           <a:xfrm>
-            <a:off x="327025" y="5934413"/>
-            <a:ext cx="8601075" cy="646331"/>
+            <a:off x="327025" y="6061225"/>
+            <a:ext cx="8601075" cy="584775"/>
           </a:xfrm>
           <a:prstGeom prst="rect">
             <a:avLst/>
@@ -31463,7 +31711,7 @@
           <a:p>
             <a:pPr algn="just"/>
             <a:r>
-              <a:rPr lang="zh-CN" altLang="en-US" sz="1800" dirty="0">
+              <a:rPr lang="zh-CN" altLang="en-US" sz="1600" dirty="0">
                 <a:solidFill>
                   <a:srgbClr val="0070C0"/>
                 </a:solidFill>
@@ -36066,7 +36314,7 @@
                 <a:latin typeface="+mn-ea"/>
                 <a:ea typeface="+mn-ea"/>
               </a:rPr>
-              <a:t>针对合成孔径雷达高度计回波波形处理，欧洲航天局基于合成孔径雷达高度计的</a:t>
+              <a:t>针对合成孔径雷达高度计回波波形处理，欧洲航天局基于合成孔径雷达高度计</a:t>
             </a:r>
             <a:r>
               <a:rPr lang="zh-CN" altLang="en-US" sz="2000" b="1" dirty="0">
@@ -36872,7 +37120,7 @@
         <p:spPr>
           <a:xfrm>
             <a:off x="424747" y="1576061"/>
-            <a:ext cx="7948806" cy="2038443"/>
+            <a:ext cx="8141576" cy="1576778"/>
           </a:xfrm>
           <a:prstGeom prst="rect">
             <a:avLst/>
@@ -37032,7 +37280,7 @@
                 <a:latin typeface="+mn-ea"/>
                 <a:ea typeface="+mn-ea"/>
               </a:rPr>
-              <a:t>将电磁能量以定向方式发射至空间之中，借由接收空间内存在物体所反射之电波，可以计算出该物体之方向、高度、速度、相对距离，并且可以探测物体的形状。</a:t>
+              <a:t>将电磁能量以定向方式发射至空间之中，通过空间中物体所反射之电波，可以计算出该物体之距离、方向、高度、速度，以及物体的形状等信息。</a:t>
             </a:r>
             <a:endParaRPr lang="en-US" altLang="zh-CN" sz="2000" dirty="0">
               <a:solidFill>
@@ -37058,7 +37306,7 @@
         </p:nvGrpSpPr>
         <p:grpSpPr>
           <a:xfrm>
-            <a:off x="2517049" y="3429000"/>
+            <a:off x="2517049" y="3422326"/>
             <a:ext cx="3490767" cy="1869886"/>
             <a:chOff x="3133233" y="4012514"/>
             <a:chExt cx="2872519" cy="1401170"/>
@@ -37535,6 +37783,51 @@
           </a:p>
         </p:txBody>
       </p:sp>
+      <p:pic>
+        <p:nvPicPr>
+          <p:cNvPr id="1026" name="Picture 2" descr="034 雷达天线- 机械基础虚拟实验室">
+            <a:extLst>
+              <a:ext uri="{FF2B5EF4-FFF2-40B4-BE49-F238E27FC236}">
+                <a16:creationId xmlns:a16="http://schemas.microsoft.com/office/drawing/2014/main" id="{70B4C21D-4438-67A7-B332-899FEE7F5945}"/>
+              </a:ext>
+            </a:extLst>
+          </p:cNvPr>
+          <p:cNvPicPr>
+            <a:picLocks noChangeAspect="1" noChangeArrowheads="1"/>
+          </p:cNvPicPr>
+          <p:nvPr/>
+        </p:nvPicPr>
+        <p:blipFill rotWithShape="1">
+          <a:blip r:embed="rId4">
+            <a:extLst>
+              <a:ext uri="{28A0092B-C50C-407E-A947-70E740481C1C}">
+                <a14:useLocalDpi xmlns:a14="http://schemas.microsoft.com/office/drawing/2010/main" val="0"/>
+              </a:ext>
+            </a:extLst>
+          </a:blip>
+          <a:srcRect t="4412" r="7466" b="1578"/>
+          <a:stretch/>
+        </p:blipFill>
+        <p:spPr bwMode="auto">
+          <a:xfrm>
+            <a:off x="1598482" y="4000059"/>
+            <a:ext cx="857220" cy="775735"/>
+          </a:xfrm>
+          <a:prstGeom prst="rect">
+            <a:avLst/>
+          </a:prstGeom>
+          <a:noFill/>
+          <a:extLst>
+            <a:ext uri="{909E8E84-426E-40DD-AFC4-6F175D3DCCD1}">
+              <a14:hiddenFill xmlns:a14="http://schemas.microsoft.com/office/drawing/2010/main">
+                <a:solidFill>
+                  <a:srgbClr val="FFFFFF"/>
+                </a:solidFill>
+              </a14:hiddenFill>
+            </a:ext>
+          </a:extLst>
+        </p:spPr>
+      </p:pic>
     </p:spTree>
     <p:extLst>
       <p:ext uri="{BB962C8B-B14F-4D97-AF65-F5344CB8AC3E}">
@@ -37666,7 +37959,7 @@
         <p:spPr>
           <a:xfrm>
             <a:off x="424747" y="1576061"/>
-            <a:ext cx="7948806" cy="961225"/>
+            <a:ext cx="8232018" cy="961225"/>
           </a:xfrm>
           <a:prstGeom prst="rect">
             <a:avLst/>
@@ -37692,7 +37985,7 @@
                 <a:latin typeface="+mn-ea"/>
                 <a:ea typeface="+mn-ea"/>
               </a:rPr>
-              <a:t>雷达发射电波的频率范围。大多数雷达工作在超短波及微波波段，其波长范围为</a:t>
+              <a:t>雷达发射电波的频率范围。大多数雷达为超短波及微波波段，其波长范围为</a:t>
             </a:r>
             <a:r>
               <a:rPr lang="en-US" altLang="zh-CN" sz="2000" dirty="0">
